--- a/slides/modules/m22-resilience-multicluster-dr.pptx
+++ b/slides/modules/m22-resilience-multicluster-dr.pptx
@@ -13,6 +13,11 @@
     <p:sldId id="261" r:id="rId13"/>
     <p:sldId id="262" r:id="rId14"/>
     <p:sldId id="263" r:id="rId15"/>
+    <p:sldId id="264" r:id="rId16"/>
+    <p:sldId id="265" r:id="rId17"/>
+    <p:sldId id="266" r:id="rId18"/>
+    <p:sldId id="267" r:id="rId19"/>
+    <p:sldId id="268" r:id="rId20"/>
   </p:sldIdLst>
   <p:sldSz cx="12191695" cy="6858000" type="screen4x3"/>
   <p:notesSz cx="6858000" cy="9144000"/>
@@ -534,6 +539,216 @@
 </p:notes>
 </file>
 
+<file path=ppt/notesSlides/notesSlide10.xml><?xml version="1.0" encoding="utf-8"?>
+<p:notes xmlns:a="http://schemas.openxmlformats.org/drawingml/2006/main" xmlns:p="http://schemas.openxmlformats.org/presentationml/2006/main" xmlns:r="http://schemas.openxmlformats.org/officeDocument/2006/relationships">
+  <p:cSld>
+    <p:spTree>
+      <p:nvGrpSpPr>
+        <p:cNvPr id="1" name=""/>
+        <p:cNvGrpSpPr/>
+        <p:nvPr/>
+      </p:nvGrpSpPr>
+      <p:grpSpPr>
+        <a:xfrm>
+          <a:off x="0" y="0"/>
+          <a:ext cx="0" cy="0"/>
+          <a:chOff x="0" y="0"/>
+          <a:chExt cx="0" cy="0"/>
+        </a:xfrm>
+      </p:grpSpPr>
+      <p:sp>
+        <p:nvSpPr>
+          <p:cNvPr id="2" name="Slide Image Placeholder 1"/>
+          <p:cNvSpPr>
+            <a:spLocks noGrp="1"/>
+          </p:cNvSpPr>
+          <p:nvPr>
+            <p:ph type="sldImg" idx="2"/>
+          </p:nvPr>
+        </p:nvSpPr>
+        <p:spPr/>
+      </p:sp>
+      <p:sp>
+        <p:nvSpPr>
+          <p:cNvPr id="3" name="Notes Placeholder 2"/>
+          <p:cNvSpPr>
+            <a:spLocks noGrp="1"/>
+          </p:cNvSpPr>
+          <p:nvPr>
+            <p:ph type="body" idx="3" sz="quarter"/>
+          </p:nvPr>
+        </p:nvSpPr>
+        <p:spPr/>
+        <p:txBody>
+          <a:bodyPr/>
+          <a:lstStyle/>
+          <a:p>
+            <a:r>
+              <a:t>Concept diagram: Rhsi van.</a:t>
+            </a:r>
+          </a:p>
+        </p:txBody>
+      </p:sp>
+      <p:sp>
+        <p:nvSpPr>
+          <p:cNvPr id="4" name="Slide Number Placeholder 3"/>
+          <p:cNvSpPr>
+            <a:spLocks noGrp="1"/>
+          </p:cNvSpPr>
+          <p:nvPr>
+            <p:ph type="sldNum" idx="5" sz="quarter"/>
+          </p:nvPr>
+        </p:nvSpPr>
+        <p:spPr/>
+      </p:sp>
+    </p:spTree>
+  </p:cSld>
+  <p:clrMapOvr>
+    <a:masterClrMapping/>
+  </p:clrMapOvr>
+</p:notes>
+</file>
+
+<file path=ppt/notesSlides/notesSlide11.xml><?xml version="1.0" encoding="utf-8"?>
+<p:notes xmlns:a="http://schemas.openxmlformats.org/drawingml/2006/main" xmlns:p="http://schemas.openxmlformats.org/presentationml/2006/main" xmlns:r="http://schemas.openxmlformats.org/officeDocument/2006/relationships">
+  <p:cSld>
+    <p:spTree>
+      <p:nvGrpSpPr>
+        <p:cNvPr id="1" name=""/>
+        <p:cNvGrpSpPr/>
+        <p:nvPr/>
+      </p:nvGrpSpPr>
+      <p:grpSpPr>
+        <a:xfrm>
+          <a:off x="0" y="0"/>
+          <a:ext cx="0" cy="0"/>
+          <a:chOff x="0" y="0"/>
+          <a:chExt cx="0" cy="0"/>
+        </a:xfrm>
+      </p:grpSpPr>
+      <p:sp>
+        <p:nvSpPr>
+          <p:cNvPr id="2" name="Slide Image Placeholder 1"/>
+          <p:cNvSpPr>
+            <a:spLocks noGrp="1"/>
+          </p:cNvSpPr>
+          <p:nvPr>
+            <p:ph type="sldImg" idx="2"/>
+          </p:nvPr>
+        </p:nvSpPr>
+        <p:spPr/>
+      </p:sp>
+      <p:sp>
+        <p:nvSpPr>
+          <p:cNvPr id="3" name="Notes Placeholder 2"/>
+          <p:cNvSpPr>
+            <a:spLocks noGrp="1"/>
+          </p:cNvSpPr>
+          <p:nvPr>
+            <p:ph type="body" idx="3" sz="quarter"/>
+          </p:nvPr>
+        </p:nvSpPr>
+        <p:spPr/>
+        <p:txBody>
+          <a:bodyPr/>
+          <a:lstStyle/>
+          <a:p>
+            <a:r>
+              <a:t>Concept diagram: Dr safety net.</a:t>
+            </a:r>
+          </a:p>
+        </p:txBody>
+      </p:sp>
+      <p:sp>
+        <p:nvSpPr>
+          <p:cNvPr id="4" name="Slide Number Placeholder 3"/>
+          <p:cNvSpPr>
+            <a:spLocks noGrp="1"/>
+          </p:cNvSpPr>
+          <p:nvPr>
+            <p:ph type="sldNum" idx="5" sz="quarter"/>
+          </p:nvPr>
+        </p:nvSpPr>
+        <p:spPr/>
+      </p:sp>
+    </p:spTree>
+  </p:cSld>
+  <p:clrMapOvr>
+    <a:masterClrMapping/>
+  </p:clrMapOvr>
+</p:notes>
+</file>
+
+<file path=ppt/notesSlides/notesSlide12.xml><?xml version="1.0" encoding="utf-8"?>
+<p:notes xmlns:a="http://schemas.openxmlformats.org/drawingml/2006/main" xmlns:p="http://schemas.openxmlformats.org/presentationml/2006/main" xmlns:r="http://schemas.openxmlformats.org/officeDocument/2006/relationships">
+  <p:cSld>
+    <p:spTree>
+      <p:nvGrpSpPr>
+        <p:cNvPr id="1" name=""/>
+        <p:cNvGrpSpPr/>
+        <p:nvPr/>
+      </p:nvGrpSpPr>
+      <p:grpSpPr>
+        <a:xfrm>
+          <a:off x="0" y="0"/>
+          <a:ext cx="0" cy="0"/>
+          <a:chOff x="0" y="0"/>
+          <a:chExt cx="0" cy="0"/>
+        </a:xfrm>
+      </p:grpSpPr>
+      <p:sp>
+        <p:nvSpPr>
+          <p:cNvPr id="2" name="Slide Image Placeholder 1"/>
+          <p:cNvSpPr>
+            <a:spLocks noGrp="1"/>
+          </p:cNvSpPr>
+          <p:nvPr>
+            <p:ph type="sldImg" idx="2"/>
+          </p:nvPr>
+        </p:nvSpPr>
+        <p:spPr/>
+      </p:sp>
+      <p:sp>
+        <p:nvSpPr>
+          <p:cNvPr id="3" name="Notes Placeholder 2"/>
+          <p:cNvSpPr>
+            <a:spLocks noGrp="1"/>
+          </p:cNvSpPr>
+          <p:nvPr>
+            <p:ph type="body" idx="3" sz="quarter"/>
+          </p:nvPr>
+        </p:nvSpPr>
+        <p:spPr/>
+        <p:txBody>
+          <a:bodyPr/>
+          <a:lstStyle/>
+          <a:p>
+            <a:r>
+              <a:t>Concept diagram: What you built.</a:t>
+            </a:r>
+          </a:p>
+        </p:txBody>
+      </p:sp>
+      <p:sp>
+        <p:nvSpPr>
+          <p:cNvPr id="4" name="Slide Number Placeholder 3"/>
+          <p:cNvSpPr>
+            <a:spLocks noGrp="1"/>
+          </p:cNvSpPr>
+          <p:nvPr>
+            <p:ph type="sldNum" idx="5" sz="quarter"/>
+          </p:nvPr>
+        </p:nvSpPr>
+        <p:spPr/>
+      </p:sp>
+    </p:spTree>
+  </p:cSld>
+  <p:clrMapOvr>
+    <a:masterClrMapping/>
+  </p:clrMapOvr>
+</p:notes>
+</file>
+
 <file path=ppt/notesSlides/notesSlide2.xml><?xml version="1.0" encoding="utf-8"?>
 <p:notes xmlns:a="http://schemas.openxmlformats.org/drawingml/2006/main" xmlns:p="http://schemas.openxmlformats.org/presentationml/2006/main" xmlns:r="http://schemas.openxmlformats.org/officeDocument/2006/relationships">
   <p:cSld>
@@ -930,6 +1145,146 @@
           <a:p>
             <a:r>
               <a:t>Close on the decision and the transfer. Match the mechanism to the failure: a pod, node, or zone loss is replicas plus a PodDisruptionBudget plus spread — from Observability and Deployment Targets &amp; Scheduling — not a second site; the loss of a whole site or cluster is mesh cross-site failover, not more replicas in the site that died; connecting real sites or data centers with no flat network is RHSI, an add-on, not a VPN; destroyed or corrupt DATA is an OADP restore; and standing a platform back up elsewhere is a GitOps re-materialization from GitOps at Scale plus OADP for the data. Then take the questions back to your org. Do you fail over to your second site AUTOMATICALLY, or is it a 3-a.m. runbook — because a warm site nobody has ever cut over to is a hope, not a capability, and the "scale the site to zero and watch the client keep working" drill is exactly the game-day to run. Which rung does each of your resilience measures actually absorb — is there anything for the SITE rung, or does "we have replicas" quietly stand in for a failover story you don't have? And where's the line between the app team's job and the platform's — do teams own in-site resilience and failover while the platform owns backup, restore, and re-materialization, or do they blur it and either over-rely on an untested backup or hand-roll DR the platform already provides? The honest core: resilience keeps a site up, failover keeps the service up, and the platform's net catches what neither can.</a:t>
+            </a:r>
+          </a:p>
+        </p:txBody>
+      </p:sp>
+      <p:sp>
+        <p:nvSpPr>
+          <p:cNvPr id="4" name="Slide Number Placeholder 3"/>
+          <p:cNvSpPr>
+            <a:spLocks noGrp="1"/>
+          </p:cNvSpPr>
+          <p:nvPr>
+            <p:ph type="sldNum" idx="5" sz="quarter"/>
+          </p:nvPr>
+        </p:nvSpPr>
+        <p:spPr/>
+      </p:sp>
+    </p:spTree>
+  </p:cSld>
+  <p:clrMapOvr>
+    <a:masterClrMapping/>
+  </p:clrMapOvr>
+</p:notes>
+</file>
+
+<file path=ppt/notesSlides/notesSlide8.xml><?xml version="1.0" encoding="utf-8"?>
+<p:notes xmlns:a="http://schemas.openxmlformats.org/drawingml/2006/main" xmlns:p="http://schemas.openxmlformats.org/presentationml/2006/main" xmlns:r="http://schemas.openxmlformats.org/officeDocument/2006/relationships">
+  <p:cSld>
+    <p:spTree>
+      <p:nvGrpSpPr>
+        <p:cNvPr id="1" name=""/>
+        <p:cNvGrpSpPr/>
+        <p:nvPr/>
+      </p:nvGrpSpPr>
+      <p:grpSpPr>
+        <a:xfrm>
+          <a:off x="0" y="0"/>
+          <a:ext cx="0" cy="0"/>
+          <a:chOff x="0" y="0"/>
+          <a:chExt cx="0" cy="0"/>
+        </a:xfrm>
+      </p:grpSpPr>
+      <p:sp>
+        <p:nvSpPr>
+          <p:cNvPr id="2" name="Slide Image Placeholder 1"/>
+          <p:cNvSpPr>
+            <a:spLocks noGrp="1"/>
+          </p:cNvSpPr>
+          <p:nvPr>
+            <p:ph type="sldImg" idx="2"/>
+          </p:nvPr>
+        </p:nvSpPr>
+        <p:spPr/>
+      </p:sp>
+      <p:sp>
+        <p:nvSpPr>
+          <p:cNvPr id="3" name="Notes Placeholder 2"/>
+          <p:cNvSpPr>
+            <a:spLocks noGrp="1"/>
+          </p:cNvSpPr>
+          <p:nvPr>
+            <p:ph type="body" idx="3" sz="quarter"/>
+          </p:nvPr>
+        </p:nvSpPr>
+        <p:spPr/>
+        <p:txBody>
+          <a:bodyPr/>
+          <a:lstStyle/>
+          <a:p>
+            <a:r>
+              <a:t>Concept diagram: Resilience ladder.</a:t>
+            </a:r>
+          </a:p>
+        </p:txBody>
+      </p:sp>
+      <p:sp>
+        <p:nvSpPr>
+          <p:cNvPr id="4" name="Slide Number Placeholder 3"/>
+          <p:cNvSpPr>
+            <a:spLocks noGrp="1"/>
+          </p:cNvSpPr>
+          <p:nvPr>
+            <p:ph type="sldNum" idx="5" sz="quarter"/>
+          </p:nvPr>
+        </p:nvSpPr>
+        <p:spPr/>
+      </p:sp>
+    </p:spTree>
+  </p:cSld>
+  <p:clrMapOvr>
+    <a:masterClrMapping/>
+  </p:clrMapOvr>
+</p:notes>
+</file>
+
+<file path=ppt/notesSlides/notesSlide9.xml><?xml version="1.0" encoding="utf-8"?>
+<p:notes xmlns:a="http://schemas.openxmlformats.org/drawingml/2006/main" xmlns:p="http://schemas.openxmlformats.org/presentationml/2006/main" xmlns:r="http://schemas.openxmlformats.org/officeDocument/2006/relationships">
+  <p:cSld>
+    <p:spTree>
+      <p:nvGrpSpPr>
+        <p:cNvPr id="1" name=""/>
+        <p:cNvGrpSpPr/>
+        <p:nvPr/>
+      </p:nvGrpSpPr>
+      <p:grpSpPr>
+        <a:xfrm>
+          <a:off x="0" y="0"/>
+          <a:ext cx="0" cy="0"/>
+          <a:chOff x="0" y="0"/>
+          <a:chExt cx="0" cy="0"/>
+        </a:xfrm>
+      </p:grpSpPr>
+      <p:sp>
+        <p:nvSpPr>
+          <p:cNvPr id="2" name="Slide Image Placeholder 1"/>
+          <p:cNvSpPr>
+            <a:spLocks noGrp="1"/>
+          </p:cNvSpPr>
+          <p:nvPr>
+            <p:ph type="sldImg" idx="2"/>
+          </p:nvPr>
+        </p:nvSpPr>
+        <p:spPr/>
+      </p:sp>
+      <p:sp>
+        <p:nvSpPr>
+          <p:cNvPr id="3" name="Notes Placeholder 2"/>
+          <p:cNvSpPr>
+            <a:spLocks noGrp="1"/>
+          </p:cNvSpPr>
+          <p:nvPr>
+            <p:ph type="body" idx="3" sz="quarter"/>
+          </p:nvPr>
+        </p:nvSpPr>
+        <p:spPr/>
+        <p:txBody>
+          <a:bodyPr/>
+          <a:lstStyle/>
+          <a:p>
+            <a:r>
+              <a:t>Concept diagram: Mesh failover.</a:t>
             </a:r>
           </a:p>
         </p:txBody>
@@ -4138,6 +4493,1470 @@
 </p:sld>
 </file>
 
+<file path=ppt/slides/slide10.xml><?xml version="1.0" encoding="utf-8"?>
+<p:sld xmlns:a="http://schemas.openxmlformats.org/drawingml/2006/main" xmlns:p="http://schemas.openxmlformats.org/presentationml/2006/main" xmlns:r="http://schemas.openxmlformats.org/officeDocument/2006/relationships">
+  <p:cSld>
+    <p:spTree>
+      <p:nvGrpSpPr>
+        <p:cNvPr id="1" name=""/>
+        <p:cNvGrpSpPr/>
+        <p:nvPr/>
+      </p:nvGrpSpPr>
+      <p:grpSpPr/>
+      <p:pic>
+        <p:nvPicPr>
+          <p:cNvPr id="2" name="Picture 1" descr="redhat_logo.jpg"/>
+          <p:cNvPicPr>
+            <a:picLocks noChangeAspect="1"/>
+          </p:cNvPicPr>
+          <p:nvPr/>
+        </p:nvPicPr>
+        <p:blipFill>
+          <a:blip r:embed="rId2"/>
+          <a:stretch>
+            <a:fillRect/>
+          </a:stretch>
+        </p:blipFill>
+        <p:spPr>
+          <a:xfrm>
+            <a:off x="10326319" y="475488"/>
+            <a:ext cx="1024128" cy="242248"/>
+          </a:xfrm>
+          <a:prstGeom prst="rect">
+            <a:avLst/>
+          </a:prstGeom>
+        </p:spPr>
+      </p:pic>
+      <p:sp>
+        <p:nvSpPr>
+          <p:cNvPr id="3" name="TextBox 2"/>
+          <p:cNvSpPr txBox="1"/>
+          <p:nvPr/>
+        </p:nvSpPr>
+        <p:spPr>
+          <a:xfrm>
+            <a:off x="841248" y="548640"/>
+            <a:ext cx="8595360" cy="274320"/>
+          </a:xfrm>
+          <a:prstGeom prst="rect">
+            <a:avLst/>
+          </a:prstGeom>
+          <a:noFill/>
+        </p:spPr>
+        <p:txBody>
+          <a:bodyPr wrap="square" anchor="t" lIns="0" rIns="0" tIns="0" bIns="0">
+            <a:spAutoFit/>
+          </a:bodyPr>
+          <a:lstStyle/>
+          <a:p>
+            <a:pPr algn="l">
+              <a:lnSpc>
+                <a:spcPct val="106000"/>
+              </a:lnSpc>
+              <a:spcBef>
+                <a:spcPts val="0"/>
+              </a:spcBef>
+              <a:spcAft>
+                <a:spcPts val="0"/>
+              </a:spcAft>
+            </a:pPr>
+            <a:r>
+              <a:rPr sz="1250" b="1" spc="220">
+                <a:solidFill>
+                  <a:srgbClr val="EE0000"/>
+                </a:solidFill>
+                <a:latin typeface="Red Hat Display"/>
+              </a:rPr>
+              <a:t>M22 · RESILIENCE, MULTI-CLUSTER &amp; DR</a:t>
+            </a:r>
+          </a:p>
+        </p:txBody>
+      </p:sp>
+      <p:sp>
+        <p:nvSpPr>
+          <p:cNvPr id="4" name="TextBox 3"/>
+          <p:cNvSpPr txBox="1"/>
+          <p:nvPr/>
+        </p:nvSpPr>
+        <p:spPr>
+          <a:xfrm>
+            <a:off x="841248" y="877824"/>
+            <a:ext cx="10515600" cy="548640"/>
+          </a:xfrm>
+          <a:prstGeom prst="rect">
+            <a:avLst/>
+          </a:prstGeom>
+          <a:noFill/>
+        </p:spPr>
+        <p:txBody>
+          <a:bodyPr wrap="none" anchor="t" lIns="0" rIns="0" tIns="0" bIns="0">
+            <a:spAutoFit/>
+          </a:bodyPr>
+          <a:lstStyle/>
+          <a:p>
+            <a:pPr algn="l">
+              <a:lnSpc>
+                <a:spcPct val="100000"/>
+              </a:lnSpc>
+              <a:spcBef>
+                <a:spcPts val="0"/>
+              </a:spcBef>
+              <a:spcAft>
+                <a:spcPts val="0"/>
+              </a:spcAft>
+            </a:pPr>
+            <a:r>
+              <a:rPr sz="2500" b="1">
+                <a:solidFill>
+                  <a:srgbClr val="1A1A1A"/>
+                </a:solidFill>
+                <a:latin typeface="Red Hat Display"/>
+              </a:rPr>
+              <a:t>Mesh failover</a:t>
+            </a:r>
+          </a:p>
+        </p:txBody>
+      </p:sp>
+      <p:cxnSp>
+        <p:nvCxnSpPr>
+          <p:cNvPr id="5" name="Connector 4"/>
+          <p:cNvCxnSpPr/>
+          <p:nvPr/>
+        </p:nvCxnSpPr>
+        <p:spPr>
+          <a:xfrm>
+            <a:off x="841248" y="1554480"/>
+            <a:ext cx="1371600" cy="0"/>
+          </a:xfrm>
+          <a:prstGeom prst="bentConnector3">
+            <a:avLst/>
+          </a:prstGeom>
+          <a:ln w="31750">
+            <a:solidFill>
+              <a:srgbClr val="EE0000"/>
+            </a:solidFill>
+          </a:ln>
+          <a:effectLst/>
+        </p:spPr>
+        <p:style>
+          <a:lnRef idx="2">
+            <a:schemeClr val="accent1"/>
+          </a:lnRef>
+          <a:fillRef idx="0">
+            <a:schemeClr val="accent1"/>
+          </a:fillRef>
+          <a:effectRef idx="1">
+            <a:schemeClr val="accent1"/>
+          </a:effectRef>
+          <a:fontRef idx="minor">
+            <a:schemeClr val="tx1"/>
+          </a:fontRef>
+        </p:style>
+      </p:cxnSp>
+      <p:sp>
+        <p:nvSpPr>
+          <p:cNvPr id="6" name="Rounded Rectangle 5"/>
+          <p:cNvSpPr/>
+          <p:nvPr/>
+        </p:nvSpPr>
+        <p:spPr>
+          <a:xfrm>
+            <a:off x="841248" y="2331720"/>
+            <a:ext cx="10509199" cy="3794760"/>
+          </a:xfrm>
+          <a:prstGeom prst="roundRect">
+            <a:avLst>
+              <a:gd name="adj" fmla="val 4000"/>
+            </a:avLst>
+          </a:prstGeom>
+          <a:solidFill>
+            <a:srgbClr val="FFFFFF"/>
+          </a:solidFill>
+          <a:ln w="15240">
+            <a:solidFill>
+              <a:srgbClr val="DDE1E6"/>
+            </a:solidFill>
+          </a:ln>
+          <a:effectLst/>
+        </p:spPr>
+        <p:style>
+          <a:lnRef idx="1">
+            <a:schemeClr val="accent1"/>
+          </a:lnRef>
+          <a:fillRef idx="3">
+            <a:schemeClr val="accent1"/>
+          </a:fillRef>
+          <a:effectRef idx="2">
+            <a:schemeClr val="accent1"/>
+          </a:effectRef>
+          <a:fontRef idx="minor">
+            <a:schemeClr val="lt1"/>
+          </a:fontRef>
+        </p:style>
+        <p:txBody>
+          <a:bodyPr rtlCol="0" anchor="ctr"/>
+          <a:lstStyle/>
+          <a:p>
+            <a:pPr algn="ctr"/>
+          </a:p>
+        </p:txBody>
+      </p:sp>
+      <p:pic>
+        <p:nvPicPr>
+          <p:cNvPr id="7" name="Picture 6" descr="02-mesh-failover.png"/>
+          <p:cNvPicPr>
+            <a:picLocks noChangeAspect="1"/>
+          </p:cNvPicPr>
+          <p:nvPr/>
+        </p:nvPicPr>
+        <p:blipFill>
+          <a:blip r:embed="rId3"/>
+          <a:stretch>
+            <a:fillRect/>
+          </a:stretch>
+        </p:blipFill>
+        <p:spPr>
+          <a:xfrm>
+            <a:off x="1042416" y="2599368"/>
+            <a:ext cx="10106863" cy="3259463"/>
+          </a:xfrm>
+          <a:prstGeom prst="rect">
+            <a:avLst/>
+          </a:prstGeom>
+        </p:spPr>
+      </p:pic>
+      <p:cxnSp>
+        <p:nvCxnSpPr>
+          <p:cNvPr id="8" name="Connector 7"/>
+          <p:cNvCxnSpPr/>
+          <p:nvPr/>
+        </p:nvCxnSpPr>
+        <p:spPr>
+          <a:xfrm>
+            <a:off x="841248" y="6437376"/>
+            <a:ext cx="10509199" cy="0"/>
+          </a:xfrm>
+          <a:prstGeom prst="bentConnector3">
+            <a:avLst/>
+          </a:prstGeom>
+          <a:ln w="12700">
+            <a:solidFill>
+              <a:srgbClr val="DDE1E6"/>
+            </a:solidFill>
+          </a:ln>
+          <a:effectLst/>
+        </p:spPr>
+        <p:style>
+          <a:lnRef idx="2">
+            <a:schemeClr val="accent1"/>
+          </a:lnRef>
+          <a:fillRef idx="0">
+            <a:schemeClr val="accent1"/>
+          </a:fillRef>
+          <a:effectRef idx="1">
+            <a:schemeClr val="accent1"/>
+          </a:effectRef>
+          <a:fontRef idx="minor">
+            <a:schemeClr val="tx1"/>
+          </a:fontRef>
+        </p:style>
+      </p:cxnSp>
+      <p:sp>
+        <p:nvSpPr>
+          <p:cNvPr id="9" name="TextBox 8"/>
+          <p:cNvSpPr txBox="1"/>
+          <p:nvPr/>
+        </p:nvSpPr>
+        <p:spPr>
+          <a:xfrm>
+            <a:off x="841248" y="6473952"/>
+            <a:ext cx="7315200" cy="274320"/>
+          </a:xfrm>
+          <a:prstGeom prst="rect">
+            <a:avLst/>
+          </a:prstGeom>
+          <a:noFill/>
+        </p:spPr>
+        <p:txBody>
+          <a:bodyPr wrap="square" anchor="t" lIns="0" rIns="0" tIns="0" bIns="0">
+            <a:spAutoFit/>
+          </a:bodyPr>
+          <a:lstStyle/>
+          <a:p>
+            <a:pPr algn="l">
+              <a:lnSpc>
+                <a:spcPct val="106000"/>
+              </a:lnSpc>
+              <a:spcBef>
+                <a:spcPts val="0"/>
+              </a:spcBef>
+              <a:spcAft>
+                <a:spcPts val="0"/>
+              </a:spcAft>
+            </a:pPr>
+            <a:r>
+              <a:rPr sz="950" b="0">
+                <a:solidFill>
+                  <a:srgbClr val="8A9099"/>
+                </a:solidFill>
+                <a:latin typeface="Red Hat Text"/>
+              </a:rPr>
+              <a:t>CONFIDENTIAL</a:t>
+            </a:r>
+          </a:p>
+        </p:txBody>
+      </p:sp>
+      <p:sp>
+        <p:nvSpPr>
+          <p:cNvPr id="10" name="TextBox 9"/>
+          <p:cNvSpPr txBox="1"/>
+          <p:nvPr/>
+        </p:nvSpPr>
+        <p:spPr>
+          <a:xfrm>
+            <a:off x="10801807" y="6473952"/>
+            <a:ext cx="548640" cy="274320"/>
+          </a:xfrm>
+          <a:prstGeom prst="rect">
+            <a:avLst/>
+          </a:prstGeom>
+          <a:noFill/>
+        </p:spPr>
+        <p:txBody>
+          <a:bodyPr wrap="square" anchor="t" lIns="0" rIns="0" tIns="0" bIns="0">
+            <a:spAutoFit/>
+          </a:bodyPr>
+          <a:lstStyle/>
+          <a:p>
+            <a:pPr algn="r">
+              <a:lnSpc>
+                <a:spcPct val="106000"/>
+              </a:lnSpc>
+              <a:spcBef>
+                <a:spcPts val="0"/>
+              </a:spcBef>
+              <a:spcAft>
+                <a:spcPts val="0"/>
+              </a:spcAft>
+            </a:pPr>
+            <a:r>
+              <a:rPr sz="950" b="0">
+                <a:solidFill>
+                  <a:srgbClr val="8A9099"/>
+                </a:solidFill>
+                <a:latin typeface="Red Hat Text"/>
+              </a:rPr>
+              <a:t>9</a:t>
+            </a:r>
+          </a:p>
+        </p:txBody>
+      </p:sp>
+    </p:spTree>
+  </p:cSld>
+  <p:clrMapOvr>
+    <a:masterClrMapping/>
+  </p:clrMapOvr>
+</p:sld>
+</file>
+
+<file path=ppt/slides/slide11.xml><?xml version="1.0" encoding="utf-8"?>
+<p:sld xmlns:a="http://schemas.openxmlformats.org/drawingml/2006/main" xmlns:p="http://schemas.openxmlformats.org/presentationml/2006/main" xmlns:r="http://schemas.openxmlformats.org/officeDocument/2006/relationships">
+  <p:cSld>
+    <p:spTree>
+      <p:nvGrpSpPr>
+        <p:cNvPr id="1" name=""/>
+        <p:cNvGrpSpPr/>
+        <p:nvPr/>
+      </p:nvGrpSpPr>
+      <p:grpSpPr/>
+      <p:pic>
+        <p:nvPicPr>
+          <p:cNvPr id="2" name="Picture 1" descr="redhat_logo.jpg"/>
+          <p:cNvPicPr>
+            <a:picLocks noChangeAspect="1"/>
+          </p:cNvPicPr>
+          <p:nvPr/>
+        </p:nvPicPr>
+        <p:blipFill>
+          <a:blip r:embed="rId2"/>
+          <a:stretch>
+            <a:fillRect/>
+          </a:stretch>
+        </p:blipFill>
+        <p:spPr>
+          <a:xfrm>
+            <a:off x="10326319" y="475488"/>
+            <a:ext cx="1024128" cy="242248"/>
+          </a:xfrm>
+          <a:prstGeom prst="rect">
+            <a:avLst/>
+          </a:prstGeom>
+        </p:spPr>
+      </p:pic>
+      <p:sp>
+        <p:nvSpPr>
+          <p:cNvPr id="3" name="TextBox 2"/>
+          <p:cNvSpPr txBox="1"/>
+          <p:nvPr/>
+        </p:nvSpPr>
+        <p:spPr>
+          <a:xfrm>
+            <a:off x="841248" y="548640"/>
+            <a:ext cx="8595360" cy="274320"/>
+          </a:xfrm>
+          <a:prstGeom prst="rect">
+            <a:avLst/>
+          </a:prstGeom>
+          <a:noFill/>
+        </p:spPr>
+        <p:txBody>
+          <a:bodyPr wrap="square" anchor="t" lIns="0" rIns="0" tIns="0" bIns="0">
+            <a:spAutoFit/>
+          </a:bodyPr>
+          <a:lstStyle/>
+          <a:p>
+            <a:pPr algn="l">
+              <a:lnSpc>
+                <a:spcPct val="106000"/>
+              </a:lnSpc>
+              <a:spcBef>
+                <a:spcPts val="0"/>
+              </a:spcBef>
+              <a:spcAft>
+                <a:spcPts val="0"/>
+              </a:spcAft>
+            </a:pPr>
+            <a:r>
+              <a:rPr sz="1250" b="1" spc="220">
+                <a:solidFill>
+                  <a:srgbClr val="EE0000"/>
+                </a:solidFill>
+                <a:latin typeface="Red Hat Display"/>
+              </a:rPr>
+              <a:t>M22 · RESILIENCE, MULTI-CLUSTER &amp; DR</a:t>
+            </a:r>
+          </a:p>
+        </p:txBody>
+      </p:sp>
+      <p:sp>
+        <p:nvSpPr>
+          <p:cNvPr id="4" name="TextBox 3"/>
+          <p:cNvSpPr txBox="1"/>
+          <p:nvPr/>
+        </p:nvSpPr>
+        <p:spPr>
+          <a:xfrm>
+            <a:off x="841248" y="877824"/>
+            <a:ext cx="10515600" cy="548640"/>
+          </a:xfrm>
+          <a:prstGeom prst="rect">
+            <a:avLst/>
+          </a:prstGeom>
+          <a:noFill/>
+        </p:spPr>
+        <p:txBody>
+          <a:bodyPr wrap="none" anchor="t" lIns="0" rIns="0" tIns="0" bIns="0">
+            <a:spAutoFit/>
+          </a:bodyPr>
+          <a:lstStyle/>
+          <a:p>
+            <a:pPr algn="l">
+              <a:lnSpc>
+                <a:spcPct val="100000"/>
+              </a:lnSpc>
+              <a:spcBef>
+                <a:spcPts val="0"/>
+              </a:spcBef>
+              <a:spcAft>
+                <a:spcPts val="0"/>
+              </a:spcAft>
+            </a:pPr>
+            <a:r>
+              <a:rPr sz="2500" b="1">
+                <a:solidFill>
+                  <a:srgbClr val="1A1A1A"/>
+                </a:solidFill>
+                <a:latin typeface="Red Hat Display"/>
+              </a:rPr>
+              <a:t>Rhsi van</a:t>
+            </a:r>
+          </a:p>
+        </p:txBody>
+      </p:sp>
+      <p:cxnSp>
+        <p:nvCxnSpPr>
+          <p:cNvPr id="5" name="Connector 4"/>
+          <p:cNvCxnSpPr/>
+          <p:nvPr/>
+        </p:nvCxnSpPr>
+        <p:spPr>
+          <a:xfrm>
+            <a:off x="841248" y="1554480"/>
+            <a:ext cx="1371600" cy="0"/>
+          </a:xfrm>
+          <a:prstGeom prst="bentConnector3">
+            <a:avLst/>
+          </a:prstGeom>
+          <a:ln w="31750">
+            <a:solidFill>
+              <a:srgbClr val="EE0000"/>
+            </a:solidFill>
+          </a:ln>
+          <a:effectLst/>
+        </p:spPr>
+        <p:style>
+          <a:lnRef idx="2">
+            <a:schemeClr val="accent1"/>
+          </a:lnRef>
+          <a:fillRef idx="0">
+            <a:schemeClr val="accent1"/>
+          </a:fillRef>
+          <a:effectRef idx="1">
+            <a:schemeClr val="accent1"/>
+          </a:effectRef>
+          <a:fontRef idx="minor">
+            <a:schemeClr val="tx1"/>
+          </a:fontRef>
+        </p:style>
+      </p:cxnSp>
+      <p:sp>
+        <p:nvSpPr>
+          <p:cNvPr id="6" name="Rounded Rectangle 5"/>
+          <p:cNvSpPr/>
+          <p:nvPr/>
+        </p:nvSpPr>
+        <p:spPr>
+          <a:xfrm>
+            <a:off x="841248" y="2331720"/>
+            <a:ext cx="10509199" cy="3794760"/>
+          </a:xfrm>
+          <a:prstGeom prst="roundRect">
+            <a:avLst>
+              <a:gd name="adj" fmla="val 4000"/>
+            </a:avLst>
+          </a:prstGeom>
+          <a:solidFill>
+            <a:srgbClr val="FFFFFF"/>
+          </a:solidFill>
+          <a:ln w="15240">
+            <a:solidFill>
+              <a:srgbClr val="DDE1E6"/>
+            </a:solidFill>
+          </a:ln>
+          <a:effectLst/>
+        </p:spPr>
+        <p:style>
+          <a:lnRef idx="1">
+            <a:schemeClr val="accent1"/>
+          </a:lnRef>
+          <a:fillRef idx="3">
+            <a:schemeClr val="accent1"/>
+          </a:fillRef>
+          <a:effectRef idx="2">
+            <a:schemeClr val="accent1"/>
+          </a:effectRef>
+          <a:fontRef idx="minor">
+            <a:schemeClr val="lt1"/>
+          </a:fontRef>
+        </p:style>
+        <p:txBody>
+          <a:bodyPr rtlCol="0" anchor="ctr"/>
+          <a:lstStyle/>
+          <a:p>
+            <a:pPr algn="ctr"/>
+          </a:p>
+        </p:txBody>
+      </p:sp>
+      <p:pic>
+        <p:nvPicPr>
+          <p:cNvPr id="7" name="Picture 6" descr="03-rhsi-van.png"/>
+          <p:cNvPicPr>
+            <a:picLocks noChangeAspect="1"/>
+          </p:cNvPicPr>
+          <p:nvPr/>
+        </p:nvPicPr>
+        <p:blipFill>
+          <a:blip r:embed="rId3"/>
+          <a:stretch>
+            <a:fillRect/>
+          </a:stretch>
+        </p:blipFill>
+        <p:spPr>
+          <a:xfrm>
+            <a:off x="1042416" y="3565837"/>
+            <a:ext cx="10106863" cy="1326525"/>
+          </a:xfrm>
+          <a:prstGeom prst="rect">
+            <a:avLst/>
+          </a:prstGeom>
+        </p:spPr>
+      </p:pic>
+      <p:cxnSp>
+        <p:nvCxnSpPr>
+          <p:cNvPr id="8" name="Connector 7"/>
+          <p:cNvCxnSpPr/>
+          <p:nvPr/>
+        </p:nvCxnSpPr>
+        <p:spPr>
+          <a:xfrm>
+            <a:off x="841248" y="6437376"/>
+            <a:ext cx="10509199" cy="0"/>
+          </a:xfrm>
+          <a:prstGeom prst="bentConnector3">
+            <a:avLst/>
+          </a:prstGeom>
+          <a:ln w="12700">
+            <a:solidFill>
+              <a:srgbClr val="DDE1E6"/>
+            </a:solidFill>
+          </a:ln>
+          <a:effectLst/>
+        </p:spPr>
+        <p:style>
+          <a:lnRef idx="2">
+            <a:schemeClr val="accent1"/>
+          </a:lnRef>
+          <a:fillRef idx="0">
+            <a:schemeClr val="accent1"/>
+          </a:fillRef>
+          <a:effectRef idx="1">
+            <a:schemeClr val="accent1"/>
+          </a:effectRef>
+          <a:fontRef idx="minor">
+            <a:schemeClr val="tx1"/>
+          </a:fontRef>
+        </p:style>
+      </p:cxnSp>
+      <p:sp>
+        <p:nvSpPr>
+          <p:cNvPr id="9" name="TextBox 8"/>
+          <p:cNvSpPr txBox="1"/>
+          <p:nvPr/>
+        </p:nvSpPr>
+        <p:spPr>
+          <a:xfrm>
+            <a:off x="841248" y="6473952"/>
+            <a:ext cx="7315200" cy="274320"/>
+          </a:xfrm>
+          <a:prstGeom prst="rect">
+            <a:avLst/>
+          </a:prstGeom>
+          <a:noFill/>
+        </p:spPr>
+        <p:txBody>
+          <a:bodyPr wrap="square" anchor="t" lIns="0" rIns="0" tIns="0" bIns="0">
+            <a:spAutoFit/>
+          </a:bodyPr>
+          <a:lstStyle/>
+          <a:p>
+            <a:pPr algn="l">
+              <a:lnSpc>
+                <a:spcPct val="106000"/>
+              </a:lnSpc>
+              <a:spcBef>
+                <a:spcPts val="0"/>
+              </a:spcBef>
+              <a:spcAft>
+                <a:spcPts val="0"/>
+              </a:spcAft>
+            </a:pPr>
+            <a:r>
+              <a:rPr sz="950" b="0">
+                <a:solidFill>
+                  <a:srgbClr val="8A9099"/>
+                </a:solidFill>
+                <a:latin typeface="Red Hat Text"/>
+              </a:rPr>
+              <a:t>CONFIDENTIAL</a:t>
+            </a:r>
+          </a:p>
+        </p:txBody>
+      </p:sp>
+      <p:sp>
+        <p:nvSpPr>
+          <p:cNvPr id="10" name="TextBox 9"/>
+          <p:cNvSpPr txBox="1"/>
+          <p:nvPr/>
+        </p:nvSpPr>
+        <p:spPr>
+          <a:xfrm>
+            <a:off x="10801807" y="6473952"/>
+            <a:ext cx="548640" cy="274320"/>
+          </a:xfrm>
+          <a:prstGeom prst="rect">
+            <a:avLst/>
+          </a:prstGeom>
+          <a:noFill/>
+        </p:spPr>
+        <p:txBody>
+          <a:bodyPr wrap="square" anchor="t" lIns="0" rIns="0" tIns="0" bIns="0">
+            <a:spAutoFit/>
+          </a:bodyPr>
+          <a:lstStyle/>
+          <a:p>
+            <a:pPr algn="r">
+              <a:lnSpc>
+                <a:spcPct val="106000"/>
+              </a:lnSpc>
+              <a:spcBef>
+                <a:spcPts val="0"/>
+              </a:spcBef>
+              <a:spcAft>
+                <a:spcPts val="0"/>
+              </a:spcAft>
+            </a:pPr>
+            <a:r>
+              <a:rPr sz="950" b="0">
+                <a:solidFill>
+                  <a:srgbClr val="8A9099"/>
+                </a:solidFill>
+                <a:latin typeface="Red Hat Text"/>
+              </a:rPr>
+              <a:t>10</a:t>
+            </a:r>
+          </a:p>
+        </p:txBody>
+      </p:sp>
+    </p:spTree>
+  </p:cSld>
+  <p:clrMapOvr>
+    <a:masterClrMapping/>
+  </p:clrMapOvr>
+</p:sld>
+</file>
+
+<file path=ppt/slides/slide12.xml><?xml version="1.0" encoding="utf-8"?>
+<p:sld xmlns:a="http://schemas.openxmlformats.org/drawingml/2006/main" xmlns:p="http://schemas.openxmlformats.org/presentationml/2006/main" xmlns:r="http://schemas.openxmlformats.org/officeDocument/2006/relationships">
+  <p:cSld>
+    <p:spTree>
+      <p:nvGrpSpPr>
+        <p:cNvPr id="1" name=""/>
+        <p:cNvGrpSpPr/>
+        <p:nvPr/>
+      </p:nvGrpSpPr>
+      <p:grpSpPr/>
+      <p:pic>
+        <p:nvPicPr>
+          <p:cNvPr id="2" name="Picture 1" descr="redhat_logo.jpg"/>
+          <p:cNvPicPr>
+            <a:picLocks noChangeAspect="1"/>
+          </p:cNvPicPr>
+          <p:nvPr/>
+        </p:nvPicPr>
+        <p:blipFill>
+          <a:blip r:embed="rId2"/>
+          <a:stretch>
+            <a:fillRect/>
+          </a:stretch>
+        </p:blipFill>
+        <p:spPr>
+          <a:xfrm>
+            <a:off x="10326319" y="475488"/>
+            <a:ext cx="1024128" cy="242248"/>
+          </a:xfrm>
+          <a:prstGeom prst="rect">
+            <a:avLst/>
+          </a:prstGeom>
+        </p:spPr>
+      </p:pic>
+      <p:sp>
+        <p:nvSpPr>
+          <p:cNvPr id="3" name="TextBox 2"/>
+          <p:cNvSpPr txBox="1"/>
+          <p:nvPr/>
+        </p:nvSpPr>
+        <p:spPr>
+          <a:xfrm>
+            <a:off x="841248" y="548640"/>
+            <a:ext cx="8595360" cy="274320"/>
+          </a:xfrm>
+          <a:prstGeom prst="rect">
+            <a:avLst/>
+          </a:prstGeom>
+          <a:noFill/>
+        </p:spPr>
+        <p:txBody>
+          <a:bodyPr wrap="square" anchor="t" lIns="0" rIns="0" tIns="0" bIns="0">
+            <a:spAutoFit/>
+          </a:bodyPr>
+          <a:lstStyle/>
+          <a:p>
+            <a:pPr algn="l">
+              <a:lnSpc>
+                <a:spcPct val="106000"/>
+              </a:lnSpc>
+              <a:spcBef>
+                <a:spcPts val="0"/>
+              </a:spcBef>
+              <a:spcAft>
+                <a:spcPts val="0"/>
+              </a:spcAft>
+            </a:pPr>
+            <a:r>
+              <a:rPr sz="1250" b="1" spc="220">
+                <a:solidFill>
+                  <a:srgbClr val="EE0000"/>
+                </a:solidFill>
+                <a:latin typeface="Red Hat Display"/>
+              </a:rPr>
+              <a:t>M22 · RESILIENCE, MULTI-CLUSTER &amp; DR</a:t>
+            </a:r>
+          </a:p>
+        </p:txBody>
+      </p:sp>
+      <p:sp>
+        <p:nvSpPr>
+          <p:cNvPr id="4" name="TextBox 3"/>
+          <p:cNvSpPr txBox="1"/>
+          <p:nvPr/>
+        </p:nvSpPr>
+        <p:spPr>
+          <a:xfrm>
+            <a:off x="841248" y="877824"/>
+            <a:ext cx="10515600" cy="548640"/>
+          </a:xfrm>
+          <a:prstGeom prst="rect">
+            <a:avLst/>
+          </a:prstGeom>
+          <a:noFill/>
+        </p:spPr>
+        <p:txBody>
+          <a:bodyPr wrap="none" anchor="t" lIns="0" rIns="0" tIns="0" bIns="0">
+            <a:spAutoFit/>
+          </a:bodyPr>
+          <a:lstStyle/>
+          <a:p>
+            <a:pPr algn="l">
+              <a:lnSpc>
+                <a:spcPct val="100000"/>
+              </a:lnSpc>
+              <a:spcBef>
+                <a:spcPts val="0"/>
+              </a:spcBef>
+              <a:spcAft>
+                <a:spcPts val="0"/>
+              </a:spcAft>
+            </a:pPr>
+            <a:r>
+              <a:rPr sz="2500" b="1">
+                <a:solidFill>
+                  <a:srgbClr val="1A1A1A"/>
+                </a:solidFill>
+                <a:latin typeface="Red Hat Display"/>
+              </a:rPr>
+              <a:t>Dr safety net</a:t>
+            </a:r>
+          </a:p>
+        </p:txBody>
+      </p:sp>
+      <p:cxnSp>
+        <p:nvCxnSpPr>
+          <p:cNvPr id="5" name="Connector 4"/>
+          <p:cNvCxnSpPr/>
+          <p:nvPr/>
+        </p:nvCxnSpPr>
+        <p:spPr>
+          <a:xfrm>
+            <a:off x="841248" y="1554480"/>
+            <a:ext cx="1371600" cy="0"/>
+          </a:xfrm>
+          <a:prstGeom prst="bentConnector3">
+            <a:avLst/>
+          </a:prstGeom>
+          <a:ln w="31750">
+            <a:solidFill>
+              <a:srgbClr val="EE0000"/>
+            </a:solidFill>
+          </a:ln>
+          <a:effectLst/>
+        </p:spPr>
+        <p:style>
+          <a:lnRef idx="2">
+            <a:schemeClr val="accent1"/>
+          </a:lnRef>
+          <a:fillRef idx="0">
+            <a:schemeClr val="accent1"/>
+          </a:fillRef>
+          <a:effectRef idx="1">
+            <a:schemeClr val="accent1"/>
+          </a:effectRef>
+          <a:fontRef idx="minor">
+            <a:schemeClr val="tx1"/>
+          </a:fontRef>
+        </p:style>
+      </p:cxnSp>
+      <p:sp>
+        <p:nvSpPr>
+          <p:cNvPr id="6" name="Rounded Rectangle 5"/>
+          <p:cNvSpPr/>
+          <p:nvPr/>
+        </p:nvSpPr>
+        <p:spPr>
+          <a:xfrm>
+            <a:off x="841248" y="2331720"/>
+            <a:ext cx="10509199" cy="3794760"/>
+          </a:xfrm>
+          <a:prstGeom prst="roundRect">
+            <a:avLst>
+              <a:gd name="adj" fmla="val 4000"/>
+            </a:avLst>
+          </a:prstGeom>
+          <a:solidFill>
+            <a:srgbClr val="FFFFFF"/>
+          </a:solidFill>
+          <a:ln w="15240">
+            <a:solidFill>
+              <a:srgbClr val="DDE1E6"/>
+            </a:solidFill>
+          </a:ln>
+          <a:effectLst/>
+        </p:spPr>
+        <p:style>
+          <a:lnRef idx="1">
+            <a:schemeClr val="accent1"/>
+          </a:lnRef>
+          <a:fillRef idx="3">
+            <a:schemeClr val="accent1"/>
+          </a:fillRef>
+          <a:effectRef idx="2">
+            <a:schemeClr val="accent1"/>
+          </a:effectRef>
+          <a:fontRef idx="minor">
+            <a:schemeClr val="lt1"/>
+          </a:fontRef>
+        </p:style>
+        <p:txBody>
+          <a:bodyPr rtlCol="0" anchor="ctr"/>
+          <a:lstStyle/>
+          <a:p>
+            <a:pPr algn="ctr"/>
+          </a:p>
+        </p:txBody>
+      </p:sp>
+      <p:pic>
+        <p:nvPicPr>
+          <p:cNvPr id="7" name="Picture 6" descr="04-dr-safety-net.png"/>
+          <p:cNvPicPr>
+            <a:picLocks noChangeAspect="1"/>
+          </p:cNvPicPr>
+          <p:nvPr/>
+        </p:nvPicPr>
+        <p:blipFill>
+          <a:blip r:embed="rId3"/>
+          <a:stretch>
+            <a:fillRect/>
+          </a:stretch>
+        </p:blipFill>
+        <p:spPr>
+          <a:xfrm>
+            <a:off x="1042416" y="3714281"/>
+            <a:ext cx="10106863" cy="1029636"/>
+          </a:xfrm>
+          <a:prstGeom prst="rect">
+            <a:avLst/>
+          </a:prstGeom>
+        </p:spPr>
+      </p:pic>
+      <p:cxnSp>
+        <p:nvCxnSpPr>
+          <p:cNvPr id="8" name="Connector 7"/>
+          <p:cNvCxnSpPr/>
+          <p:nvPr/>
+        </p:nvCxnSpPr>
+        <p:spPr>
+          <a:xfrm>
+            <a:off x="841248" y="6437376"/>
+            <a:ext cx="10509199" cy="0"/>
+          </a:xfrm>
+          <a:prstGeom prst="bentConnector3">
+            <a:avLst/>
+          </a:prstGeom>
+          <a:ln w="12700">
+            <a:solidFill>
+              <a:srgbClr val="DDE1E6"/>
+            </a:solidFill>
+          </a:ln>
+          <a:effectLst/>
+        </p:spPr>
+        <p:style>
+          <a:lnRef idx="2">
+            <a:schemeClr val="accent1"/>
+          </a:lnRef>
+          <a:fillRef idx="0">
+            <a:schemeClr val="accent1"/>
+          </a:fillRef>
+          <a:effectRef idx="1">
+            <a:schemeClr val="accent1"/>
+          </a:effectRef>
+          <a:fontRef idx="minor">
+            <a:schemeClr val="tx1"/>
+          </a:fontRef>
+        </p:style>
+      </p:cxnSp>
+      <p:sp>
+        <p:nvSpPr>
+          <p:cNvPr id="9" name="TextBox 8"/>
+          <p:cNvSpPr txBox="1"/>
+          <p:nvPr/>
+        </p:nvSpPr>
+        <p:spPr>
+          <a:xfrm>
+            <a:off x="841248" y="6473952"/>
+            <a:ext cx="7315200" cy="274320"/>
+          </a:xfrm>
+          <a:prstGeom prst="rect">
+            <a:avLst/>
+          </a:prstGeom>
+          <a:noFill/>
+        </p:spPr>
+        <p:txBody>
+          <a:bodyPr wrap="square" anchor="t" lIns="0" rIns="0" tIns="0" bIns="0">
+            <a:spAutoFit/>
+          </a:bodyPr>
+          <a:lstStyle/>
+          <a:p>
+            <a:pPr algn="l">
+              <a:lnSpc>
+                <a:spcPct val="106000"/>
+              </a:lnSpc>
+              <a:spcBef>
+                <a:spcPts val="0"/>
+              </a:spcBef>
+              <a:spcAft>
+                <a:spcPts val="0"/>
+              </a:spcAft>
+            </a:pPr>
+            <a:r>
+              <a:rPr sz="950" b="0">
+                <a:solidFill>
+                  <a:srgbClr val="8A9099"/>
+                </a:solidFill>
+                <a:latin typeface="Red Hat Text"/>
+              </a:rPr>
+              <a:t>CONFIDENTIAL</a:t>
+            </a:r>
+          </a:p>
+        </p:txBody>
+      </p:sp>
+      <p:sp>
+        <p:nvSpPr>
+          <p:cNvPr id="10" name="TextBox 9"/>
+          <p:cNvSpPr txBox="1"/>
+          <p:nvPr/>
+        </p:nvSpPr>
+        <p:spPr>
+          <a:xfrm>
+            <a:off x="10801807" y="6473952"/>
+            <a:ext cx="548640" cy="274320"/>
+          </a:xfrm>
+          <a:prstGeom prst="rect">
+            <a:avLst/>
+          </a:prstGeom>
+          <a:noFill/>
+        </p:spPr>
+        <p:txBody>
+          <a:bodyPr wrap="square" anchor="t" lIns="0" rIns="0" tIns="0" bIns="0">
+            <a:spAutoFit/>
+          </a:bodyPr>
+          <a:lstStyle/>
+          <a:p>
+            <a:pPr algn="r">
+              <a:lnSpc>
+                <a:spcPct val="106000"/>
+              </a:lnSpc>
+              <a:spcBef>
+                <a:spcPts val="0"/>
+              </a:spcBef>
+              <a:spcAft>
+                <a:spcPts val="0"/>
+              </a:spcAft>
+            </a:pPr>
+            <a:r>
+              <a:rPr sz="950" b="0">
+                <a:solidFill>
+                  <a:srgbClr val="8A9099"/>
+                </a:solidFill>
+                <a:latin typeface="Red Hat Text"/>
+              </a:rPr>
+              <a:t>11</a:t>
+            </a:r>
+          </a:p>
+        </p:txBody>
+      </p:sp>
+    </p:spTree>
+  </p:cSld>
+  <p:clrMapOvr>
+    <a:masterClrMapping/>
+  </p:clrMapOvr>
+</p:sld>
+</file>
+
+<file path=ppt/slides/slide13.xml><?xml version="1.0" encoding="utf-8"?>
+<p:sld xmlns:a="http://schemas.openxmlformats.org/drawingml/2006/main" xmlns:p="http://schemas.openxmlformats.org/presentationml/2006/main" xmlns:r="http://schemas.openxmlformats.org/officeDocument/2006/relationships">
+  <p:cSld>
+    <p:spTree>
+      <p:nvGrpSpPr>
+        <p:cNvPr id="1" name=""/>
+        <p:cNvGrpSpPr/>
+        <p:nvPr/>
+      </p:nvGrpSpPr>
+      <p:grpSpPr/>
+      <p:pic>
+        <p:nvPicPr>
+          <p:cNvPr id="2" name="Picture 1" descr="redhat_logo.jpg"/>
+          <p:cNvPicPr>
+            <a:picLocks noChangeAspect="1"/>
+          </p:cNvPicPr>
+          <p:nvPr/>
+        </p:nvPicPr>
+        <p:blipFill>
+          <a:blip r:embed="rId2"/>
+          <a:stretch>
+            <a:fillRect/>
+          </a:stretch>
+        </p:blipFill>
+        <p:spPr>
+          <a:xfrm>
+            <a:off x="10326319" y="475488"/>
+            <a:ext cx="1024128" cy="242248"/>
+          </a:xfrm>
+          <a:prstGeom prst="rect">
+            <a:avLst/>
+          </a:prstGeom>
+        </p:spPr>
+      </p:pic>
+      <p:sp>
+        <p:nvSpPr>
+          <p:cNvPr id="3" name="TextBox 2"/>
+          <p:cNvSpPr txBox="1"/>
+          <p:nvPr/>
+        </p:nvSpPr>
+        <p:spPr>
+          <a:xfrm>
+            <a:off x="841248" y="548640"/>
+            <a:ext cx="8595360" cy="274320"/>
+          </a:xfrm>
+          <a:prstGeom prst="rect">
+            <a:avLst/>
+          </a:prstGeom>
+          <a:noFill/>
+        </p:spPr>
+        <p:txBody>
+          <a:bodyPr wrap="square" anchor="t" lIns="0" rIns="0" tIns="0" bIns="0">
+            <a:spAutoFit/>
+          </a:bodyPr>
+          <a:lstStyle/>
+          <a:p>
+            <a:pPr algn="l">
+              <a:lnSpc>
+                <a:spcPct val="106000"/>
+              </a:lnSpc>
+              <a:spcBef>
+                <a:spcPts val="0"/>
+              </a:spcBef>
+              <a:spcAft>
+                <a:spcPts val="0"/>
+              </a:spcAft>
+            </a:pPr>
+            <a:r>
+              <a:rPr sz="1250" b="1" spc="220">
+                <a:solidFill>
+                  <a:srgbClr val="EE0000"/>
+                </a:solidFill>
+                <a:latin typeface="Red Hat Display"/>
+              </a:rPr>
+              <a:t>M22 · RESILIENCE, MULTI-CLUSTER &amp; DR</a:t>
+            </a:r>
+          </a:p>
+        </p:txBody>
+      </p:sp>
+      <p:sp>
+        <p:nvSpPr>
+          <p:cNvPr id="4" name="TextBox 3"/>
+          <p:cNvSpPr txBox="1"/>
+          <p:nvPr/>
+        </p:nvSpPr>
+        <p:spPr>
+          <a:xfrm>
+            <a:off x="841248" y="877824"/>
+            <a:ext cx="10515600" cy="548640"/>
+          </a:xfrm>
+          <a:prstGeom prst="rect">
+            <a:avLst/>
+          </a:prstGeom>
+          <a:noFill/>
+        </p:spPr>
+        <p:txBody>
+          <a:bodyPr wrap="none" anchor="t" lIns="0" rIns="0" tIns="0" bIns="0">
+            <a:spAutoFit/>
+          </a:bodyPr>
+          <a:lstStyle/>
+          <a:p>
+            <a:pPr algn="l">
+              <a:lnSpc>
+                <a:spcPct val="100000"/>
+              </a:lnSpc>
+              <a:spcBef>
+                <a:spcPts val="0"/>
+              </a:spcBef>
+              <a:spcAft>
+                <a:spcPts val="0"/>
+              </a:spcAft>
+            </a:pPr>
+            <a:r>
+              <a:rPr sz="2500" b="1">
+                <a:solidFill>
+                  <a:srgbClr val="1A1A1A"/>
+                </a:solidFill>
+                <a:latin typeface="Red Hat Display"/>
+              </a:rPr>
+              <a:t>What you built</a:t>
+            </a:r>
+          </a:p>
+        </p:txBody>
+      </p:sp>
+      <p:cxnSp>
+        <p:nvCxnSpPr>
+          <p:cNvPr id="5" name="Connector 4"/>
+          <p:cNvCxnSpPr/>
+          <p:nvPr/>
+        </p:nvCxnSpPr>
+        <p:spPr>
+          <a:xfrm>
+            <a:off x="841248" y="1554480"/>
+            <a:ext cx="1371600" cy="0"/>
+          </a:xfrm>
+          <a:prstGeom prst="bentConnector3">
+            <a:avLst/>
+          </a:prstGeom>
+          <a:ln w="31750">
+            <a:solidFill>
+              <a:srgbClr val="EE0000"/>
+            </a:solidFill>
+          </a:ln>
+          <a:effectLst/>
+        </p:spPr>
+        <p:style>
+          <a:lnRef idx="2">
+            <a:schemeClr val="accent1"/>
+          </a:lnRef>
+          <a:fillRef idx="0">
+            <a:schemeClr val="accent1"/>
+          </a:fillRef>
+          <a:effectRef idx="1">
+            <a:schemeClr val="accent1"/>
+          </a:effectRef>
+          <a:fontRef idx="minor">
+            <a:schemeClr val="tx1"/>
+          </a:fontRef>
+        </p:style>
+      </p:cxnSp>
+      <p:sp>
+        <p:nvSpPr>
+          <p:cNvPr id="6" name="Rounded Rectangle 5"/>
+          <p:cNvSpPr/>
+          <p:nvPr/>
+        </p:nvSpPr>
+        <p:spPr>
+          <a:xfrm>
+            <a:off x="841248" y="2331720"/>
+            <a:ext cx="10509199" cy="3794760"/>
+          </a:xfrm>
+          <a:prstGeom prst="roundRect">
+            <a:avLst>
+              <a:gd name="adj" fmla="val 4000"/>
+            </a:avLst>
+          </a:prstGeom>
+          <a:solidFill>
+            <a:srgbClr val="FFFFFF"/>
+          </a:solidFill>
+          <a:ln w="15240">
+            <a:solidFill>
+              <a:srgbClr val="DDE1E6"/>
+            </a:solidFill>
+          </a:ln>
+          <a:effectLst/>
+        </p:spPr>
+        <p:style>
+          <a:lnRef idx="1">
+            <a:schemeClr val="accent1"/>
+          </a:lnRef>
+          <a:fillRef idx="3">
+            <a:schemeClr val="accent1"/>
+          </a:fillRef>
+          <a:effectRef idx="2">
+            <a:schemeClr val="accent1"/>
+          </a:effectRef>
+          <a:fontRef idx="minor">
+            <a:schemeClr val="lt1"/>
+          </a:fontRef>
+        </p:style>
+        <p:txBody>
+          <a:bodyPr rtlCol="0" anchor="ctr"/>
+          <a:lstStyle/>
+          <a:p>
+            <a:pPr algn="ctr"/>
+          </a:p>
+        </p:txBody>
+      </p:sp>
+      <p:pic>
+        <p:nvPicPr>
+          <p:cNvPr id="7" name="Picture 6" descr="05-what-you-built.png"/>
+          <p:cNvPicPr>
+            <a:picLocks noChangeAspect="1"/>
+          </p:cNvPicPr>
+          <p:nvPr/>
+        </p:nvPicPr>
+        <p:blipFill>
+          <a:blip r:embed="rId3"/>
+          <a:stretch>
+            <a:fillRect/>
+          </a:stretch>
+        </p:blipFill>
+        <p:spPr>
+          <a:xfrm>
+            <a:off x="4248373" y="2532888"/>
+            <a:ext cx="3694947" cy="3392424"/>
+          </a:xfrm>
+          <a:prstGeom prst="rect">
+            <a:avLst/>
+          </a:prstGeom>
+        </p:spPr>
+      </p:pic>
+      <p:cxnSp>
+        <p:nvCxnSpPr>
+          <p:cNvPr id="8" name="Connector 7"/>
+          <p:cNvCxnSpPr/>
+          <p:nvPr/>
+        </p:nvCxnSpPr>
+        <p:spPr>
+          <a:xfrm>
+            <a:off x="841248" y="6437376"/>
+            <a:ext cx="10509199" cy="0"/>
+          </a:xfrm>
+          <a:prstGeom prst="bentConnector3">
+            <a:avLst/>
+          </a:prstGeom>
+          <a:ln w="12700">
+            <a:solidFill>
+              <a:srgbClr val="DDE1E6"/>
+            </a:solidFill>
+          </a:ln>
+          <a:effectLst/>
+        </p:spPr>
+        <p:style>
+          <a:lnRef idx="2">
+            <a:schemeClr val="accent1"/>
+          </a:lnRef>
+          <a:fillRef idx="0">
+            <a:schemeClr val="accent1"/>
+          </a:fillRef>
+          <a:effectRef idx="1">
+            <a:schemeClr val="accent1"/>
+          </a:effectRef>
+          <a:fontRef idx="minor">
+            <a:schemeClr val="tx1"/>
+          </a:fontRef>
+        </p:style>
+      </p:cxnSp>
+      <p:sp>
+        <p:nvSpPr>
+          <p:cNvPr id="9" name="TextBox 8"/>
+          <p:cNvSpPr txBox="1"/>
+          <p:nvPr/>
+        </p:nvSpPr>
+        <p:spPr>
+          <a:xfrm>
+            <a:off x="841248" y="6473952"/>
+            <a:ext cx="7315200" cy="274320"/>
+          </a:xfrm>
+          <a:prstGeom prst="rect">
+            <a:avLst/>
+          </a:prstGeom>
+          <a:noFill/>
+        </p:spPr>
+        <p:txBody>
+          <a:bodyPr wrap="square" anchor="t" lIns="0" rIns="0" tIns="0" bIns="0">
+            <a:spAutoFit/>
+          </a:bodyPr>
+          <a:lstStyle/>
+          <a:p>
+            <a:pPr algn="l">
+              <a:lnSpc>
+                <a:spcPct val="106000"/>
+              </a:lnSpc>
+              <a:spcBef>
+                <a:spcPts val="0"/>
+              </a:spcBef>
+              <a:spcAft>
+                <a:spcPts val="0"/>
+              </a:spcAft>
+            </a:pPr>
+            <a:r>
+              <a:rPr sz="950" b="0">
+                <a:solidFill>
+                  <a:srgbClr val="8A9099"/>
+                </a:solidFill>
+                <a:latin typeface="Red Hat Text"/>
+              </a:rPr>
+              <a:t>CONFIDENTIAL</a:t>
+            </a:r>
+          </a:p>
+        </p:txBody>
+      </p:sp>
+      <p:sp>
+        <p:nvSpPr>
+          <p:cNvPr id="10" name="TextBox 9"/>
+          <p:cNvSpPr txBox="1"/>
+          <p:nvPr/>
+        </p:nvSpPr>
+        <p:spPr>
+          <a:xfrm>
+            <a:off x="10801807" y="6473952"/>
+            <a:ext cx="548640" cy="274320"/>
+          </a:xfrm>
+          <a:prstGeom prst="rect">
+            <a:avLst/>
+          </a:prstGeom>
+          <a:noFill/>
+        </p:spPr>
+        <p:txBody>
+          <a:bodyPr wrap="square" anchor="t" lIns="0" rIns="0" tIns="0" bIns="0">
+            <a:spAutoFit/>
+          </a:bodyPr>
+          <a:lstStyle/>
+          <a:p>
+            <a:pPr algn="r">
+              <a:lnSpc>
+                <a:spcPct val="106000"/>
+              </a:lnSpc>
+              <a:spcBef>
+                <a:spcPts val="0"/>
+              </a:spcBef>
+              <a:spcAft>
+                <a:spcPts val="0"/>
+              </a:spcAft>
+            </a:pPr>
+            <a:r>
+              <a:rPr sz="950" b="0">
+                <a:solidFill>
+                  <a:srgbClr val="8A9099"/>
+                </a:solidFill>
+                <a:latin typeface="Red Hat Text"/>
+              </a:rPr>
+              <a:t>12</a:t>
+            </a:r>
+          </a:p>
+        </p:txBody>
+      </p:sp>
+    </p:spTree>
+  </p:cSld>
+  <p:clrMapOvr>
+    <a:masterClrMapping/>
+  </p:clrMapOvr>
+</p:sld>
+</file>
+
 <file path=ppt/slides/slide2.xml><?xml version="1.0" encoding="utf-8"?>
 <p:sld xmlns:a="http://schemas.openxmlformats.org/drawingml/2006/main" xmlns:p="http://schemas.openxmlformats.org/presentationml/2006/main" xmlns:r="http://schemas.openxmlformats.org/officeDocument/2006/relationships">
   <p:cSld>
@@ -4352,11 +6171,11 @@
         <p:spPr>
           <a:xfrm>
             <a:off x="841248" y="2670048"/>
-            <a:ext cx="5715000" cy="530352"/>
+            <a:ext cx="5138928" cy="786384"/>
           </a:xfrm>
           <a:prstGeom prst="roundRect">
             <a:avLst>
-              <a:gd name="adj" fmla="val 6000"/>
+              <a:gd name="adj" fmla="val 7000"/>
             </a:avLst>
           </a:prstGeom>
           <a:solidFill>
@@ -4391,9 +6210,55 @@
           </a:p>
         </p:txBody>
       </p:sp>
+      <p:sp>
+        <p:nvSpPr>
+          <p:cNvPr id="8" name="Rounded Rectangle 7"/>
+          <p:cNvSpPr/>
+          <p:nvPr/>
+        </p:nvSpPr>
+        <p:spPr>
+          <a:xfrm>
+            <a:off x="987552" y="2807208"/>
+            <a:ext cx="512064" cy="512064"/>
+          </a:xfrm>
+          <a:prstGeom prst="roundRect">
+            <a:avLst>
+              <a:gd name="adj" fmla="val 26000"/>
+            </a:avLst>
+          </a:prstGeom>
+          <a:solidFill>
+            <a:srgbClr val="EE0000"/>
+          </a:solidFill>
+          <a:ln>
+            <a:noFill/>
+          </a:ln>
+          <a:effectLst/>
+        </p:spPr>
+        <p:style>
+          <a:lnRef idx="1">
+            <a:schemeClr val="accent1"/>
+          </a:lnRef>
+          <a:fillRef idx="3">
+            <a:schemeClr val="accent1"/>
+          </a:fillRef>
+          <a:effectRef idx="2">
+            <a:schemeClr val="accent1"/>
+          </a:effectRef>
+          <a:fontRef idx="minor">
+            <a:schemeClr val="lt1"/>
+          </a:fontRef>
+        </p:style>
+        <p:txBody>
+          <a:bodyPr rtlCol="0" anchor="ctr"/>
+          <a:lstStyle/>
+          <a:p>
+            <a:pPr algn="ctr"/>
+          </a:p>
+        </p:txBody>
+      </p:sp>
       <p:pic>
         <p:nvPicPr>
-          <p:cNvPr id="8" name="Picture 7" descr="check_steel.png"/>
+          <p:cNvPr id="9" name="Picture 8" descr="check_white.png"/>
           <p:cNvPicPr>
             <a:picLocks noChangeAspect="1"/>
           </p:cNvPicPr>
@@ -4407,8 +6272,8 @@
         </p:blipFill>
         <p:spPr>
           <a:xfrm>
-            <a:off x="987552" y="2816352"/>
-            <a:ext cx="237744" cy="237744"/>
+            <a:off x="1110447" y="2930103"/>
+            <a:ext cx="266273" cy="266273"/>
           </a:xfrm>
           <a:prstGeom prst="rect">
             <a:avLst/>
@@ -4417,14 +6282,14 @@
       </p:pic>
       <p:sp>
         <p:nvSpPr>
-          <p:cNvPr id="9" name="TextBox 8"/>
+          <p:cNvPr id="10" name="TextBox 9"/>
           <p:cNvSpPr txBox="1"/>
           <p:nvPr/>
         </p:nvSpPr>
         <p:spPr>
           <a:xfrm>
-            <a:off x="1353312" y="2670048"/>
-            <a:ext cx="5029200" cy="530352"/>
+            <a:off x="1627632" y="2670048"/>
+            <a:ext cx="4206240" cy="786384"/>
           </a:xfrm>
           <a:prstGeom prst="rect">
             <a:avLst/>
@@ -4449,7 +6314,7 @@
               </a:spcAft>
             </a:pPr>
             <a:r>
-              <a:rPr sz="1200" b="0">
+              <a:rPr sz="1150" b="0">
                 <a:solidFill>
                   <a:srgbClr val="1A1A1A"/>
                 </a:solidFill>
@@ -4462,18 +6327,18 @@
       </p:sp>
       <p:sp>
         <p:nvSpPr>
-          <p:cNvPr id="10" name="Rounded Rectangle 9"/>
+          <p:cNvPr id="11" name="Rounded Rectangle 10"/>
           <p:cNvSpPr/>
           <p:nvPr/>
         </p:nvSpPr>
         <p:spPr>
           <a:xfrm>
-            <a:off x="841248" y="3273552"/>
-            <a:ext cx="5715000" cy="530352"/>
+            <a:off x="6254496" y="2670048"/>
+            <a:ext cx="5138928" cy="786384"/>
           </a:xfrm>
           <a:prstGeom prst="roundRect">
             <a:avLst>
-              <a:gd name="adj" fmla="val 6000"/>
+              <a:gd name="adj" fmla="val 7000"/>
             </a:avLst>
           </a:prstGeom>
           <a:solidFill>
@@ -4508,9 +6373,55 @@
           </a:p>
         </p:txBody>
       </p:sp>
+      <p:sp>
+        <p:nvSpPr>
+          <p:cNvPr id="12" name="Rounded Rectangle 11"/>
+          <p:cNvSpPr/>
+          <p:nvPr/>
+        </p:nvSpPr>
+        <p:spPr>
+          <a:xfrm>
+            <a:off x="6400800" y="2807208"/>
+            <a:ext cx="512064" cy="512064"/>
+          </a:xfrm>
+          <a:prstGeom prst="roundRect">
+            <a:avLst>
+              <a:gd name="adj" fmla="val 26000"/>
+            </a:avLst>
+          </a:prstGeom>
+          <a:solidFill>
+            <a:srgbClr val="EE0000"/>
+          </a:solidFill>
+          <a:ln>
+            <a:noFill/>
+          </a:ln>
+          <a:effectLst/>
+        </p:spPr>
+        <p:style>
+          <a:lnRef idx="1">
+            <a:schemeClr val="accent1"/>
+          </a:lnRef>
+          <a:fillRef idx="3">
+            <a:schemeClr val="accent1"/>
+          </a:fillRef>
+          <a:effectRef idx="2">
+            <a:schemeClr val="accent1"/>
+          </a:effectRef>
+          <a:fontRef idx="minor">
+            <a:schemeClr val="lt1"/>
+          </a:fontRef>
+        </p:style>
+        <p:txBody>
+          <a:bodyPr rtlCol="0" anchor="ctr"/>
+          <a:lstStyle/>
+          <a:p>
+            <a:pPr algn="ctr"/>
+          </a:p>
+        </p:txBody>
+      </p:sp>
       <p:pic>
         <p:nvPicPr>
-          <p:cNvPr id="11" name="Picture 10" descr="check_steel.png"/>
+          <p:cNvPr id="13" name="Picture 12" descr="check_white.png"/>
           <p:cNvPicPr>
             <a:picLocks noChangeAspect="1"/>
           </p:cNvPicPr>
@@ -4524,8 +6435,8 @@
         </p:blipFill>
         <p:spPr>
           <a:xfrm>
-            <a:off x="987552" y="3419856"/>
-            <a:ext cx="237744" cy="237744"/>
+            <a:off x="6523695" y="2930103"/>
+            <a:ext cx="266273" cy="266273"/>
           </a:xfrm>
           <a:prstGeom prst="rect">
             <a:avLst/>
@@ -4534,14 +6445,14 @@
       </p:pic>
       <p:sp>
         <p:nvSpPr>
-          <p:cNvPr id="12" name="TextBox 11"/>
+          <p:cNvPr id="14" name="TextBox 13"/>
           <p:cNvSpPr txBox="1"/>
           <p:nvPr/>
         </p:nvSpPr>
         <p:spPr>
           <a:xfrm>
-            <a:off x="1353312" y="3273552"/>
-            <a:ext cx="5029200" cy="530352"/>
+            <a:off x="7040880" y="2670048"/>
+            <a:ext cx="4206240" cy="786384"/>
           </a:xfrm>
           <a:prstGeom prst="rect">
             <a:avLst/>
@@ -4566,7 +6477,7 @@
               </a:spcAft>
             </a:pPr>
             <a:r>
-              <a:rPr sz="1200" b="0">
+              <a:rPr sz="1150" b="0">
                 <a:solidFill>
                   <a:srgbClr val="1A1A1A"/>
                 </a:solidFill>
@@ -4579,18 +6490,18 @@
       </p:sp>
       <p:sp>
         <p:nvSpPr>
-          <p:cNvPr id="13" name="Rounded Rectangle 12"/>
+          <p:cNvPr id="15" name="Rounded Rectangle 14"/>
           <p:cNvSpPr/>
           <p:nvPr/>
         </p:nvSpPr>
         <p:spPr>
           <a:xfrm>
-            <a:off x="841248" y="3877056"/>
-            <a:ext cx="5715000" cy="530352"/>
+            <a:off x="841248" y="3602736"/>
+            <a:ext cx="5138928" cy="786384"/>
           </a:xfrm>
           <a:prstGeom prst="roundRect">
             <a:avLst>
-              <a:gd name="adj" fmla="val 6000"/>
+              <a:gd name="adj" fmla="val 7000"/>
             </a:avLst>
           </a:prstGeom>
           <a:solidFill>
@@ -4625,9 +6536,55 @@
           </a:p>
         </p:txBody>
       </p:sp>
+      <p:sp>
+        <p:nvSpPr>
+          <p:cNvPr id="16" name="Rounded Rectangle 15"/>
+          <p:cNvSpPr/>
+          <p:nvPr/>
+        </p:nvSpPr>
+        <p:spPr>
+          <a:xfrm>
+            <a:off x="987552" y="3739896"/>
+            <a:ext cx="512064" cy="512064"/>
+          </a:xfrm>
+          <a:prstGeom prst="roundRect">
+            <a:avLst>
+              <a:gd name="adj" fmla="val 26000"/>
+            </a:avLst>
+          </a:prstGeom>
+          <a:solidFill>
+            <a:srgbClr val="EE0000"/>
+          </a:solidFill>
+          <a:ln>
+            <a:noFill/>
+          </a:ln>
+          <a:effectLst/>
+        </p:spPr>
+        <p:style>
+          <a:lnRef idx="1">
+            <a:schemeClr val="accent1"/>
+          </a:lnRef>
+          <a:fillRef idx="3">
+            <a:schemeClr val="accent1"/>
+          </a:fillRef>
+          <a:effectRef idx="2">
+            <a:schemeClr val="accent1"/>
+          </a:effectRef>
+          <a:fontRef idx="minor">
+            <a:schemeClr val="lt1"/>
+          </a:fontRef>
+        </p:style>
+        <p:txBody>
+          <a:bodyPr rtlCol="0" anchor="ctr"/>
+          <a:lstStyle/>
+          <a:p>
+            <a:pPr algn="ctr"/>
+          </a:p>
+        </p:txBody>
+      </p:sp>
       <p:pic>
         <p:nvPicPr>
-          <p:cNvPr id="14" name="Picture 13" descr="check_steel.png"/>
+          <p:cNvPr id="17" name="Picture 16" descr="check_white.png"/>
           <p:cNvPicPr>
             <a:picLocks noChangeAspect="1"/>
           </p:cNvPicPr>
@@ -4641,8 +6598,8 @@
         </p:blipFill>
         <p:spPr>
           <a:xfrm>
-            <a:off x="987552" y="4023360"/>
-            <a:ext cx="237744" cy="237744"/>
+            <a:off x="1110447" y="3862791"/>
+            <a:ext cx="266273" cy="266273"/>
           </a:xfrm>
           <a:prstGeom prst="rect">
             <a:avLst/>
@@ -4651,14 +6608,14 @@
       </p:pic>
       <p:sp>
         <p:nvSpPr>
-          <p:cNvPr id="15" name="TextBox 14"/>
+          <p:cNvPr id="18" name="TextBox 17"/>
           <p:cNvSpPr txBox="1"/>
           <p:nvPr/>
         </p:nvSpPr>
         <p:spPr>
           <a:xfrm>
-            <a:off x="1353312" y="3877056"/>
-            <a:ext cx="5029200" cy="530352"/>
+            <a:off x="1627632" y="3602736"/>
+            <a:ext cx="4206240" cy="786384"/>
           </a:xfrm>
           <a:prstGeom prst="rect">
             <a:avLst/>
@@ -4683,7 +6640,7 @@
               </a:spcAft>
             </a:pPr>
             <a:r>
-              <a:rPr sz="1200" b="0">
+              <a:rPr sz="1150" b="0">
                 <a:solidFill>
                   <a:srgbClr val="1A1A1A"/>
                 </a:solidFill>
@@ -4696,18 +6653,18 @@
       </p:sp>
       <p:sp>
         <p:nvSpPr>
-          <p:cNvPr id="16" name="Rounded Rectangle 15"/>
+          <p:cNvPr id="19" name="Rounded Rectangle 18"/>
           <p:cNvSpPr/>
           <p:nvPr/>
         </p:nvSpPr>
         <p:spPr>
           <a:xfrm>
-            <a:off x="841248" y="4480560"/>
-            <a:ext cx="5715000" cy="530352"/>
+            <a:off x="6254496" y="3602736"/>
+            <a:ext cx="5138928" cy="786384"/>
           </a:xfrm>
           <a:prstGeom prst="roundRect">
             <a:avLst>
-              <a:gd name="adj" fmla="val 6000"/>
+              <a:gd name="adj" fmla="val 7000"/>
             </a:avLst>
           </a:prstGeom>
           <a:solidFill>
@@ -4742,9 +6699,55 @@
           </a:p>
         </p:txBody>
       </p:sp>
+      <p:sp>
+        <p:nvSpPr>
+          <p:cNvPr id="20" name="Rounded Rectangle 19"/>
+          <p:cNvSpPr/>
+          <p:nvPr/>
+        </p:nvSpPr>
+        <p:spPr>
+          <a:xfrm>
+            <a:off x="6400800" y="3739896"/>
+            <a:ext cx="512064" cy="512064"/>
+          </a:xfrm>
+          <a:prstGeom prst="roundRect">
+            <a:avLst>
+              <a:gd name="adj" fmla="val 26000"/>
+            </a:avLst>
+          </a:prstGeom>
+          <a:solidFill>
+            <a:srgbClr val="EE0000"/>
+          </a:solidFill>
+          <a:ln>
+            <a:noFill/>
+          </a:ln>
+          <a:effectLst/>
+        </p:spPr>
+        <p:style>
+          <a:lnRef idx="1">
+            <a:schemeClr val="accent1"/>
+          </a:lnRef>
+          <a:fillRef idx="3">
+            <a:schemeClr val="accent1"/>
+          </a:fillRef>
+          <a:effectRef idx="2">
+            <a:schemeClr val="accent1"/>
+          </a:effectRef>
+          <a:fontRef idx="minor">
+            <a:schemeClr val="lt1"/>
+          </a:fontRef>
+        </p:style>
+        <p:txBody>
+          <a:bodyPr rtlCol="0" anchor="ctr"/>
+          <a:lstStyle/>
+          <a:p>
+            <a:pPr algn="ctr"/>
+          </a:p>
+        </p:txBody>
+      </p:sp>
       <p:pic>
         <p:nvPicPr>
-          <p:cNvPr id="17" name="Picture 16" descr="check_steel.png"/>
+          <p:cNvPr id="21" name="Picture 20" descr="check_white.png"/>
           <p:cNvPicPr>
             <a:picLocks noChangeAspect="1"/>
           </p:cNvPicPr>
@@ -4758,8 +6761,8 @@
         </p:blipFill>
         <p:spPr>
           <a:xfrm>
-            <a:off x="987552" y="4626864"/>
-            <a:ext cx="237744" cy="237744"/>
+            <a:off x="6523695" y="3862791"/>
+            <a:ext cx="266273" cy="266273"/>
           </a:xfrm>
           <a:prstGeom prst="rect">
             <a:avLst/>
@@ -4768,14 +6771,14 @@
       </p:pic>
       <p:sp>
         <p:nvSpPr>
-          <p:cNvPr id="18" name="TextBox 17"/>
+          <p:cNvPr id="22" name="TextBox 21"/>
           <p:cNvSpPr txBox="1"/>
           <p:nvPr/>
         </p:nvSpPr>
         <p:spPr>
           <a:xfrm>
-            <a:off x="1353312" y="4480560"/>
-            <a:ext cx="5029200" cy="530352"/>
+            <a:off x="7040880" y="3602736"/>
+            <a:ext cx="4206240" cy="786384"/>
           </a:xfrm>
           <a:prstGeom prst="rect">
             <a:avLst/>
@@ -4800,7 +6803,7 @@
               </a:spcAft>
             </a:pPr>
             <a:r>
-              <a:rPr sz="1200" b="0">
+              <a:rPr sz="1150" b="0">
                 <a:solidFill>
                   <a:srgbClr val="1A1A1A"/>
                 </a:solidFill>
@@ -4813,18 +6816,18 @@
       </p:sp>
       <p:sp>
         <p:nvSpPr>
-          <p:cNvPr id="19" name="Rounded Rectangle 18"/>
+          <p:cNvPr id="23" name="Rounded Rectangle 22"/>
           <p:cNvSpPr/>
           <p:nvPr/>
         </p:nvSpPr>
         <p:spPr>
           <a:xfrm>
-            <a:off x="841248" y="5084064"/>
-            <a:ext cx="5715000" cy="530352"/>
+            <a:off x="841248" y="4535424"/>
+            <a:ext cx="5138928" cy="786384"/>
           </a:xfrm>
           <a:prstGeom prst="roundRect">
             <a:avLst>
-              <a:gd name="adj" fmla="val 6000"/>
+              <a:gd name="adj" fmla="val 7000"/>
             </a:avLst>
           </a:prstGeom>
           <a:solidFill>
@@ -4859,9 +6862,55 @@
           </a:p>
         </p:txBody>
       </p:sp>
+      <p:sp>
+        <p:nvSpPr>
+          <p:cNvPr id="24" name="Rounded Rectangle 23"/>
+          <p:cNvSpPr/>
+          <p:nvPr/>
+        </p:nvSpPr>
+        <p:spPr>
+          <a:xfrm>
+            <a:off x="987552" y="4672584"/>
+            <a:ext cx="512064" cy="512064"/>
+          </a:xfrm>
+          <a:prstGeom prst="roundRect">
+            <a:avLst>
+              <a:gd name="adj" fmla="val 26000"/>
+            </a:avLst>
+          </a:prstGeom>
+          <a:solidFill>
+            <a:srgbClr val="EE0000"/>
+          </a:solidFill>
+          <a:ln>
+            <a:noFill/>
+          </a:ln>
+          <a:effectLst/>
+        </p:spPr>
+        <p:style>
+          <a:lnRef idx="1">
+            <a:schemeClr val="accent1"/>
+          </a:lnRef>
+          <a:fillRef idx="3">
+            <a:schemeClr val="accent1"/>
+          </a:fillRef>
+          <a:effectRef idx="2">
+            <a:schemeClr val="accent1"/>
+          </a:effectRef>
+          <a:fontRef idx="minor">
+            <a:schemeClr val="lt1"/>
+          </a:fontRef>
+        </p:style>
+        <p:txBody>
+          <a:bodyPr rtlCol="0" anchor="ctr"/>
+          <a:lstStyle/>
+          <a:p>
+            <a:pPr algn="ctr"/>
+          </a:p>
+        </p:txBody>
+      </p:sp>
       <p:pic>
         <p:nvPicPr>
-          <p:cNvPr id="20" name="Picture 19" descr="check_steel.png"/>
+          <p:cNvPr id="25" name="Picture 24" descr="check_white.png"/>
           <p:cNvPicPr>
             <a:picLocks noChangeAspect="1"/>
           </p:cNvPicPr>
@@ -4875,8 +6924,8 @@
         </p:blipFill>
         <p:spPr>
           <a:xfrm>
-            <a:off x="987552" y="5230368"/>
-            <a:ext cx="237744" cy="237744"/>
+            <a:off x="1110447" y="4795479"/>
+            <a:ext cx="266273" cy="266273"/>
           </a:xfrm>
           <a:prstGeom prst="rect">
             <a:avLst/>
@@ -4885,14 +6934,14 @@
       </p:pic>
       <p:sp>
         <p:nvSpPr>
-          <p:cNvPr id="21" name="TextBox 20"/>
+          <p:cNvPr id="26" name="TextBox 25"/>
           <p:cNvSpPr txBox="1"/>
           <p:nvPr/>
         </p:nvSpPr>
         <p:spPr>
           <a:xfrm>
-            <a:off x="1353312" y="5084064"/>
-            <a:ext cx="5029200" cy="530352"/>
+            <a:off x="1627632" y="4535424"/>
+            <a:ext cx="4206240" cy="786384"/>
           </a:xfrm>
           <a:prstGeom prst="rect">
             <a:avLst/>
@@ -4917,221 +6966,13 @@
               </a:spcAft>
             </a:pPr>
             <a:r>
-              <a:rPr sz="1200" b="0">
+              <a:rPr sz="1150" b="0">
                 <a:solidFill>
                   <a:srgbClr val="1A1A1A"/>
                 </a:solidFill>
                 <a:latin typeface="Red Hat Text"/>
               </a:rPr>
               <a:t>This module: fail over to another site automatically (mesh), connect real sites (RHSI), and the DR net underneath (OADP + GitOps, concept)</a:t>
-            </a:r>
-          </a:p>
-        </p:txBody>
-      </p:sp>
-      <p:sp>
-        <p:nvSpPr>
-          <p:cNvPr id="22" name="Rounded Rectangle 21"/>
-          <p:cNvSpPr/>
-          <p:nvPr/>
-        </p:nvSpPr>
-        <p:spPr>
-          <a:xfrm>
-            <a:off x="6812280" y="2670048"/>
-            <a:ext cx="4538167" cy="2944368"/>
-          </a:xfrm>
-          <a:prstGeom prst="roundRect">
-            <a:avLst>
-              <a:gd name="adj" fmla="val 4000"/>
-            </a:avLst>
-          </a:prstGeom>
-          <a:solidFill>
-            <a:srgbClr val="FFFFFF"/>
-          </a:solidFill>
-          <a:ln w="15240">
-            <a:solidFill>
-              <a:srgbClr val="DDE1E6"/>
-            </a:solidFill>
-          </a:ln>
-          <a:effectLst/>
-        </p:spPr>
-        <p:style>
-          <a:lnRef idx="1">
-            <a:schemeClr val="accent1"/>
-          </a:lnRef>
-          <a:fillRef idx="3">
-            <a:schemeClr val="accent1"/>
-          </a:fillRef>
-          <a:effectRef idx="2">
-            <a:schemeClr val="accent1"/>
-          </a:effectRef>
-          <a:fontRef idx="minor">
-            <a:schemeClr val="lt1"/>
-          </a:fontRef>
-        </p:style>
-        <p:txBody>
-          <a:bodyPr rtlCol="0" anchor="ctr"/>
-          <a:lstStyle/>
-          <a:p>
-            <a:pPr algn="ctr"/>
-          </a:p>
-        </p:txBody>
-      </p:sp>
-      <p:sp>
-        <p:nvSpPr>
-          <p:cNvPr id="23" name="Rounded Rectangle 22"/>
-          <p:cNvSpPr/>
-          <p:nvPr/>
-        </p:nvSpPr>
-        <p:spPr>
-          <a:xfrm>
-            <a:off x="7013448" y="2871216"/>
-            <a:ext cx="1298448" cy="310896"/>
-          </a:xfrm>
-          <a:prstGeom prst="roundRect">
-            <a:avLst>
-              <a:gd name="adj" fmla="val 50000"/>
-            </a:avLst>
-          </a:prstGeom>
-          <a:solidFill>
-            <a:srgbClr val="FCECEC"/>
-          </a:solidFill>
-          <a:ln>
-            <a:noFill/>
-          </a:ln>
-          <a:effectLst/>
-        </p:spPr>
-        <p:style>
-          <a:lnRef idx="1">
-            <a:schemeClr val="accent1"/>
-          </a:lnRef>
-          <a:fillRef idx="3">
-            <a:schemeClr val="accent1"/>
-          </a:fillRef>
-          <a:effectRef idx="2">
-            <a:schemeClr val="accent1"/>
-          </a:effectRef>
-          <a:fontRef idx="minor">
-            <a:schemeClr val="lt1"/>
-          </a:fontRef>
-        </p:style>
-        <p:txBody>
-          <a:bodyPr rtlCol="0" anchor="ctr"/>
-          <a:lstStyle/>
-          <a:p>
-            <a:pPr algn="ctr"/>
-          </a:p>
-        </p:txBody>
-      </p:sp>
-      <p:sp>
-        <p:nvSpPr>
-          <p:cNvPr id="24" name="TextBox 23"/>
-          <p:cNvSpPr txBox="1"/>
-          <p:nvPr/>
-        </p:nvSpPr>
-        <p:spPr>
-          <a:xfrm>
-            <a:off x="7013448" y="2871216"/>
-            <a:ext cx="1298448" cy="310896"/>
-          </a:xfrm>
-          <a:prstGeom prst="rect">
-            <a:avLst/>
-          </a:prstGeom>
-          <a:noFill/>
-        </p:spPr>
-        <p:txBody>
-          <a:bodyPr wrap="none" anchor="ctr" lIns="0" rIns="0" tIns="0" bIns="0">
-            <a:spAutoFit/>
-          </a:bodyPr>
-          <a:lstStyle/>
-          <a:p>
-            <a:pPr algn="ctr">
-              <a:lnSpc>
-                <a:spcPct val="106000"/>
-              </a:lnSpc>
-              <a:spcBef>
-                <a:spcPts val="0"/>
-              </a:spcBef>
-              <a:spcAft>
-                <a:spcPts val="0"/>
-              </a:spcAft>
-            </a:pPr>
-            <a:r>
-              <a:rPr sz="850" b="1">
-                <a:solidFill>
-                  <a:srgbClr val="B80000"/>
-                </a:solidFill>
-                <a:latin typeface="Red Hat Display"/>
-              </a:rPr>
-              <a:t>MEDIA PASS</a:t>
-            </a:r>
-          </a:p>
-        </p:txBody>
-      </p:sp>
-      <p:pic>
-        <p:nvPicPr>
-          <p:cNvPr id="25" name="Picture 24" descr="eye_slate.png"/>
-          <p:cNvPicPr>
-            <a:picLocks noChangeAspect="1"/>
-          </p:cNvPicPr>
-          <p:nvPr/>
-        </p:nvPicPr>
-        <p:blipFill>
-          <a:blip r:embed="rId4"/>
-          <a:stretch>
-            <a:fillRect/>
-          </a:stretch>
-        </p:blipFill>
-        <p:spPr>
-          <a:xfrm>
-            <a:off x="8843619" y="3383280"/>
-            <a:ext cx="475488" cy="475488"/>
-          </a:xfrm>
-          <a:prstGeom prst="rect">
-            <a:avLst/>
-          </a:prstGeom>
-        </p:spPr>
-      </p:pic>
-      <p:sp>
-        <p:nvSpPr>
-          <p:cNvPr id="26" name="TextBox 25"/>
-          <p:cNvSpPr txBox="1"/>
-          <p:nvPr/>
-        </p:nvSpPr>
-        <p:spPr>
-          <a:xfrm>
-            <a:off x="7050024" y="3995928"/>
-            <a:ext cx="4062679" cy="1481328"/>
-          </a:xfrm>
-          <a:prstGeom prst="rect">
-            <a:avLst/>
-          </a:prstGeom>
-          <a:noFill/>
-        </p:spPr>
-        <p:txBody>
-          <a:bodyPr wrap="square" anchor="t" lIns="0" rIns="0" tIns="0" bIns="0">
-            <a:spAutoFit/>
-          </a:bodyPr>
-          <a:lstStyle/>
-          <a:p>
-            <a:pPr algn="l">
-              <a:lnSpc>
-                <a:spcPct val="120000"/>
-              </a:lnSpc>
-              <a:spcBef>
-                <a:spcPts val="0"/>
-              </a:spcBef>
-              <a:spcAft>
-                <a:spcPts val="0"/>
-              </a:spcAft>
-            </a:pPr>
-            <a:r>
-              <a:rPr sz="950" b="0">
-                <a:solidFill>
-                  <a:srgbClr val="8A9099"/>
-                </a:solidFill>
-                <a:latin typeface="Red Hat Text"/>
-              </a:rPr>
-              <a:t>A vertical ladder, five rungs bottom-to-top: "① pod fails," "② node fails," "③ zone fails," "④ a whole SITE fails," "⑤ region fails." Bottom three tinted green with a bracket "in-site resilience: replicas · PDB · spread · HPA (you own this)"; the SITE rung amber with a bracket "cross-site failover: Service Mesh · RHSI (THIS lab)"; the region rung blue with a bracket "platform DR net: OADP · GitOps (concept)." Each rung's edge annotated with the mechanism that absorbs it.</a:t>
             </a:r>
           </a:p>
         </p:txBody>
@@ -5484,11 +7325,11 @@
         <p:spPr>
           <a:xfrm>
             <a:off x="841248" y="2670048"/>
-            <a:ext cx="5715000" cy="530352"/>
+            <a:ext cx="5138928" cy="786384"/>
           </a:xfrm>
           <a:prstGeom prst="roundRect">
             <a:avLst>
-              <a:gd name="adj" fmla="val 6000"/>
+              <a:gd name="adj" fmla="val 7000"/>
             </a:avLst>
           </a:prstGeom>
           <a:solidFill>
@@ -5523,9 +7364,55 @@
           </a:p>
         </p:txBody>
       </p:sp>
+      <p:sp>
+        <p:nvSpPr>
+          <p:cNvPr id="8" name="Rounded Rectangle 7"/>
+          <p:cNvSpPr/>
+          <p:nvPr/>
+        </p:nvSpPr>
+        <p:spPr>
+          <a:xfrm>
+            <a:off x="987552" y="2807208"/>
+            <a:ext cx="512064" cy="512064"/>
+          </a:xfrm>
+          <a:prstGeom prst="roundRect">
+            <a:avLst>
+              <a:gd name="adj" fmla="val 26000"/>
+            </a:avLst>
+          </a:prstGeom>
+          <a:solidFill>
+            <a:srgbClr val="EE0000"/>
+          </a:solidFill>
+          <a:ln>
+            <a:noFill/>
+          </a:ln>
+          <a:effectLst/>
+        </p:spPr>
+        <p:style>
+          <a:lnRef idx="1">
+            <a:schemeClr val="accent1"/>
+          </a:lnRef>
+          <a:fillRef idx="3">
+            <a:schemeClr val="accent1"/>
+          </a:fillRef>
+          <a:effectRef idx="2">
+            <a:schemeClr val="accent1"/>
+          </a:effectRef>
+          <a:fontRef idx="minor">
+            <a:schemeClr val="lt1"/>
+          </a:fontRef>
+        </p:style>
+        <p:txBody>
+          <a:bodyPr rtlCol="0" anchor="ctr"/>
+          <a:lstStyle/>
+          <a:p>
+            <a:pPr algn="ctr"/>
+          </a:p>
+        </p:txBody>
+      </p:sp>
       <p:pic>
         <p:nvPicPr>
-          <p:cNvPr id="8" name="Picture 7" descr="check_steel.png"/>
+          <p:cNvPr id="9" name="Picture 8" descr="check_white.png"/>
           <p:cNvPicPr>
             <a:picLocks noChangeAspect="1"/>
           </p:cNvPicPr>
@@ -5539,8 +7426,8 @@
         </p:blipFill>
         <p:spPr>
           <a:xfrm>
-            <a:off x="987552" y="2816352"/>
-            <a:ext cx="237744" cy="237744"/>
+            <a:off x="1110447" y="2930103"/>
+            <a:ext cx="266273" cy="266273"/>
           </a:xfrm>
           <a:prstGeom prst="rect">
             <a:avLst/>
@@ -5549,14 +7436,14 @@
       </p:pic>
       <p:sp>
         <p:nvSpPr>
-          <p:cNvPr id="9" name="TextBox 8"/>
+          <p:cNvPr id="10" name="TextBox 9"/>
           <p:cNvSpPr txBox="1"/>
           <p:nvPr/>
         </p:nvSpPr>
         <p:spPr>
           <a:xfrm>
-            <a:off x="1353312" y="2670048"/>
-            <a:ext cx="5029200" cy="530352"/>
+            <a:off x="1627632" y="2670048"/>
+            <a:ext cx="4206240" cy="786384"/>
           </a:xfrm>
           <a:prstGeom prst="rect">
             <a:avLst/>
@@ -5581,7 +7468,7 @@
               </a:spcAft>
             </a:pPr>
             <a:r>
-              <a:rPr sz="1200" b="0">
+              <a:rPr sz="1150" b="0">
                 <a:solidFill>
                   <a:srgbClr val="1A1A1A"/>
                 </a:solidFill>
@@ -5594,18 +7481,18 @@
       </p:sp>
       <p:sp>
         <p:nvSpPr>
-          <p:cNvPr id="10" name="Rounded Rectangle 9"/>
+          <p:cNvPr id="11" name="Rounded Rectangle 10"/>
           <p:cNvSpPr/>
           <p:nvPr/>
         </p:nvSpPr>
         <p:spPr>
           <a:xfrm>
-            <a:off x="841248" y="3273552"/>
-            <a:ext cx="5715000" cy="530352"/>
+            <a:off x="6254496" y="2670048"/>
+            <a:ext cx="5138928" cy="786384"/>
           </a:xfrm>
           <a:prstGeom prst="roundRect">
             <a:avLst>
-              <a:gd name="adj" fmla="val 6000"/>
+              <a:gd name="adj" fmla="val 7000"/>
             </a:avLst>
           </a:prstGeom>
           <a:solidFill>
@@ -5640,9 +7527,55 @@
           </a:p>
         </p:txBody>
       </p:sp>
+      <p:sp>
+        <p:nvSpPr>
+          <p:cNvPr id="12" name="Rounded Rectangle 11"/>
+          <p:cNvSpPr/>
+          <p:nvPr/>
+        </p:nvSpPr>
+        <p:spPr>
+          <a:xfrm>
+            <a:off x="6400800" y="2807208"/>
+            <a:ext cx="512064" cy="512064"/>
+          </a:xfrm>
+          <a:prstGeom prst="roundRect">
+            <a:avLst>
+              <a:gd name="adj" fmla="val 26000"/>
+            </a:avLst>
+          </a:prstGeom>
+          <a:solidFill>
+            <a:srgbClr val="EE0000"/>
+          </a:solidFill>
+          <a:ln>
+            <a:noFill/>
+          </a:ln>
+          <a:effectLst/>
+        </p:spPr>
+        <p:style>
+          <a:lnRef idx="1">
+            <a:schemeClr val="accent1"/>
+          </a:lnRef>
+          <a:fillRef idx="3">
+            <a:schemeClr val="accent1"/>
+          </a:fillRef>
+          <a:effectRef idx="2">
+            <a:schemeClr val="accent1"/>
+          </a:effectRef>
+          <a:fontRef idx="minor">
+            <a:schemeClr val="lt1"/>
+          </a:fontRef>
+        </p:style>
+        <p:txBody>
+          <a:bodyPr rtlCol="0" anchor="ctr"/>
+          <a:lstStyle/>
+          <a:p>
+            <a:pPr algn="ctr"/>
+          </a:p>
+        </p:txBody>
+      </p:sp>
       <p:pic>
         <p:nvPicPr>
-          <p:cNvPr id="11" name="Picture 10" descr="check_steel.png"/>
+          <p:cNvPr id="13" name="Picture 12" descr="check_white.png"/>
           <p:cNvPicPr>
             <a:picLocks noChangeAspect="1"/>
           </p:cNvPicPr>
@@ -5656,8 +7589,8 @@
         </p:blipFill>
         <p:spPr>
           <a:xfrm>
-            <a:off x="987552" y="3419856"/>
-            <a:ext cx="237744" cy="237744"/>
+            <a:off x="6523695" y="2930103"/>
+            <a:ext cx="266273" cy="266273"/>
           </a:xfrm>
           <a:prstGeom prst="rect">
             <a:avLst/>
@@ -5666,14 +7599,14 @@
       </p:pic>
       <p:sp>
         <p:nvSpPr>
-          <p:cNvPr id="12" name="TextBox 11"/>
+          <p:cNvPr id="14" name="TextBox 13"/>
           <p:cNvSpPr txBox="1"/>
           <p:nvPr/>
         </p:nvSpPr>
         <p:spPr>
           <a:xfrm>
-            <a:off x="1353312" y="3273552"/>
-            <a:ext cx="5029200" cy="530352"/>
+            <a:off x="7040880" y="2670048"/>
+            <a:ext cx="4206240" cy="786384"/>
           </a:xfrm>
           <a:prstGeom prst="rect">
             <a:avLst/>
@@ -5698,7 +7631,7 @@
               </a:spcAft>
             </a:pPr>
             <a:r>
-              <a:rPr sz="1200" b="0">
+              <a:rPr sz="1150" b="0">
                 <a:solidFill>
                   <a:srgbClr val="1A1A1A"/>
                 </a:solidFill>
@@ -5711,18 +7644,18 @@
       </p:sp>
       <p:sp>
         <p:nvSpPr>
-          <p:cNvPr id="13" name="Rounded Rectangle 12"/>
+          <p:cNvPr id="15" name="Rounded Rectangle 14"/>
           <p:cNvSpPr/>
           <p:nvPr/>
         </p:nvSpPr>
         <p:spPr>
           <a:xfrm>
-            <a:off x="841248" y="3877056"/>
-            <a:ext cx="5715000" cy="530352"/>
+            <a:off x="841248" y="3602736"/>
+            <a:ext cx="5138928" cy="786384"/>
           </a:xfrm>
           <a:prstGeom prst="roundRect">
             <a:avLst>
-              <a:gd name="adj" fmla="val 6000"/>
+              <a:gd name="adj" fmla="val 7000"/>
             </a:avLst>
           </a:prstGeom>
           <a:solidFill>
@@ -5757,9 +7690,55 @@
           </a:p>
         </p:txBody>
       </p:sp>
+      <p:sp>
+        <p:nvSpPr>
+          <p:cNvPr id="16" name="Rounded Rectangle 15"/>
+          <p:cNvSpPr/>
+          <p:nvPr/>
+        </p:nvSpPr>
+        <p:spPr>
+          <a:xfrm>
+            <a:off x="987552" y="3739896"/>
+            <a:ext cx="512064" cy="512064"/>
+          </a:xfrm>
+          <a:prstGeom prst="roundRect">
+            <a:avLst>
+              <a:gd name="adj" fmla="val 26000"/>
+            </a:avLst>
+          </a:prstGeom>
+          <a:solidFill>
+            <a:srgbClr val="EE0000"/>
+          </a:solidFill>
+          <a:ln>
+            <a:noFill/>
+          </a:ln>
+          <a:effectLst/>
+        </p:spPr>
+        <p:style>
+          <a:lnRef idx="1">
+            <a:schemeClr val="accent1"/>
+          </a:lnRef>
+          <a:fillRef idx="3">
+            <a:schemeClr val="accent1"/>
+          </a:fillRef>
+          <a:effectRef idx="2">
+            <a:schemeClr val="accent1"/>
+          </a:effectRef>
+          <a:fontRef idx="minor">
+            <a:schemeClr val="lt1"/>
+          </a:fontRef>
+        </p:style>
+        <p:txBody>
+          <a:bodyPr rtlCol="0" anchor="ctr"/>
+          <a:lstStyle/>
+          <a:p>
+            <a:pPr algn="ctr"/>
+          </a:p>
+        </p:txBody>
+      </p:sp>
       <p:pic>
         <p:nvPicPr>
-          <p:cNvPr id="14" name="Picture 13" descr="check_steel.png"/>
+          <p:cNvPr id="17" name="Picture 16" descr="check_white.png"/>
           <p:cNvPicPr>
             <a:picLocks noChangeAspect="1"/>
           </p:cNvPicPr>
@@ -5773,8 +7752,8 @@
         </p:blipFill>
         <p:spPr>
           <a:xfrm>
-            <a:off x="987552" y="4023360"/>
-            <a:ext cx="237744" cy="237744"/>
+            <a:off x="1110447" y="3862791"/>
+            <a:ext cx="266273" cy="266273"/>
           </a:xfrm>
           <a:prstGeom prst="rect">
             <a:avLst/>
@@ -5783,14 +7762,14 @@
       </p:pic>
       <p:sp>
         <p:nvSpPr>
-          <p:cNvPr id="15" name="TextBox 14"/>
+          <p:cNvPr id="18" name="TextBox 17"/>
           <p:cNvSpPr txBox="1"/>
           <p:nvPr/>
         </p:nvSpPr>
         <p:spPr>
           <a:xfrm>
-            <a:off x="1353312" y="3877056"/>
-            <a:ext cx="5029200" cy="530352"/>
+            <a:off x="1627632" y="3602736"/>
+            <a:ext cx="4206240" cy="786384"/>
           </a:xfrm>
           <a:prstGeom prst="rect">
             <a:avLst/>
@@ -5815,7 +7794,7 @@
               </a:spcAft>
             </a:pPr>
             <a:r>
-              <a:rPr sz="1200" b="0">
+              <a:rPr sz="1150" b="0">
                 <a:solidFill>
                   <a:srgbClr val="1A1A1A"/>
                 </a:solidFill>
@@ -5828,18 +7807,18 @@
       </p:sp>
       <p:sp>
         <p:nvSpPr>
-          <p:cNvPr id="16" name="Rounded Rectangle 15"/>
+          <p:cNvPr id="19" name="Rounded Rectangle 18"/>
           <p:cNvSpPr/>
           <p:nvPr/>
         </p:nvSpPr>
         <p:spPr>
           <a:xfrm>
-            <a:off x="841248" y="4480560"/>
-            <a:ext cx="5715000" cy="530352"/>
+            <a:off x="6254496" y="3602736"/>
+            <a:ext cx="5138928" cy="786384"/>
           </a:xfrm>
           <a:prstGeom prst="roundRect">
             <a:avLst>
-              <a:gd name="adj" fmla="val 6000"/>
+              <a:gd name="adj" fmla="val 7000"/>
             </a:avLst>
           </a:prstGeom>
           <a:solidFill>
@@ -5874,9 +7853,55 @@
           </a:p>
         </p:txBody>
       </p:sp>
+      <p:sp>
+        <p:nvSpPr>
+          <p:cNvPr id="20" name="Rounded Rectangle 19"/>
+          <p:cNvSpPr/>
+          <p:nvPr/>
+        </p:nvSpPr>
+        <p:spPr>
+          <a:xfrm>
+            <a:off x="6400800" y="3739896"/>
+            <a:ext cx="512064" cy="512064"/>
+          </a:xfrm>
+          <a:prstGeom prst="roundRect">
+            <a:avLst>
+              <a:gd name="adj" fmla="val 26000"/>
+            </a:avLst>
+          </a:prstGeom>
+          <a:solidFill>
+            <a:srgbClr val="EE0000"/>
+          </a:solidFill>
+          <a:ln>
+            <a:noFill/>
+          </a:ln>
+          <a:effectLst/>
+        </p:spPr>
+        <p:style>
+          <a:lnRef idx="1">
+            <a:schemeClr val="accent1"/>
+          </a:lnRef>
+          <a:fillRef idx="3">
+            <a:schemeClr val="accent1"/>
+          </a:fillRef>
+          <a:effectRef idx="2">
+            <a:schemeClr val="accent1"/>
+          </a:effectRef>
+          <a:fontRef idx="minor">
+            <a:schemeClr val="lt1"/>
+          </a:fontRef>
+        </p:style>
+        <p:txBody>
+          <a:bodyPr rtlCol="0" anchor="ctr"/>
+          <a:lstStyle/>
+          <a:p>
+            <a:pPr algn="ctr"/>
+          </a:p>
+        </p:txBody>
+      </p:sp>
       <p:pic>
         <p:nvPicPr>
-          <p:cNvPr id="17" name="Picture 16" descr="check_steel.png"/>
+          <p:cNvPr id="21" name="Picture 20" descr="check_white.png"/>
           <p:cNvPicPr>
             <a:picLocks noChangeAspect="1"/>
           </p:cNvPicPr>
@@ -5890,8 +7915,8 @@
         </p:blipFill>
         <p:spPr>
           <a:xfrm>
-            <a:off x="987552" y="4626864"/>
-            <a:ext cx="237744" cy="237744"/>
+            <a:off x="6523695" y="3862791"/>
+            <a:ext cx="266273" cy="266273"/>
           </a:xfrm>
           <a:prstGeom prst="rect">
             <a:avLst/>
@@ -5900,14 +7925,14 @@
       </p:pic>
       <p:sp>
         <p:nvSpPr>
-          <p:cNvPr id="18" name="TextBox 17"/>
+          <p:cNvPr id="22" name="TextBox 21"/>
           <p:cNvSpPr txBox="1"/>
           <p:nvPr/>
         </p:nvSpPr>
         <p:spPr>
           <a:xfrm>
-            <a:off x="1353312" y="4480560"/>
-            <a:ext cx="5029200" cy="530352"/>
+            <a:off x="7040880" y="3602736"/>
+            <a:ext cx="4206240" cy="786384"/>
           </a:xfrm>
           <a:prstGeom prst="rect">
             <a:avLst/>
@@ -5932,7 +7957,7 @@
               </a:spcAft>
             </a:pPr>
             <a:r>
-              <a:rPr sz="1200" b="0">
+              <a:rPr sz="1150" b="0">
                 <a:solidFill>
                   <a:srgbClr val="1A1A1A"/>
                 </a:solidFill>
@@ -5945,18 +7970,18 @@
       </p:sp>
       <p:sp>
         <p:nvSpPr>
-          <p:cNvPr id="19" name="Rounded Rectangle 18"/>
+          <p:cNvPr id="23" name="Rounded Rectangle 22"/>
           <p:cNvSpPr/>
           <p:nvPr/>
         </p:nvSpPr>
         <p:spPr>
           <a:xfrm>
-            <a:off x="841248" y="5084064"/>
-            <a:ext cx="5715000" cy="530352"/>
+            <a:off x="841248" y="4535424"/>
+            <a:ext cx="5138928" cy="786384"/>
           </a:xfrm>
           <a:prstGeom prst="roundRect">
             <a:avLst>
-              <a:gd name="adj" fmla="val 6000"/>
+              <a:gd name="adj" fmla="val 7000"/>
             </a:avLst>
           </a:prstGeom>
           <a:solidFill>
@@ -5991,9 +8016,55 @@
           </a:p>
         </p:txBody>
       </p:sp>
+      <p:sp>
+        <p:nvSpPr>
+          <p:cNvPr id="24" name="Rounded Rectangle 23"/>
+          <p:cNvSpPr/>
+          <p:nvPr/>
+        </p:nvSpPr>
+        <p:spPr>
+          <a:xfrm>
+            <a:off x="987552" y="4672584"/>
+            <a:ext cx="512064" cy="512064"/>
+          </a:xfrm>
+          <a:prstGeom prst="roundRect">
+            <a:avLst>
+              <a:gd name="adj" fmla="val 26000"/>
+            </a:avLst>
+          </a:prstGeom>
+          <a:solidFill>
+            <a:srgbClr val="EE0000"/>
+          </a:solidFill>
+          <a:ln>
+            <a:noFill/>
+          </a:ln>
+          <a:effectLst/>
+        </p:spPr>
+        <p:style>
+          <a:lnRef idx="1">
+            <a:schemeClr val="accent1"/>
+          </a:lnRef>
+          <a:fillRef idx="3">
+            <a:schemeClr val="accent1"/>
+          </a:fillRef>
+          <a:effectRef idx="2">
+            <a:schemeClr val="accent1"/>
+          </a:effectRef>
+          <a:fontRef idx="minor">
+            <a:schemeClr val="lt1"/>
+          </a:fontRef>
+        </p:style>
+        <p:txBody>
+          <a:bodyPr rtlCol="0" anchor="ctr"/>
+          <a:lstStyle/>
+          <a:p>
+            <a:pPr algn="ctr"/>
+          </a:p>
+        </p:txBody>
+      </p:sp>
       <p:pic>
         <p:nvPicPr>
-          <p:cNvPr id="20" name="Picture 19" descr="check_steel.png"/>
+          <p:cNvPr id="25" name="Picture 24" descr="check_white.png"/>
           <p:cNvPicPr>
             <a:picLocks noChangeAspect="1"/>
           </p:cNvPicPr>
@@ -6007,8 +8078,8 @@
         </p:blipFill>
         <p:spPr>
           <a:xfrm>
-            <a:off x="987552" y="5230368"/>
-            <a:ext cx="237744" cy="237744"/>
+            <a:off x="1110447" y="4795479"/>
+            <a:ext cx="266273" cy="266273"/>
           </a:xfrm>
           <a:prstGeom prst="rect">
             <a:avLst/>
@@ -6017,14 +8088,14 @@
       </p:pic>
       <p:sp>
         <p:nvSpPr>
-          <p:cNvPr id="21" name="TextBox 20"/>
+          <p:cNvPr id="26" name="TextBox 25"/>
           <p:cNvSpPr txBox="1"/>
           <p:nvPr/>
         </p:nvSpPr>
         <p:spPr>
           <a:xfrm>
-            <a:off x="1353312" y="5084064"/>
-            <a:ext cx="5029200" cy="530352"/>
+            <a:off x="1627632" y="4535424"/>
+            <a:ext cx="4206240" cy="786384"/>
           </a:xfrm>
           <a:prstGeom prst="rect">
             <a:avLst/>
@@ -6049,221 +8120,13 @@
               </a:spcAft>
             </a:pPr>
             <a:r>
-              <a:rPr sz="1200" b="0">
+              <a:rPr sz="1150" b="0">
                 <a:solidFill>
                   <a:srgbClr val="1A1A1A"/>
                 </a:solidFill>
                 <a:latin typeface="Red Hat Text"/>
               </a:rPr>
               <a:t>HorizontalPodAutoscaler → holds the floor, bursts under load — the lab proves it with a pod kill</a:t>
-            </a:r>
-          </a:p>
-        </p:txBody>
-      </p:sp>
-      <p:sp>
-        <p:nvSpPr>
-          <p:cNvPr id="22" name="Rounded Rectangle 21"/>
-          <p:cNvSpPr/>
-          <p:nvPr/>
-        </p:nvSpPr>
-        <p:spPr>
-          <a:xfrm>
-            <a:off x="6812280" y="2670048"/>
-            <a:ext cx="4538167" cy="2944368"/>
-          </a:xfrm>
-          <a:prstGeom prst="roundRect">
-            <a:avLst>
-              <a:gd name="adj" fmla="val 4000"/>
-            </a:avLst>
-          </a:prstGeom>
-          <a:solidFill>
-            <a:srgbClr val="FFFFFF"/>
-          </a:solidFill>
-          <a:ln w="15240">
-            <a:solidFill>
-              <a:srgbClr val="DDE1E6"/>
-            </a:solidFill>
-          </a:ln>
-          <a:effectLst/>
-        </p:spPr>
-        <p:style>
-          <a:lnRef idx="1">
-            <a:schemeClr val="accent1"/>
-          </a:lnRef>
-          <a:fillRef idx="3">
-            <a:schemeClr val="accent1"/>
-          </a:fillRef>
-          <a:effectRef idx="2">
-            <a:schemeClr val="accent1"/>
-          </a:effectRef>
-          <a:fontRef idx="minor">
-            <a:schemeClr val="lt1"/>
-          </a:fontRef>
-        </p:style>
-        <p:txBody>
-          <a:bodyPr rtlCol="0" anchor="ctr"/>
-          <a:lstStyle/>
-          <a:p>
-            <a:pPr algn="ctr"/>
-          </a:p>
-        </p:txBody>
-      </p:sp>
-      <p:sp>
-        <p:nvSpPr>
-          <p:cNvPr id="23" name="Rounded Rectangle 22"/>
-          <p:cNvSpPr/>
-          <p:nvPr/>
-        </p:nvSpPr>
-        <p:spPr>
-          <a:xfrm>
-            <a:off x="7013448" y="2871216"/>
-            <a:ext cx="1298448" cy="310896"/>
-          </a:xfrm>
-          <a:prstGeom prst="roundRect">
-            <a:avLst>
-              <a:gd name="adj" fmla="val 50000"/>
-            </a:avLst>
-          </a:prstGeom>
-          <a:solidFill>
-            <a:srgbClr val="FCECEC"/>
-          </a:solidFill>
-          <a:ln>
-            <a:noFill/>
-          </a:ln>
-          <a:effectLst/>
-        </p:spPr>
-        <p:style>
-          <a:lnRef idx="1">
-            <a:schemeClr val="accent1"/>
-          </a:lnRef>
-          <a:fillRef idx="3">
-            <a:schemeClr val="accent1"/>
-          </a:fillRef>
-          <a:effectRef idx="2">
-            <a:schemeClr val="accent1"/>
-          </a:effectRef>
-          <a:fontRef idx="minor">
-            <a:schemeClr val="lt1"/>
-          </a:fontRef>
-        </p:style>
-        <p:txBody>
-          <a:bodyPr rtlCol="0" anchor="ctr"/>
-          <a:lstStyle/>
-          <a:p>
-            <a:pPr algn="ctr"/>
-          </a:p>
-        </p:txBody>
-      </p:sp>
-      <p:sp>
-        <p:nvSpPr>
-          <p:cNvPr id="24" name="TextBox 23"/>
-          <p:cNvSpPr txBox="1"/>
-          <p:nvPr/>
-        </p:nvSpPr>
-        <p:spPr>
-          <a:xfrm>
-            <a:off x="7013448" y="2871216"/>
-            <a:ext cx="1298448" cy="310896"/>
-          </a:xfrm>
-          <a:prstGeom prst="rect">
-            <a:avLst/>
-          </a:prstGeom>
-          <a:noFill/>
-        </p:spPr>
-        <p:txBody>
-          <a:bodyPr wrap="none" anchor="ctr" lIns="0" rIns="0" tIns="0" bIns="0">
-            <a:spAutoFit/>
-          </a:bodyPr>
-          <a:lstStyle/>
-          <a:p>
-            <a:pPr algn="ctr">
-              <a:lnSpc>
-                <a:spcPct val="106000"/>
-              </a:lnSpc>
-              <a:spcBef>
-                <a:spcPts val="0"/>
-              </a:spcBef>
-              <a:spcAft>
-                <a:spcPts val="0"/>
-              </a:spcAft>
-            </a:pPr>
-            <a:r>
-              <a:rPr sz="850" b="1">
-                <a:solidFill>
-                  <a:srgbClr val="B80000"/>
-                </a:solidFill>
-                <a:latin typeface="Red Hat Display"/>
-              </a:rPr>
-              <a:t>MEDIA PASS</a:t>
-            </a:r>
-          </a:p>
-        </p:txBody>
-      </p:sp>
-      <p:pic>
-        <p:nvPicPr>
-          <p:cNvPr id="25" name="Picture 24" descr="eye_slate.png"/>
-          <p:cNvPicPr>
-            <a:picLocks noChangeAspect="1"/>
-          </p:cNvPicPr>
-          <p:nvPr/>
-        </p:nvPicPr>
-        <p:blipFill>
-          <a:blip r:embed="rId4"/>
-          <a:stretch>
-            <a:fillRect/>
-          </a:stretch>
-        </p:blipFill>
-        <p:spPr>
-          <a:xfrm>
-            <a:off x="8843619" y="3383280"/>
-            <a:ext cx="475488" cy="475488"/>
-          </a:xfrm>
-          <a:prstGeom prst="rect">
-            <a:avLst/>
-          </a:prstGeom>
-        </p:spPr>
-      </p:pic>
-      <p:sp>
-        <p:nvSpPr>
-          <p:cNvPr id="26" name="TextBox 25"/>
-          <p:cNvSpPr txBox="1"/>
-          <p:nvPr/>
-        </p:nvSpPr>
-        <p:spPr>
-          <a:xfrm>
-            <a:off x="7050024" y="3995928"/>
-            <a:ext cx="4062679" cy="1481328"/>
-          </a:xfrm>
-          <a:prstGeom prst="rect">
-            <a:avLst/>
-          </a:prstGeom>
-          <a:noFill/>
-        </p:spPr>
-        <p:txBody>
-          <a:bodyPr wrap="square" anchor="t" lIns="0" rIns="0" tIns="0" bIns="0">
-            <a:spAutoFit/>
-          </a:bodyPr>
-          <a:lstStyle/>
-          <a:p>
-            <a:pPr algn="l">
-              <a:lnSpc>
-                <a:spcPct val="120000"/>
-              </a:lnSpc>
-              <a:spcBef>
-                <a:spcPts val="0"/>
-              </a:spcBef>
-              <a:spcAft>
-                <a:spcPts val="0"/>
-              </a:spcAft>
-            </a:pPr>
-            <a:r>
-              <a:rPr sz="950" b="0">
-                <a:solidFill>
-                  <a:srgbClr val="8A9099"/>
-                </a:solidFill>
-                <a:latin typeface="Red Hat Text"/>
-              </a:rPr>
-              <a:t>The primary site as a box with three claims pods on three distinct node-strips, a "PDB: min available 2" chip, an "HPA 3→6" chip. One pod struck through (killed) with a fresh pod fading in beside it and a caption "service never dipped — replaced in ~6 s." A footer bracket labels the whole box "in-site resiliency — survives pod/node/zone, NOT a whole-site loss."</a:t>
             </a:r>
           </a:p>
         </p:txBody>
@@ -6616,11 +8479,11 @@
         <p:spPr>
           <a:xfrm>
             <a:off x="841248" y="2670048"/>
-            <a:ext cx="5715000" cy="530352"/>
+            <a:ext cx="5138928" cy="786384"/>
           </a:xfrm>
           <a:prstGeom prst="roundRect">
             <a:avLst>
-              <a:gd name="adj" fmla="val 6000"/>
+              <a:gd name="adj" fmla="val 7000"/>
             </a:avLst>
           </a:prstGeom>
           <a:solidFill>
@@ -6655,9 +8518,55 @@
           </a:p>
         </p:txBody>
       </p:sp>
+      <p:sp>
+        <p:nvSpPr>
+          <p:cNvPr id="8" name="Rounded Rectangle 7"/>
+          <p:cNvSpPr/>
+          <p:nvPr/>
+        </p:nvSpPr>
+        <p:spPr>
+          <a:xfrm>
+            <a:off x="987552" y="2807208"/>
+            <a:ext cx="512064" cy="512064"/>
+          </a:xfrm>
+          <a:prstGeom prst="roundRect">
+            <a:avLst>
+              <a:gd name="adj" fmla="val 26000"/>
+            </a:avLst>
+          </a:prstGeom>
+          <a:solidFill>
+            <a:srgbClr val="EE0000"/>
+          </a:solidFill>
+          <a:ln>
+            <a:noFill/>
+          </a:ln>
+          <a:effectLst/>
+        </p:spPr>
+        <p:style>
+          <a:lnRef idx="1">
+            <a:schemeClr val="accent1"/>
+          </a:lnRef>
+          <a:fillRef idx="3">
+            <a:schemeClr val="accent1"/>
+          </a:fillRef>
+          <a:effectRef idx="2">
+            <a:schemeClr val="accent1"/>
+          </a:effectRef>
+          <a:fontRef idx="minor">
+            <a:schemeClr val="lt1"/>
+          </a:fontRef>
+        </p:style>
+        <p:txBody>
+          <a:bodyPr rtlCol="0" anchor="ctr"/>
+          <a:lstStyle/>
+          <a:p>
+            <a:pPr algn="ctr"/>
+          </a:p>
+        </p:txBody>
+      </p:sp>
       <p:pic>
         <p:nvPicPr>
-          <p:cNvPr id="8" name="Picture 7" descr="check_steel.png"/>
+          <p:cNvPr id="9" name="Picture 8" descr="check_white.png"/>
           <p:cNvPicPr>
             <a:picLocks noChangeAspect="1"/>
           </p:cNvPicPr>
@@ -6671,8 +8580,8 @@
         </p:blipFill>
         <p:spPr>
           <a:xfrm>
-            <a:off x="987552" y="2816352"/>
-            <a:ext cx="237744" cy="237744"/>
+            <a:off x="1110447" y="2930103"/>
+            <a:ext cx="266273" cy="266273"/>
           </a:xfrm>
           <a:prstGeom prst="rect">
             <a:avLst/>
@@ -6681,14 +8590,14 @@
       </p:pic>
       <p:sp>
         <p:nvSpPr>
-          <p:cNvPr id="9" name="TextBox 8"/>
+          <p:cNvPr id="10" name="TextBox 9"/>
           <p:cNvSpPr txBox="1"/>
           <p:nvPr/>
         </p:nvSpPr>
         <p:spPr>
           <a:xfrm>
-            <a:off x="1353312" y="2670048"/>
-            <a:ext cx="5029200" cy="530352"/>
+            <a:off x="1627632" y="2670048"/>
+            <a:ext cx="4206240" cy="786384"/>
           </a:xfrm>
           <a:prstGeom prst="rect">
             <a:avLst/>
@@ -6713,7 +8622,7 @@
               </a:spcAft>
             </a:pPr>
             <a:r>
-              <a:rPr sz="1200" b="0">
+              <a:rPr sz="1150" b="0">
                 <a:solidFill>
                   <a:srgbClr val="1A1A1A"/>
                 </a:solidFill>
@@ -6726,18 +8635,18 @@
       </p:sp>
       <p:sp>
         <p:nvSpPr>
-          <p:cNvPr id="10" name="Rounded Rectangle 9"/>
+          <p:cNvPr id="11" name="Rounded Rectangle 10"/>
           <p:cNvSpPr/>
           <p:nvPr/>
         </p:nvSpPr>
         <p:spPr>
           <a:xfrm>
-            <a:off x="841248" y="3273552"/>
-            <a:ext cx="5715000" cy="530352"/>
+            <a:off x="6254496" y="2670048"/>
+            <a:ext cx="5138928" cy="786384"/>
           </a:xfrm>
           <a:prstGeom prst="roundRect">
             <a:avLst>
-              <a:gd name="adj" fmla="val 6000"/>
+              <a:gd name="adj" fmla="val 7000"/>
             </a:avLst>
           </a:prstGeom>
           <a:solidFill>
@@ -6772,9 +8681,55 @@
           </a:p>
         </p:txBody>
       </p:sp>
+      <p:sp>
+        <p:nvSpPr>
+          <p:cNvPr id="12" name="Rounded Rectangle 11"/>
+          <p:cNvSpPr/>
+          <p:nvPr/>
+        </p:nvSpPr>
+        <p:spPr>
+          <a:xfrm>
+            <a:off x="6400800" y="2807208"/>
+            <a:ext cx="512064" cy="512064"/>
+          </a:xfrm>
+          <a:prstGeom prst="roundRect">
+            <a:avLst>
+              <a:gd name="adj" fmla="val 26000"/>
+            </a:avLst>
+          </a:prstGeom>
+          <a:solidFill>
+            <a:srgbClr val="EE0000"/>
+          </a:solidFill>
+          <a:ln>
+            <a:noFill/>
+          </a:ln>
+          <a:effectLst/>
+        </p:spPr>
+        <p:style>
+          <a:lnRef idx="1">
+            <a:schemeClr val="accent1"/>
+          </a:lnRef>
+          <a:fillRef idx="3">
+            <a:schemeClr val="accent1"/>
+          </a:fillRef>
+          <a:effectRef idx="2">
+            <a:schemeClr val="accent1"/>
+          </a:effectRef>
+          <a:fontRef idx="minor">
+            <a:schemeClr val="lt1"/>
+          </a:fontRef>
+        </p:style>
+        <p:txBody>
+          <a:bodyPr rtlCol="0" anchor="ctr"/>
+          <a:lstStyle/>
+          <a:p>
+            <a:pPr algn="ctr"/>
+          </a:p>
+        </p:txBody>
+      </p:sp>
       <p:pic>
         <p:nvPicPr>
-          <p:cNvPr id="11" name="Picture 10" descr="check_steel.png"/>
+          <p:cNvPr id="13" name="Picture 12" descr="check_white.png"/>
           <p:cNvPicPr>
             <a:picLocks noChangeAspect="1"/>
           </p:cNvPicPr>
@@ -6788,8 +8743,8 @@
         </p:blipFill>
         <p:spPr>
           <a:xfrm>
-            <a:off x="987552" y="3419856"/>
-            <a:ext cx="237744" cy="237744"/>
+            <a:off x="6523695" y="2930103"/>
+            <a:ext cx="266273" cy="266273"/>
           </a:xfrm>
           <a:prstGeom prst="rect">
             <a:avLst/>
@@ -6798,14 +8753,14 @@
       </p:pic>
       <p:sp>
         <p:nvSpPr>
-          <p:cNvPr id="12" name="TextBox 11"/>
+          <p:cNvPr id="14" name="TextBox 13"/>
           <p:cNvSpPr txBox="1"/>
           <p:nvPr/>
         </p:nvSpPr>
         <p:spPr>
           <a:xfrm>
-            <a:off x="1353312" y="3273552"/>
-            <a:ext cx="5029200" cy="530352"/>
+            <a:off x="7040880" y="2670048"/>
+            <a:ext cx="4206240" cy="786384"/>
           </a:xfrm>
           <a:prstGeom prst="rect">
             <a:avLst/>
@@ -6830,7 +8785,7 @@
               </a:spcAft>
             </a:pPr>
             <a:r>
-              <a:rPr sz="1200" b="0">
+              <a:rPr sz="1150" b="0">
                 <a:solidFill>
                   <a:srgbClr val="1A1A1A"/>
                 </a:solidFill>
@@ -6843,18 +8798,18 @@
       </p:sp>
       <p:sp>
         <p:nvSpPr>
-          <p:cNvPr id="13" name="Rounded Rectangle 12"/>
+          <p:cNvPr id="15" name="Rounded Rectangle 14"/>
           <p:cNvSpPr/>
           <p:nvPr/>
         </p:nvSpPr>
         <p:spPr>
           <a:xfrm>
-            <a:off x="841248" y="3877056"/>
-            <a:ext cx="5715000" cy="530352"/>
+            <a:off x="841248" y="3602736"/>
+            <a:ext cx="5138928" cy="786384"/>
           </a:xfrm>
           <a:prstGeom prst="roundRect">
             <a:avLst>
-              <a:gd name="adj" fmla="val 6000"/>
+              <a:gd name="adj" fmla="val 7000"/>
             </a:avLst>
           </a:prstGeom>
           <a:solidFill>
@@ -6889,9 +8844,55 @@
           </a:p>
         </p:txBody>
       </p:sp>
+      <p:sp>
+        <p:nvSpPr>
+          <p:cNvPr id="16" name="Rounded Rectangle 15"/>
+          <p:cNvSpPr/>
+          <p:nvPr/>
+        </p:nvSpPr>
+        <p:spPr>
+          <a:xfrm>
+            <a:off x="987552" y="3739896"/>
+            <a:ext cx="512064" cy="512064"/>
+          </a:xfrm>
+          <a:prstGeom prst="roundRect">
+            <a:avLst>
+              <a:gd name="adj" fmla="val 26000"/>
+            </a:avLst>
+          </a:prstGeom>
+          <a:solidFill>
+            <a:srgbClr val="EE0000"/>
+          </a:solidFill>
+          <a:ln>
+            <a:noFill/>
+          </a:ln>
+          <a:effectLst/>
+        </p:spPr>
+        <p:style>
+          <a:lnRef idx="1">
+            <a:schemeClr val="accent1"/>
+          </a:lnRef>
+          <a:fillRef idx="3">
+            <a:schemeClr val="accent1"/>
+          </a:fillRef>
+          <a:effectRef idx="2">
+            <a:schemeClr val="accent1"/>
+          </a:effectRef>
+          <a:fontRef idx="minor">
+            <a:schemeClr val="lt1"/>
+          </a:fontRef>
+        </p:style>
+        <p:txBody>
+          <a:bodyPr rtlCol="0" anchor="ctr"/>
+          <a:lstStyle/>
+          <a:p>
+            <a:pPr algn="ctr"/>
+          </a:p>
+        </p:txBody>
+      </p:sp>
       <p:pic>
         <p:nvPicPr>
-          <p:cNvPr id="14" name="Picture 13" descr="check_steel.png"/>
+          <p:cNvPr id="17" name="Picture 16" descr="check_white.png"/>
           <p:cNvPicPr>
             <a:picLocks noChangeAspect="1"/>
           </p:cNvPicPr>
@@ -6905,8 +8906,8 @@
         </p:blipFill>
         <p:spPr>
           <a:xfrm>
-            <a:off x="987552" y="4023360"/>
-            <a:ext cx="237744" cy="237744"/>
+            <a:off x="1110447" y="3862791"/>
+            <a:ext cx="266273" cy="266273"/>
           </a:xfrm>
           <a:prstGeom prst="rect">
             <a:avLst/>
@@ -6915,14 +8916,14 @@
       </p:pic>
       <p:sp>
         <p:nvSpPr>
-          <p:cNvPr id="15" name="TextBox 14"/>
+          <p:cNvPr id="18" name="TextBox 17"/>
           <p:cNvSpPr txBox="1"/>
           <p:nvPr/>
         </p:nvSpPr>
         <p:spPr>
           <a:xfrm>
-            <a:off x="1353312" y="3877056"/>
-            <a:ext cx="5029200" cy="530352"/>
+            <a:off x="1627632" y="3602736"/>
+            <a:ext cx="4206240" cy="786384"/>
           </a:xfrm>
           <a:prstGeom prst="rect">
             <a:avLst/>
@@ -6947,7 +8948,7 @@
               </a:spcAft>
             </a:pPr>
             <a:r>
-              <a:rPr sz="1200" b="0">
+              <a:rPr sz="1150" b="0">
                 <a:solidFill>
                   <a:srgbClr val="1A1A1A"/>
                 </a:solidFill>
@@ -6960,18 +8961,18 @@
       </p:sp>
       <p:sp>
         <p:nvSpPr>
-          <p:cNvPr id="16" name="Rounded Rectangle 15"/>
+          <p:cNvPr id="19" name="Rounded Rectangle 18"/>
           <p:cNvSpPr/>
           <p:nvPr/>
         </p:nvSpPr>
         <p:spPr>
           <a:xfrm>
-            <a:off x="841248" y="4480560"/>
-            <a:ext cx="5715000" cy="530352"/>
+            <a:off x="6254496" y="3602736"/>
+            <a:ext cx="5138928" cy="786384"/>
           </a:xfrm>
           <a:prstGeom prst="roundRect">
             <a:avLst>
-              <a:gd name="adj" fmla="val 6000"/>
+              <a:gd name="adj" fmla="val 7000"/>
             </a:avLst>
           </a:prstGeom>
           <a:solidFill>
@@ -7006,9 +9007,55 @@
           </a:p>
         </p:txBody>
       </p:sp>
+      <p:sp>
+        <p:nvSpPr>
+          <p:cNvPr id="20" name="Rounded Rectangle 19"/>
+          <p:cNvSpPr/>
+          <p:nvPr/>
+        </p:nvSpPr>
+        <p:spPr>
+          <a:xfrm>
+            <a:off x="6400800" y="3739896"/>
+            <a:ext cx="512064" cy="512064"/>
+          </a:xfrm>
+          <a:prstGeom prst="roundRect">
+            <a:avLst>
+              <a:gd name="adj" fmla="val 26000"/>
+            </a:avLst>
+          </a:prstGeom>
+          <a:solidFill>
+            <a:srgbClr val="EE0000"/>
+          </a:solidFill>
+          <a:ln>
+            <a:noFill/>
+          </a:ln>
+          <a:effectLst/>
+        </p:spPr>
+        <p:style>
+          <a:lnRef idx="1">
+            <a:schemeClr val="accent1"/>
+          </a:lnRef>
+          <a:fillRef idx="3">
+            <a:schemeClr val="accent1"/>
+          </a:fillRef>
+          <a:effectRef idx="2">
+            <a:schemeClr val="accent1"/>
+          </a:effectRef>
+          <a:fontRef idx="minor">
+            <a:schemeClr val="lt1"/>
+          </a:fontRef>
+        </p:style>
+        <p:txBody>
+          <a:bodyPr rtlCol="0" anchor="ctr"/>
+          <a:lstStyle/>
+          <a:p>
+            <a:pPr algn="ctr"/>
+          </a:p>
+        </p:txBody>
+      </p:sp>
       <p:pic>
         <p:nvPicPr>
-          <p:cNvPr id="17" name="Picture 16" descr="check_steel.png"/>
+          <p:cNvPr id="21" name="Picture 20" descr="check_white.png"/>
           <p:cNvPicPr>
             <a:picLocks noChangeAspect="1"/>
           </p:cNvPicPr>
@@ -7022,8 +9069,8 @@
         </p:blipFill>
         <p:spPr>
           <a:xfrm>
-            <a:off x="987552" y="4626864"/>
-            <a:ext cx="237744" cy="237744"/>
+            <a:off x="6523695" y="3862791"/>
+            <a:ext cx="266273" cy="266273"/>
           </a:xfrm>
           <a:prstGeom prst="rect">
             <a:avLst/>
@@ -7032,14 +9079,14 @@
       </p:pic>
       <p:sp>
         <p:nvSpPr>
-          <p:cNvPr id="18" name="TextBox 17"/>
+          <p:cNvPr id="22" name="TextBox 21"/>
           <p:cNvSpPr txBox="1"/>
           <p:nvPr/>
         </p:nvSpPr>
         <p:spPr>
           <a:xfrm>
-            <a:off x="1353312" y="4480560"/>
-            <a:ext cx="5029200" cy="530352"/>
+            <a:off x="7040880" y="3602736"/>
+            <a:ext cx="4206240" cy="786384"/>
           </a:xfrm>
           <a:prstGeom prst="rect">
             <a:avLst/>
@@ -7064,7 +9111,7 @@
               </a:spcAft>
             </a:pPr>
             <a:r>
-              <a:rPr sz="1200" b="0">
+              <a:rPr sz="1150" b="0">
                 <a:solidFill>
                   <a:srgbClr val="1A1A1A"/>
                 </a:solidFill>
@@ -7077,18 +9124,18 @@
       </p:sp>
       <p:sp>
         <p:nvSpPr>
-          <p:cNvPr id="19" name="Rounded Rectangle 18"/>
+          <p:cNvPr id="23" name="Rounded Rectangle 22"/>
           <p:cNvSpPr/>
           <p:nvPr/>
         </p:nvSpPr>
         <p:spPr>
           <a:xfrm>
-            <a:off x="841248" y="5084064"/>
-            <a:ext cx="5715000" cy="530352"/>
+            <a:off x="841248" y="4535424"/>
+            <a:ext cx="5138928" cy="786384"/>
           </a:xfrm>
           <a:prstGeom prst="roundRect">
             <a:avLst>
-              <a:gd name="adj" fmla="val 6000"/>
+              <a:gd name="adj" fmla="val 7000"/>
             </a:avLst>
           </a:prstGeom>
           <a:solidFill>
@@ -7123,9 +9170,55 @@
           </a:p>
         </p:txBody>
       </p:sp>
+      <p:sp>
+        <p:nvSpPr>
+          <p:cNvPr id="24" name="Rounded Rectangle 23"/>
+          <p:cNvSpPr/>
+          <p:nvPr/>
+        </p:nvSpPr>
+        <p:spPr>
+          <a:xfrm>
+            <a:off x="987552" y="4672584"/>
+            <a:ext cx="512064" cy="512064"/>
+          </a:xfrm>
+          <a:prstGeom prst="roundRect">
+            <a:avLst>
+              <a:gd name="adj" fmla="val 26000"/>
+            </a:avLst>
+          </a:prstGeom>
+          <a:solidFill>
+            <a:srgbClr val="EE0000"/>
+          </a:solidFill>
+          <a:ln>
+            <a:noFill/>
+          </a:ln>
+          <a:effectLst/>
+        </p:spPr>
+        <p:style>
+          <a:lnRef idx="1">
+            <a:schemeClr val="accent1"/>
+          </a:lnRef>
+          <a:fillRef idx="3">
+            <a:schemeClr val="accent1"/>
+          </a:fillRef>
+          <a:effectRef idx="2">
+            <a:schemeClr val="accent1"/>
+          </a:effectRef>
+          <a:fontRef idx="minor">
+            <a:schemeClr val="lt1"/>
+          </a:fontRef>
+        </p:style>
+        <p:txBody>
+          <a:bodyPr rtlCol="0" anchor="ctr"/>
+          <a:lstStyle/>
+          <a:p>
+            <a:pPr algn="ctr"/>
+          </a:p>
+        </p:txBody>
+      </p:sp>
       <p:pic>
         <p:nvPicPr>
-          <p:cNvPr id="20" name="Picture 19" descr="check_steel.png"/>
+          <p:cNvPr id="25" name="Picture 24" descr="check_white.png"/>
           <p:cNvPicPr>
             <a:picLocks noChangeAspect="1"/>
           </p:cNvPicPr>
@@ -7139,8 +9232,8 @@
         </p:blipFill>
         <p:spPr>
           <a:xfrm>
-            <a:off x="987552" y="5230368"/>
-            <a:ext cx="237744" cy="237744"/>
+            <a:off x="1110447" y="4795479"/>
+            <a:ext cx="266273" cy="266273"/>
           </a:xfrm>
           <a:prstGeom prst="rect">
             <a:avLst/>
@@ -7149,14 +9242,14 @@
       </p:pic>
       <p:sp>
         <p:nvSpPr>
-          <p:cNvPr id="21" name="TextBox 20"/>
+          <p:cNvPr id="26" name="TextBox 25"/>
           <p:cNvSpPr txBox="1"/>
           <p:nvPr/>
         </p:nvSpPr>
         <p:spPr>
           <a:xfrm>
-            <a:off x="1353312" y="5084064"/>
-            <a:ext cx="5029200" cy="530352"/>
+            <a:off x="1627632" y="4535424"/>
+            <a:ext cx="4206240" cy="786384"/>
           </a:xfrm>
           <a:prstGeom prst="rect">
             <a:avLst/>
@@ -7181,221 +9274,13 @@
               </a:spcAft>
             </a:pPr>
             <a:r>
-              <a:rPr sz="1200" b="0">
+              <a:rPr sz="1150" b="0">
                 <a:solidFill>
                   <a:srgbClr val="1A1A1A"/>
                 </a:solidFill>
                 <a:latin typeface="Red Hat Text"/>
               </a:rPr>
               <a:t>Three small resources, ZERO application code — the client never changes its address</a:t>
-            </a:r>
-          </a:p>
-        </p:txBody>
-      </p:sp>
-      <p:sp>
-        <p:nvSpPr>
-          <p:cNvPr id="22" name="Rounded Rectangle 21"/>
-          <p:cNvSpPr/>
-          <p:nvPr/>
-        </p:nvSpPr>
-        <p:spPr>
-          <a:xfrm>
-            <a:off x="6812280" y="2670048"/>
-            <a:ext cx="4538167" cy="2944368"/>
-          </a:xfrm>
-          <a:prstGeom prst="roundRect">
-            <a:avLst>
-              <a:gd name="adj" fmla="val 4000"/>
-            </a:avLst>
-          </a:prstGeom>
-          <a:solidFill>
-            <a:srgbClr val="FFFFFF"/>
-          </a:solidFill>
-          <a:ln w="15240">
-            <a:solidFill>
-              <a:srgbClr val="DDE1E6"/>
-            </a:solidFill>
-          </a:ln>
-          <a:effectLst/>
-        </p:spPr>
-        <p:style>
-          <a:lnRef idx="1">
-            <a:schemeClr val="accent1"/>
-          </a:lnRef>
-          <a:fillRef idx="3">
-            <a:schemeClr val="accent1"/>
-          </a:fillRef>
-          <a:effectRef idx="2">
-            <a:schemeClr val="accent1"/>
-          </a:effectRef>
-          <a:fontRef idx="minor">
-            <a:schemeClr val="lt1"/>
-          </a:fontRef>
-        </p:style>
-        <p:txBody>
-          <a:bodyPr rtlCol="0" anchor="ctr"/>
-          <a:lstStyle/>
-          <a:p>
-            <a:pPr algn="ctr"/>
-          </a:p>
-        </p:txBody>
-      </p:sp>
-      <p:sp>
-        <p:nvSpPr>
-          <p:cNvPr id="23" name="Rounded Rectangle 22"/>
-          <p:cNvSpPr/>
-          <p:nvPr/>
-        </p:nvSpPr>
-        <p:spPr>
-          <a:xfrm>
-            <a:off x="7013448" y="2871216"/>
-            <a:ext cx="1298448" cy="310896"/>
-          </a:xfrm>
-          <a:prstGeom prst="roundRect">
-            <a:avLst>
-              <a:gd name="adj" fmla="val 50000"/>
-            </a:avLst>
-          </a:prstGeom>
-          <a:solidFill>
-            <a:srgbClr val="FCECEC"/>
-          </a:solidFill>
-          <a:ln>
-            <a:noFill/>
-          </a:ln>
-          <a:effectLst/>
-        </p:spPr>
-        <p:style>
-          <a:lnRef idx="1">
-            <a:schemeClr val="accent1"/>
-          </a:lnRef>
-          <a:fillRef idx="3">
-            <a:schemeClr val="accent1"/>
-          </a:fillRef>
-          <a:effectRef idx="2">
-            <a:schemeClr val="accent1"/>
-          </a:effectRef>
-          <a:fontRef idx="minor">
-            <a:schemeClr val="lt1"/>
-          </a:fontRef>
-        </p:style>
-        <p:txBody>
-          <a:bodyPr rtlCol="0" anchor="ctr"/>
-          <a:lstStyle/>
-          <a:p>
-            <a:pPr algn="ctr"/>
-          </a:p>
-        </p:txBody>
-      </p:sp>
-      <p:sp>
-        <p:nvSpPr>
-          <p:cNvPr id="24" name="TextBox 23"/>
-          <p:cNvSpPr txBox="1"/>
-          <p:nvPr/>
-        </p:nvSpPr>
-        <p:spPr>
-          <a:xfrm>
-            <a:off x="7013448" y="2871216"/>
-            <a:ext cx="1298448" cy="310896"/>
-          </a:xfrm>
-          <a:prstGeom prst="rect">
-            <a:avLst/>
-          </a:prstGeom>
-          <a:noFill/>
-        </p:spPr>
-        <p:txBody>
-          <a:bodyPr wrap="none" anchor="ctr" lIns="0" rIns="0" tIns="0" bIns="0">
-            <a:spAutoFit/>
-          </a:bodyPr>
-          <a:lstStyle/>
-          <a:p>
-            <a:pPr algn="ctr">
-              <a:lnSpc>
-                <a:spcPct val="106000"/>
-              </a:lnSpc>
-              <a:spcBef>
-                <a:spcPts val="0"/>
-              </a:spcBef>
-              <a:spcAft>
-                <a:spcPts val="0"/>
-              </a:spcAft>
-            </a:pPr>
-            <a:r>
-              <a:rPr sz="850" b="1">
-                <a:solidFill>
-                  <a:srgbClr val="B80000"/>
-                </a:solidFill>
-                <a:latin typeface="Red Hat Display"/>
-              </a:rPr>
-              <a:t>MEDIA PASS</a:t>
-            </a:r>
-          </a:p>
-        </p:txBody>
-      </p:sp>
-      <p:pic>
-        <p:nvPicPr>
-          <p:cNvPr id="25" name="Picture 24" descr="eye_slate.png"/>
-          <p:cNvPicPr>
-            <a:picLocks noChangeAspect="1"/>
-          </p:cNvPicPr>
-          <p:nvPr/>
-        </p:nvPicPr>
-        <p:blipFill>
-          <a:blip r:embed="rId4"/>
-          <a:stretch>
-            <a:fillRect/>
-          </a:stretch>
-        </p:blipFill>
-        <p:spPr>
-          <a:xfrm>
-            <a:off x="8843619" y="3383280"/>
-            <a:ext cx="475488" cy="475488"/>
-          </a:xfrm>
-          <a:prstGeom prst="rect">
-            <a:avLst/>
-          </a:prstGeom>
-        </p:spPr>
-      </p:pic>
-      <p:sp>
-        <p:nvSpPr>
-          <p:cNvPr id="26" name="TextBox 25"/>
-          <p:cNvSpPr txBox="1"/>
-          <p:nvPr/>
-        </p:nvSpPr>
-        <p:spPr>
-          <a:xfrm>
-            <a:off x="7050024" y="3995928"/>
-            <a:ext cx="4062679" cy="1481328"/>
-          </a:xfrm>
-          <a:prstGeom prst="rect">
-            <a:avLst/>
-          </a:prstGeom>
-          <a:noFill/>
-        </p:spPr>
-        <p:txBody>
-          <a:bodyPr wrap="square" anchor="t" lIns="0" rIns="0" tIns="0" bIns="0">
-            <a:spAutoFit/>
-          </a:bodyPr>
-          <a:lstStyle/>
-          <a:p>
-            <a:pPr algn="l">
-              <a:lnSpc>
-                <a:spcPct val="120000"/>
-              </a:lnSpc>
-              <a:spcBef>
-                <a:spcPts val="0"/>
-              </a:spcBef>
-              <a:spcAft>
-                <a:spcPts val="0"/>
-              </a:spcAft>
-            </a:pPr>
-            <a:r>
-              <a:rPr sz="950" b="0">
-                <a:solidFill>
-                  <a:srgbClr val="8A9099"/>
-                </a:solidFill>
-                <a:latin typeface="Red Hat Text"/>
-              </a:rPr>
-              <a:t>The mesh-failover diagram (concept slide 3 asset): a client → an ingress Gateway ("pinned to site A's locality") → two site boxes, "Site A — PRIMARY (3 replicas)" with a solid bold arrow "normal: locality prefers A," and "Site B — SECONDARY (3 replicas)" with a dashed arrow "on A failure: outlier ejects A, retries flip to B." Three CR chips under the gateway: ServiceEntry · DestinationRule · VirtualService.</a:t>
             </a:r>
           </a:p>
         </p:txBody>
@@ -7748,11 +9633,11 @@
         <p:spPr>
           <a:xfrm>
             <a:off x="841248" y="2670048"/>
-            <a:ext cx="5715000" cy="530352"/>
+            <a:ext cx="5138928" cy="786384"/>
           </a:xfrm>
           <a:prstGeom prst="roundRect">
             <a:avLst>
-              <a:gd name="adj" fmla="val 6000"/>
+              <a:gd name="adj" fmla="val 7000"/>
             </a:avLst>
           </a:prstGeom>
           <a:solidFill>
@@ -7787,9 +9672,55 @@
           </a:p>
         </p:txBody>
       </p:sp>
+      <p:sp>
+        <p:nvSpPr>
+          <p:cNvPr id="8" name="Rounded Rectangle 7"/>
+          <p:cNvSpPr/>
+          <p:nvPr/>
+        </p:nvSpPr>
+        <p:spPr>
+          <a:xfrm>
+            <a:off x="987552" y="2807208"/>
+            <a:ext cx="512064" cy="512064"/>
+          </a:xfrm>
+          <a:prstGeom prst="roundRect">
+            <a:avLst>
+              <a:gd name="adj" fmla="val 26000"/>
+            </a:avLst>
+          </a:prstGeom>
+          <a:solidFill>
+            <a:srgbClr val="EE0000"/>
+          </a:solidFill>
+          <a:ln>
+            <a:noFill/>
+          </a:ln>
+          <a:effectLst/>
+        </p:spPr>
+        <p:style>
+          <a:lnRef idx="1">
+            <a:schemeClr val="accent1"/>
+          </a:lnRef>
+          <a:fillRef idx="3">
+            <a:schemeClr val="accent1"/>
+          </a:fillRef>
+          <a:effectRef idx="2">
+            <a:schemeClr val="accent1"/>
+          </a:effectRef>
+          <a:fontRef idx="minor">
+            <a:schemeClr val="lt1"/>
+          </a:fontRef>
+        </p:style>
+        <p:txBody>
+          <a:bodyPr rtlCol="0" anchor="ctr"/>
+          <a:lstStyle/>
+          <a:p>
+            <a:pPr algn="ctr"/>
+          </a:p>
+        </p:txBody>
+      </p:sp>
       <p:pic>
         <p:nvPicPr>
-          <p:cNvPr id="8" name="Picture 7" descr="check_steel.png"/>
+          <p:cNvPr id="9" name="Picture 8" descr="check_white.png"/>
           <p:cNvPicPr>
             <a:picLocks noChangeAspect="1"/>
           </p:cNvPicPr>
@@ -7803,8 +9734,8 @@
         </p:blipFill>
         <p:spPr>
           <a:xfrm>
-            <a:off x="987552" y="2816352"/>
-            <a:ext cx="237744" cy="237744"/>
+            <a:off x="1110447" y="2930103"/>
+            <a:ext cx="266273" cy="266273"/>
           </a:xfrm>
           <a:prstGeom prst="rect">
             <a:avLst/>
@@ -7813,14 +9744,14 @@
       </p:pic>
       <p:sp>
         <p:nvSpPr>
-          <p:cNvPr id="9" name="TextBox 8"/>
+          <p:cNvPr id="10" name="TextBox 9"/>
           <p:cNvSpPr txBox="1"/>
           <p:nvPr/>
         </p:nvSpPr>
         <p:spPr>
           <a:xfrm>
-            <a:off x="1353312" y="2670048"/>
-            <a:ext cx="5029200" cy="530352"/>
+            <a:off x="1627632" y="2670048"/>
+            <a:ext cx="4206240" cy="786384"/>
           </a:xfrm>
           <a:prstGeom prst="rect">
             <a:avLst/>
@@ -7845,7 +9776,7 @@
               </a:spcAft>
             </a:pPr>
             <a:r>
-              <a:rPr sz="1200" b="0">
+              <a:rPr sz="1150" b="0">
                 <a:solidFill>
                   <a:srgbClr val="1A1A1A"/>
                 </a:solidFill>
@@ -7858,18 +9789,18 @@
       </p:sp>
       <p:sp>
         <p:nvSpPr>
-          <p:cNvPr id="10" name="Rounded Rectangle 9"/>
+          <p:cNvPr id="11" name="Rounded Rectangle 10"/>
           <p:cNvSpPr/>
           <p:nvPr/>
         </p:nvSpPr>
         <p:spPr>
           <a:xfrm>
-            <a:off x="841248" y="3273552"/>
-            <a:ext cx="5715000" cy="530352"/>
+            <a:off x="6254496" y="2670048"/>
+            <a:ext cx="5138928" cy="786384"/>
           </a:xfrm>
           <a:prstGeom prst="roundRect">
             <a:avLst>
-              <a:gd name="adj" fmla="val 6000"/>
+              <a:gd name="adj" fmla="val 7000"/>
             </a:avLst>
           </a:prstGeom>
           <a:solidFill>
@@ -7904,9 +9835,55 @@
           </a:p>
         </p:txBody>
       </p:sp>
+      <p:sp>
+        <p:nvSpPr>
+          <p:cNvPr id="12" name="Rounded Rectangle 11"/>
+          <p:cNvSpPr/>
+          <p:nvPr/>
+        </p:nvSpPr>
+        <p:spPr>
+          <a:xfrm>
+            <a:off x="6400800" y="2807208"/>
+            <a:ext cx="512064" cy="512064"/>
+          </a:xfrm>
+          <a:prstGeom prst="roundRect">
+            <a:avLst>
+              <a:gd name="adj" fmla="val 26000"/>
+            </a:avLst>
+          </a:prstGeom>
+          <a:solidFill>
+            <a:srgbClr val="EE0000"/>
+          </a:solidFill>
+          <a:ln>
+            <a:noFill/>
+          </a:ln>
+          <a:effectLst/>
+        </p:spPr>
+        <p:style>
+          <a:lnRef idx="1">
+            <a:schemeClr val="accent1"/>
+          </a:lnRef>
+          <a:fillRef idx="3">
+            <a:schemeClr val="accent1"/>
+          </a:fillRef>
+          <a:effectRef idx="2">
+            <a:schemeClr val="accent1"/>
+          </a:effectRef>
+          <a:fontRef idx="minor">
+            <a:schemeClr val="lt1"/>
+          </a:fontRef>
+        </p:style>
+        <p:txBody>
+          <a:bodyPr rtlCol="0" anchor="ctr"/>
+          <a:lstStyle/>
+          <a:p>
+            <a:pPr algn="ctr"/>
+          </a:p>
+        </p:txBody>
+      </p:sp>
       <p:pic>
         <p:nvPicPr>
-          <p:cNvPr id="11" name="Picture 10" descr="check_steel.png"/>
+          <p:cNvPr id="13" name="Picture 12" descr="check_white.png"/>
           <p:cNvPicPr>
             <a:picLocks noChangeAspect="1"/>
           </p:cNvPicPr>
@@ -7920,8 +9897,8 @@
         </p:blipFill>
         <p:spPr>
           <a:xfrm>
-            <a:off x="987552" y="3419856"/>
-            <a:ext cx="237744" cy="237744"/>
+            <a:off x="6523695" y="2930103"/>
+            <a:ext cx="266273" cy="266273"/>
           </a:xfrm>
           <a:prstGeom prst="rect">
             <a:avLst/>
@@ -7930,14 +9907,14 @@
       </p:pic>
       <p:sp>
         <p:nvSpPr>
-          <p:cNvPr id="12" name="TextBox 11"/>
+          <p:cNvPr id="14" name="TextBox 13"/>
           <p:cNvSpPr txBox="1"/>
           <p:nvPr/>
         </p:nvSpPr>
         <p:spPr>
           <a:xfrm>
-            <a:off x="1353312" y="3273552"/>
-            <a:ext cx="5029200" cy="530352"/>
+            <a:off x="7040880" y="2670048"/>
+            <a:ext cx="4206240" cy="786384"/>
           </a:xfrm>
           <a:prstGeom prst="rect">
             <a:avLst/>
@@ -7962,7 +9939,7 @@
               </a:spcAft>
             </a:pPr>
             <a:r>
-              <a:rPr sz="1200" b="0">
+              <a:rPr sz="1150" b="0">
                 <a:solidFill>
                   <a:srgbClr val="1A1A1A"/>
                 </a:solidFill>
@@ -7975,18 +9952,18 @@
       </p:sp>
       <p:sp>
         <p:nvSpPr>
-          <p:cNvPr id="13" name="Rounded Rectangle 12"/>
+          <p:cNvPr id="15" name="Rounded Rectangle 14"/>
           <p:cNvSpPr/>
           <p:nvPr/>
         </p:nvSpPr>
         <p:spPr>
           <a:xfrm>
-            <a:off x="841248" y="3877056"/>
-            <a:ext cx="5715000" cy="530352"/>
+            <a:off x="841248" y="3602736"/>
+            <a:ext cx="5138928" cy="786384"/>
           </a:xfrm>
           <a:prstGeom prst="roundRect">
             <a:avLst>
-              <a:gd name="adj" fmla="val 6000"/>
+              <a:gd name="adj" fmla="val 7000"/>
             </a:avLst>
           </a:prstGeom>
           <a:solidFill>
@@ -8021,9 +9998,55 @@
           </a:p>
         </p:txBody>
       </p:sp>
+      <p:sp>
+        <p:nvSpPr>
+          <p:cNvPr id="16" name="Rounded Rectangle 15"/>
+          <p:cNvSpPr/>
+          <p:nvPr/>
+        </p:nvSpPr>
+        <p:spPr>
+          <a:xfrm>
+            <a:off x="987552" y="3739896"/>
+            <a:ext cx="512064" cy="512064"/>
+          </a:xfrm>
+          <a:prstGeom prst="roundRect">
+            <a:avLst>
+              <a:gd name="adj" fmla="val 26000"/>
+            </a:avLst>
+          </a:prstGeom>
+          <a:solidFill>
+            <a:srgbClr val="EE0000"/>
+          </a:solidFill>
+          <a:ln>
+            <a:noFill/>
+          </a:ln>
+          <a:effectLst/>
+        </p:spPr>
+        <p:style>
+          <a:lnRef idx="1">
+            <a:schemeClr val="accent1"/>
+          </a:lnRef>
+          <a:fillRef idx="3">
+            <a:schemeClr val="accent1"/>
+          </a:fillRef>
+          <a:effectRef idx="2">
+            <a:schemeClr val="accent1"/>
+          </a:effectRef>
+          <a:fontRef idx="minor">
+            <a:schemeClr val="lt1"/>
+          </a:fontRef>
+        </p:style>
+        <p:txBody>
+          <a:bodyPr rtlCol="0" anchor="ctr"/>
+          <a:lstStyle/>
+          <a:p>
+            <a:pPr algn="ctr"/>
+          </a:p>
+        </p:txBody>
+      </p:sp>
       <p:pic>
         <p:nvPicPr>
-          <p:cNvPr id="14" name="Picture 13" descr="check_steel.png"/>
+          <p:cNvPr id="17" name="Picture 16" descr="check_white.png"/>
           <p:cNvPicPr>
             <a:picLocks noChangeAspect="1"/>
           </p:cNvPicPr>
@@ -8037,8 +10060,8 @@
         </p:blipFill>
         <p:spPr>
           <a:xfrm>
-            <a:off x="987552" y="4023360"/>
-            <a:ext cx="237744" cy="237744"/>
+            <a:off x="1110447" y="3862791"/>
+            <a:ext cx="266273" cy="266273"/>
           </a:xfrm>
           <a:prstGeom prst="rect">
             <a:avLst/>
@@ -8047,14 +10070,14 @@
       </p:pic>
       <p:sp>
         <p:nvSpPr>
-          <p:cNvPr id="15" name="TextBox 14"/>
+          <p:cNvPr id="18" name="TextBox 17"/>
           <p:cNvSpPr txBox="1"/>
           <p:nvPr/>
         </p:nvSpPr>
         <p:spPr>
           <a:xfrm>
-            <a:off x="1353312" y="3877056"/>
-            <a:ext cx="5029200" cy="530352"/>
+            <a:off x="1627632" y="3602736"/>
+            <a:ext cx="4206240" cy="786384"/>
           </a:xfrm>
           <a:prstGeom prst="rect">
             <a:avLst/>
@@ -8079,7 +10102,7 @@
               </a:spcAft>
             </a:pPr>
             <a:r>
-              <a:rPr sz="1200" b="0">
+              <a:rPr sz="1150" b="0">
                 <a:solidFill>
                   <a:srgbClr val="1A1A1A"/>
                 </a:solidFill>
@@ -8092,18 +10115,18 @@
       </p:sp>
       <p:sp>
         <p:nvSpPr>
-          <p:cNvPr id="16" name="Rounded Rectangle 15"/>
+          <p:cNvPr id="19" name="Rounded Rectangle 18"/>
           <p:cNvSpPr/>
           <p:nvPr/>
         </p:nvSpPr>
         <p:spPr>
           <a:xfrm>
-            <a:off x="841248" y="4480560"/>
-            <a:ext cx="5715000" cy="530352"/>
+            <a:off x="6254496" y="3602736"/>
+            <a:ext cx="5138928" cy="786384"/>
           </a:xfrm>
           <a:prstGeom prst="roundRect">
             <a:avLst>
-              <a:gd name="adj" fmla="val 6000"/>
+              <a:gd name="adj" fmla="val 7000"/>
             </a:avLst>
           </a:prstGeom>
           <a:solidFill>
@@ -8138,9 +10161,55 @@
           </a:p>
         </p:txBody>
       </p:sp>
+      <p:sp>
+        <p:nvSpPr>
+          <p:cNvPr id="20" name="Rounded Rectangle 19"/>
+          <p:cNvSpPr/>
+          <p:nvPr/>
+        </p:nvSpPr>
+        <p:spPr>
+          <a:xfrm>
+            <a:off x="6400800" y="3739896"/>
+            <a:ext cx="512064" cy="512064"/>
+          </a:xfrm>
+          <a:prstGeom prst="roundRect">
+            <a:avLst>
+              <a:gd name="adj" fmla="val 26000"/>
+            </a:avLst>
+          </a:prstGeom>
+          <a:solidFill>
+            <a:srgbClr val="EE0000"/>
+          </a:solidFill>
+          <a:ln>
+            <a:noFill/>
+          </a:ln>
+          <a:effectLst/>
+        </p:spPr>
+        <p:style>
+          <a:lnRef idx="1">
+            <a:schemeClr val="accent1"/>
+          </a:lnRef>
+          <a:fillRef idx="3">
+            <a:schemeClr val="accent1"/>
+          </a:fillRef>
+          <a:effectRef idx="2">
+            <a:schemeClr val="accent1"/>
+          </a:effectRef>
+          <a:fontRef idx="minor">
+            <a:schemeClr val="lt1"/>
+          </a:fontRef>
+        </p:style>
+        <p:txBody>
+          <a:bodyPr rtlCol="0" anchor="ctr"/>
+          <a:lstStyle/>
+          <a:p>
+            <a:pPr algn="ctr"/>
+          </a:p>
+        </p:txBody>
+      </p:sp>
       <p:pic>
         <p:nvPicPr>
-          <p:cNvPr id="17" name="Picture 16" descr="check_steel.png"/>
+          <p:cNvPr id="21" name="Picture 20" descr="check_white.png"/>
           <p:cNvPicPr>
             <a:picLocks noChangeAspect="1"/>
           </p:cNvPicPr>
@@ -8154,8 +10223,8 @@
         </p:blipFill>
         <p:spPr>
           <a:xfrm>
-            <a:off x="987552" y="4626864"/>
-            <a:ext cx="237744" cy="237744"/>
+            <a:off x="6523695" y="3862791"/>
+            <a:ext cx="266273" cy="266273"/>
           </a:xfrm>
           <a:prstGeom prst="rect">
             <a:avLst/>
@@ -8164,14 +10233,14 @@
       </p:pic>
       <p:sp>
         <p:nvSpPr>
-          <p:cNvPr id="18" name="TextBox 17"/>
+          <p:cNvPr id="22" name="TextBox 21"/>
           <p:cNvSpPr txBox="1"/>
           <p:nvPr/>
         </p:nvSpPr>
         <p:spPr>
           <a:xfrm>
-            <a:off x="1353312" y="4480560"/>
-            <a:ext cx="5029200" cy="530352"/>
+            <a:off x="7040880" y="3602736"/>
+            <a:ext cx="4206240" cy="786384"/>
           </a:xfrm>
           <a:prstGeom prst="rect">
             <a:avLst/>
@@ -8196,7 +10265,7 @@
               </a:spcAft>
             </a:pPr>
             <a:r>
-              <a:rPr sz="1200" b="0">
+              <a:rPr sz="1150" b="0">
                 <a:solidFill>
                   <a:srgbClr val="1A1A1A"/>
                 </a:solidFill>
@@ -8209,18 +10278,18 @@
       </p:sp>
       <p:sp>
         <p:nvSpPr>
-          <p:cNvPr id="19" name="Rounded Rectangle 18"/>
+          <p:cNvPr id="23" name="Rounded Rectangle 22"/>
           <p:cNvSpPr/>
           <p:nvPr/>
         </p:nvSpPr>
         <p:spPr>
           <a:xfrm>
-            <a:off x="841248" y="5084064"/>
-            <a:ext cx="5715000" cy="530352"/>
+            <a:off x="841248" y="4535424"/>
+            <a:ext cx="5138928" cy="786384"/>
           </a:xfrm>
           <a:prstGeom prst="roundRect">
             <a:avLst>
-              <a:gd name="adj" fmla="val 6000"/>
+              <a:gd name="adj" fmla="val 7000"/>
             </a:avLst>
           </a:prstGeom>
           <a:solidFill>
@@ -8255,9 +10324,55 @@
           </a:p>
         </p:txBody>
       </p:sp>
+      <p:sp>
+        <p:nvSpPr>
+          <p:cNvPr id="24" name="Rounded Rectangle 23"/>
+          <p:cNvSpPr/>
+          <p:nvPr/>
+        </p:nvSpPr>
+        <p:spPr>
+          <a:xfrm>
+            <a:off x="987552" y="4672584"/>
+            <a:ext cx="512064" cy="512064"/>
+          </a:xfrm>
+          <a:prstGeom prst="roundRect">
+            <a:avLst>
+              <a:gd name="adj" fmla="val 26000"/>
+            </a:avLst>
+          </a:prstGeom>
+          <a:solidFill>
+            <a:srgbClr val="EE0000"/>
+          </a:solidFill>
+          <a:ln>
+            <a:noFill/>
+          </a:ln>
+          <a:effectLst/>
+        </p:spPr>
+        <p:style>
+          <a:lnRef idx="1">
+            <a:schemeClr val="accent1"/>
+          </a:lnRef>
+          <a:fillRef idx="3">
+            <a:schemeClr val="accent1"/>
+          </a:fillRef>
+          <a:effectRef idx="2">
+            <a:schemeClr val="accent1"/>
+          </a:effectRef>
+          <a:fontRef idx="minor">
+            <a:schemeClr val="lt1"/>
+          </a:fontRef>
+        </p:style>
+        <p:txBody>
+          <a:bodyPr rtlCol="0" anchor="ctr"/>
+          <a:lstStyle/>
+          <a:p>
+            <a:pPr algn="ctr"/>
+          </a:p>
+        </p:txBody>
+      </p:sp>
       <p:pic>
         <p:nvPicPr>
-          <p:cNvPr id="20" name="Picture 19" descr="check_steel.png"/>
+          <p:cNvPr id="25" name="Picture 24" descr="check_white.png"/>
           <p:cNvPicPr>
             <a:picLocks noChangeAspect="1"/>
           </p:cNvPicPr>
@@ -8271,8 +10386,8 @@
         </p:blipFill>
         <p:spPr>
           <a:xfrm>
-            <a:off x="987552" y="5230368"/>
-            <a:ext cx="237744" cy="237744"/>
+            <a:off x="1110447" y="4795479"/>
+            <a:ext cx="266273" cy="266273"/>
           </a:xfrm>
           <a:prstGeom prst="rect">
             <a:avLst/>
@@ -8281,14 +10396,14 @@
       </p:pic>
       <p:sp>
         <p:nvSpPr>
-          <p:cNvPr id="21" name="TextBox 20"/>
+          <p:cNvPr id="26" name="TextBox 25"/>
           <p:cNvSpPr txBox="1"/>
           <p:nvPr/>
         </p:nvSpPr>
         <p:spPr>
           <a:xfrm>
-            <a:off x="1353312" y="5084064"/>
-            <a:ext cx="5029200" cy="530352"/>
+            <a:off x="1627632" y="4535424"/>
+            <a:ext cx="4206240" cy="786384"/>
           </a:xfrm>
           <a:prstGeom prst="rect">
             <a:avLst/>
@@ -8313,221 +10428,13 @@
               </a:spcAft>
             </a:pPr>
             <a:r>
-              <a:rPr sz="1200" b="0">
+              <a:rPr sz="1150" b="0">
                 <a:solidFill>
                   <a:srgbClr val="1A1A1A"/>
                 </a:solidFill>
                 <a:latin typeface="Red Hat Text"/>
               </a:rPr>
               <a:t>Recover site A → traffic RETURNS to the primary automatically. Failover AND failback</a:t>
-            </a:r>
-          </a:p>
-        </p:txBody>
-      </p:sp>
-      <p:sp>
-        <p:nvSpPr>
-          <p:cNvPr id="22" name="Rounded Rectangle 21"/>
-          <p:cNvSpPr/>
-          <p:nvPr/>
-        </p:nvSpPr>
-        <p:spPr>
-          <a:xfrm>
-            <a:off x="6812280" y="2670048"/>
-            <a:ext cx="4538167" cy="2944368"/>
-          </a:xfrm>
-          <a:prstGeom prst="roundRect">
-            <a:avLst>
-              <a:gd name="adj" fmla="val 4000"/>
-            </a:avLst>
-          </a:prstGeom>
-          <a:solidFill>
-            <a:srgbClr val="FFFFFF"/>
-          </a:solidFill>
-          <a:ln w="15240">
-            <a:solidFill>
-              <a:srgbClr val="DDE1E6"/>
-            </a:solidFill>
-          </a:ln>
-          <a:effectLst/>
-        </p:spPr>
-        <p:style>
-          <a:lnRef idx="1">
-            <a:schemeClr val="accent1"/>
-          </a:lnRef>
-          <a:fillRef idx="3">
-            <a:schemeClr val="accent1"/>
-          </a:fillRef>
-          <a:effectRef idx="2">
-            <a:schemeClr val="accent1"/>
-          </a:effectRef>
-          <a:fontRef idx="minor">
-            <a:schemeClr val="lt1"/>
-          </a:fontRef>
-        </p:style>
-        <p:txBody>
-          <a:bodyPr rtlCol="0" anchor="ctr"/>
-          <a:lstStyle/>
-          <a:p>
-            <a:pPr algn="ctr"/>
-          </a:p>
-        </p:txBody>
-      </p:sp>
-      <p:sp>
-        <p:nvSpPr>
-          <p:cNvPr id="23" name="Rounded Rectangle 22"/>
-          <p:cNvSpPr/>
-          <p:nvPr/>
-        </p:nvSpPr>
-        <p:spPr>
-          <a:xfrm>
-            <a:off x="7013448" y="2871216"/>
-            <a:ext cx="1298448" cy="310896"/>
-          </a:xfrm>
-          <a:prstGeom prst="roundRect">
-            <a:avLst>
-              <a:gd name="adj" fmla="val 50000"/>
-            </a:avLst>
-          </a:prstGeom>
-          <a:solidFill>
-            <a:srgbClr val="FCECEC"/>
-          </a:solidFill>
-          <a:ln>
-            <a:noFill/>
-          </a:ln>
-          <a:effectLst/>
-        </p:spPr>
-        <p:style>
-          <a:lnRef idx="1">
-            <a:schemeClr val="accent1"/>
-          </a:lnRef>
-          <a:fillRef idx="3">
-            <a:schemeClr val="accent1"/>
-          </a:fillRef>
-          <a:effectRef idx="2">
-            <a:schemeClr val="accent1"/>
-          </a:effectRef>
-          <a:fontRef idx="minor">
-            <a:schemeClr val="lt1"/>
-          </a:fontRef>
-        </p:style>
-        <p:txBody>
-          <a:bodyPr rtlCol="0" anchor="ctr"/>
-          <a:lstStyle/>
-          <a:p>
-            <a:pPr algn="ctr"/>
-          </a:p>
-        </p:txBody>
-      </p:sp>
-      <p:sp>
-        <p:nvSpPr>
-          <p:cNvPr id="24" name="TextBox 23"/>
-          <p:cNvSpPr txBox="1"/>
-          <p:nvPr/>
-        </p:nvSpPr>
-        <p:spPr>
-          <a:xfrm>
-            <a:off x="7013448" y="2871216"/>
-            <a:ext cx="1298448" cy="310896"/>
-          </a:xfrm>
-          <a:prstGeom prst="rect">
-            <a:avLst/>
-          </a:prstGeom>
-          <a:noFill/>
-        </p:spPr>
-        <p:txBody>
-          <a:bodyPr wrap="none" anchor="ctr" lIns="0" rIns="0" tIns="0" bIns="0">
-            <a:spAutoFit/>
-          </a:bodyPr>
-          <a:lstStyle/>
-          <a:p>
-            <a:pPr algn="ctr">
-              <a:lnSpc>
-                <a:spcPct val="106000"/>
-              </a:lnSpc>
-              <a:spcBef>
-                <a:spcPts val="0"/>
-              </a:spcBef>
-              <a:spcAft>
-                <a:spcPts val="0"/>
-              </a:spcAft>
-            </a:pPr>
-            <a:r>
-              <a:rPr sz="850" b="1">
-                <a:solidFill>
-                  <a:srgbClr val="B80000"/>
-                </a:solidFill>
-                <a:latin typeface="Red Hat Display"/>
-              </a:rPr>
-              <a:t>MEDIA PASS</a:t>
-            </a:r>
-          </a:p>
-        </p:txBody>
-      </p:sp>
-      <p:pic>
-        <p:nvPicPr>
-          <p:cNvPr id="25" name="Picture 24" descr="eye_slate.png"/>
-          <p:cNvPicPr>
-            <a:picLocks noChangeAspect="1"/>
-          </p:cNvPicPr>
-          <p:nvPr/>
-        </p:nvPicPr>
-        <p:blipFill>
-          <a:blip r:embed="rId4"/>
-          <a:stretch>
-            <a:fillRect/>
-          </a:stretch>
-        </p:blipFill>
-        <p:spPr>
-          <a:xfrm>
-            <a:off x="8843619" y="3383280"/>
-            <a:ext cx="475488" cy="475488"/>
-          </a:xfrm>
-          <a:prstGeom prst="rect">
-            <a:avLst/>
-          </a:prstGeom>
-        </p:spPr>
-      </p:pic>
-      <p:sp>
-        <p:nvSpPr>
-          <p:cNvPr id="26" name="TextBox 25"/>
-          <p:cNvSpPr txBox="1"/>
-          <p:nvPr/>
-        </p:nvSpPr>
-        <p:spPr>
-          <a:xfrm>
-            <a:off x="7050024" y="3995928"/>
-            <a:ext cx="4062679" cy="1481328"/>
-          </a:xfrm>
-          <a:prstGeom prst="rect">
-            <a:avLst/>
-          </a:prstGeom>
-          <a:noFill/>
-        </p:spPr>
-        <p:txBody>
-          <a:bodyPr wrap="square" anchor="t" lIns="0" rIns="0" tIns="0" bIns="0">
-            <a:spAutoFit/>
-          </a:bodyPr>
-          <a:lstStyle/>
-          <a:p>
-            <a:pPr algn="l">
-              <a:lnSpc>
-                <a:spcPct val="120000"/>
-              </a:lnSpc>
-              <a:spcBef>
-                <a:spcPts val="0"/>
-              </a:spcBef>
-              <a:spcAft>
-                <a:spcPts val="0"/>
-              </a:spcAft>
-            </a:pPr>
-            <a:r>
-              <a:rPr sz="950" b="0">
-                <a:solidFill>
-                  <a:srgbClr val="8A9099"/>
-                </a:solidFill>
-                <a:latin typeface="Red Hat Text"/>
-              </a:rPr>
-              <a:t>A live-log filmstrip, three panels. Panel 1: green log lines "HTTP 200 served-by-site=A" repeating, with an arrow "site A scaled to 0 →." Panel 2: the log continuing, one line highlighted where it flips to "HTTP 200 served-by-site=B," a big label "FAILOVER · ~4 s · zero dropped requests." Panel 3: after "site A recovered →," the log flipping back to "served-by-site=A," label "FAILBACK · automatic." A ribbon across the top: "the whole primary site vanished — the client kept getting 200s."</a:t>
             </a:r>
           </a:p>
         </p:txBody>
@@ -8880,11 +10787,11 @@
         <p:spPr>
           <a:xfrm>
             <a:off x="841248" y="2670048"/>
-            <a:ext cx="5715000" cy="530352"/>
+            <a:ext cx="5138928" cy="786384"/>
           </a:xfrm>
           <a:prstGeom prst="roundRect">
             <a:avLst>
-              <a:gd name="adj" fmla="val 6000"/>
+              <a:gd name="adj" fmla="val 7000"/>
             </a:avLst>
           </a:prstGeom>
           <a:solidFill>
@@ -8919,9 +10826,55 @@
           </a:p>
         </p:txBody>
       </p:sp>
+      <p:sp>
+        <p:nvSpPr>
+          <p:cNvPr id="8" name="Rounded Rectangle 7"/>
+          <p:cNvSpPr/>
+          <p:nvPr/>
+        </p:nvSpPr>
+        <p:spPr>
+          <a:xfrm>
+            <a:off x="987552" y="2807208"/>
+            <a:ext cx="512064" cy="512064"/>
+          </a:xfrm>
+          <a:prstGeom prst="roundRect">
+            <a:avLst>
+              <a:gd name="adj" fmla="val 26000"/>
+            </a:avLst>
+          </a:prstGeom>
+          <a:solidFill>
+            <a:srgbClr val="EE0000"/>
+          </a:solidFill>
+          <a:ln>
+            <a:noFill/>
+          </a:ln>
+          <a:effectLst/>
+        </p:spPr>
+        <p:style>
+          <a:lnRef idx="1">
+            <a:schemeClr val="accent1"/>
+          </a:lnRef>
+          <a:fillRef idx="3">
+            <a:schemeClr val="accent1"/>
+          </a:fillRef>
+          <a:effectRef idx="2">
+            <a:schemeClr val="accent1"/>
+          </a:effectRef>
+          <a:fontRef idx="minor">
+            <a:schemeClr val="lt1"/>
+          </a:fontRef>
+        </p:style>
+        <p:txBody>
+          <a:bodyPr rtlCol="0" anchor="ctr"/>
+          <a:lstStyle/>
+          <a:p>
+            <a:pPr algn="ctr"/>
+          </a:p>
+        </p:txBody>
+      </p:sp>
       <p:pic>
         <p:nvPicPr>
-          <p:cNvPr id="8" name="Picture 7" descr="check_steel.png"/>
+          <p:cNvPr id="9" name="Picture 8" descr="check_white.png"/>
           <p:cNvPicPr>
             <a:picLocks noChangeAspect="1"/>
           </p:cNvPicPr>
@@ -8935,8 +10888,8 @@
         </p:blipFill>
         <p:spPr>
           <a:xfrm>
-            <a:off x="987552" y="2816352"/>
-            <a:ext cx="237744" cy="237744"/>
+            <a:off x="1110447" y="2930103"/>
+            <a:ext cx="266273" cy="266273"/>
           </a:xfrm>
           <a:prstGeom prst="rect">
             <a:avLst/>
@@ -8945,14 +10898,14 @@
       </p:pic>
       <p:sp>
         <p:nvSpPr>
-          <p:cNvPr id="9" name="TextBox 8"/>
+          <p:cNvPr id="10" name="TextBox 9"/>
           <p:cNvSpPr txBox="1"/>
           <p:nvPr/>
         </p:nvSpPr>
         <p:spPr>
           <a:xfrm>
-            <a:off x="1353312" y="2670048"/>
-            <a:ext cx="5029200" cy="530352"/>
+            <a:off x="1627632" y="2670048"/>
+            <a:ext cx="4206240" cy="786384"/>
           </a:xfrm>
           <a:prstGeom prst="rect">
             <a:avLst/>
@@ -8977,7 +10930,7 @@
               </a:spcAft>
             </a:pPr>
             <a:r>
-              <a:rPr sz="1200" b="0">
+              <a:rPr sz="1150" b="0">
                 <a:solidFill>
                   <a:srgbClr val="1A1A1A"/>
                 </a:solidFill>
@@ -8990,18 +10943,18 @@
       </p:sp>
       <p:sp>
         <p:nvSpPr>
-          <p:cNvPr id="10" name="Rounded Rectangle 9"/>
+          <p:cNvPr id="11" name="Rounded Rectangle 10"/>
           <p:cNvSpPr/>
           <p:nvPr/>
         </p:nvSpPr>
         <p:spPr>
           <a:xfrm>
-            <a:off x="841248" y="3273552"/>
-            <a:ext cx="5715000" cy="530352"/>
+            <a:off x="6254496" y="2670048"/>
+            <a:ext cx="5138928" cy="786384"/>
           </a:xfrm>
           <a:prstGeom prst="roundRect">
             <a:avLst>
-              <a:gd name="adj" fmla="val 6000"/>
+              <a:gd name="adj" fmla="val 7000"/>
             </a:avLst>
           </a:prstGeom>
           <a:solidFill>
@@ -9036,9 +10989,55 @@
           </a:p>
         </p:txBody>
       </p:sp>
+      <p:sp>
+        <p:nvSpPr>
+          <p:cNvPr id="12" name="Rounded Rectangle 11"/>
+          <p:cNvSpPr/>
+          <p:nvPr/>
+        </p:nvSpPr>
+        <p:spPr>
+          <a:xfrm>
+            <a:off x="6400800" y="2807208"/>
+            <a:ext cx="512064" cy="512064"/>
+          </a:xfrm>
+          <a:prstGeom prst="roundRect">
+            <a:avLst>
+              <a:gd name="adj" fmla="val 26000"/>
+            </a:avLst>
+          </a:prstGeom>
+          <a:solidFill>
+            <a:srgbClr val="EE0000"/>
+          </a:solidFill>
+          <a:ln>
+            <a:noFill/>
+          </a:ln>
+          <a:effectLst/>
+        </p:spPr>
+        <p:style>
+          <a:lnRef idx="1">
+            <a:schemeClr val="accent1"/>
+          </a:lnRef>
+          <a:fillRef idx="3">
+            <a:schemeClr val="accent1"/>
+          </a:fillRef>
+          <a:effectRef idx="2">
+            <a:schemeClr val="accent1"/>
+          </a:effectRef>
+          <a:fontRef idx="minor">
+            <a:schemeClr val="lt1"/>
+          </a:fontRef>
+        </p:style>
+        <p:txBody>
+          <a:bodyPr rtlCol="0" anchor="ctr"/>
+          <a:lstStyle/>
+          <a:p>
+            <a:pPr algn="ctr"/>
+          </a:p>
+        </p:txBody>
+      </p:sp>
       <p:pic>
         <p:nvPicPr>
-          <p:cNvPr id="11" name="Picture 10" descr="check_steel.png"/>
+          <p:cNvPr id="13" name="Picture 12" descr="check_white.png"/>
           <p:cNvPicPr>
             <a:picLocks noChangeAspect="1"/>
           </p:cNvPicPr>
@@ -9052,8 +11051,8 @@
         </p:blipFill>
         <p:spPr>
           <a:xfrm>
-            <a:off x="987552" y="3419856"/>
-            <a:ext cx="237744" cy="237744"/>
+            <a:off x="6523695" y="2930103"/>
+            <a:ext cx="266273" cy="266273"/>
           </a:xfrm>
           <a:prstGeom prst="rect">
             <a:avLst/>
@@ -9062,14 +11061,14 @@
       </p:pic>
       <p:sp>
         <p:nvSpPr>
-          <p:cNvPr id="12" name="TextBox 11"/>
+          <p:cNvPr id="14" name="TextBox 13"/>
           <p:cNvSpPr txBox="1"/>
           <p:nvPr/>
         </p:nvSpPr>
         <p:spPr>
           <a:xfrm>
-            <a:off x="1353312" y="3273552"/>
-            <a:ext cx="5029200" cy="530352"/>
+            <a:off x="7040880" y="2670048"/>
+            <a:ext cx="4206240" cy="786384"/>
           </a:xfrm>
           <a:prstGeom prst="rect">
             <a:avLst/>
@@ -9094,7 +11093,7 @@
               </a:spcAft>
             </a:pPr>
             <a:r>
-              <a:rPr sz="1200" b="0">
+              <a:rPr sz="1150" b="0">
                 <a:solidFill>
                   <a:srgbClr val="1A1A1A"/>
                 </a:solidFill>
@@ -9107,18 +11106,18 @@
       </p:sp>
       <p:sp>
         <p:nvSpPr>
-          <p:cNvPr id="13" name="Rounded Rectangle 12"/>
+          <p:cNvPr id="15" name="Rounded Rectangle 14"/>
           <p:cNvSpPr/>
           <p:nvPr/>
         </p:nvSpPr>
         <p:spPr>
           <a:xfrm>
-            <a:off x="841248" y="3877056"/>
-            <a:ext cx="5715000" cy="530352"/>
+            <a:off x="841248" y="3602736"/>
+            <a:ext cx="5138928" cy="786384"/>
           </a:xfrm>
           <a:prstGeom prst="roundRect">
             <a:avLst>
-              <a:gd name="adj" fmla="val 6000"/>
+              <a:gd name="adj" fmla="val 7000"/>
             </a:avLst>
           </a:prstGeom>
           <a:solidFill>
@@ -9153,9 +11152,55 @@
           </a:p>
         </p:txBody>
       </p:sp>
+      <p:sp>
+        <p:nvSpPr>
+          <p:cNvPr id="16" name="Rounded Rectangle 15"/>
+          <p:cNvSpPr/>
+          <p:nvPr/>
+        </p:nvSpPr>
+        <p:spPr>
+          <a:xfrm>
+            <a:off x="987552" y="3739896"/>
+            <a:ext cx="512064" cy="512064"/>
+          </a:xfrm>
+          <a:prstGeom prst="roundRect">
+            <a:avLst>
+              <a:gd name="adj" fmla="val 26000"/>
+            </a:avLst>
+          </a:prstGeom>
+          <a:solidFill>
+            <a:srgbClr val="EE0000"/>
+          </a:solidFill>
+          <a:ln>
+            <a:noFill/>
+          </a:ln>
+          <a:effectLst/>
+        </p:spPr>
+        <p:style>
+          <a:lnRef idx="1">
+            <a:schemeClr val="accent1"/>
+          </a:lnRef>
+          <a:fillRef idx="3">
+            <a:schemeClr val="accent1"/>
+          </a:fillRef>
+          <a:effectRef idx="2">
+            <a:schemeClr val="accent1"/>
+          </a:effectRef>
+          <a:fontRef idx="minor">
+            <a:schemeClr val="lt1"/>
+          </a:fontRef>
+        </p:style>
+        <p:txBody>
+          <a:bodyPr rtlCol="0" anchor="ctr"/>
+          <a:lstStyle/>
+          <a:p>
+            <a:pPr algn="ctr"/>
+          </a:p>
+        </p:txBody>
+      </p:sp>
       <p:pic>
         <p:nvPicPr>
-          <p:cNvPr id="14" name="Picture 13" descr="check_steel.png"/>
+          <p:cNvPr id="17" name="Picture 16" descr="check_white.png"/>
           <p:cNvPicPr>
             <a:picLocks noChangeAspect="1"/>
           </p:cNvPicPr>
@@ -9169,8 +11214,8 @@
         </p:blipFill>
         <p:spPr>
           <a:xfrm>
-            <a:off x="987552" y="4023360"/>
-            <a:ext cx="237744" cy="237744"/>
+            <a:off x="1110447" y="3862791"/>
+            <a:ext cx="266273" cy="266273"/>
           </a:xfrm>
           <a:prstGeom prst="rect">
             <a:avLst/>
@@ -9179,14 +11224,14 @@
       </p:pic>
       <p:sp>
         <p:nvSpPr>
-          <p:cNvPr id="15" name="TextBox 14"/>
+          <p:cNvPr id="18" name="TextBox 17"/>
           <p:cNvSpPr txBox="1"/>
           <p:nvPr/>
         </p:nvSpPr>
         <p:spPr>
           <a:xfrm>
-            <a:off x="1353312" y="3877056"/>
-            <a:ext cx="5029200" cy="530352"/>
+            <a:off x="1627632" y="3602736"/>
+            <a:ext cx="4206240" cy="786384"/>
           </a:xfrm>
           <a:prstGeom prst="rect">
             <a:avLst/>
@@ -9211,7 +11256,7 @@
               </a:spcAft>
             </a:pPr>
             <a:r>
-              <a:rPr sz="1200" b="0">
+              <a:rPr sz="1150" b="0">
                 <a:solidFill>
                   <a:srgbClr val="1A1A1A"/>
                 </a:solidFill>
@@ -9224,18 +11269,18 @@
       </p:sp>
       <p:sp>
         <p:nvSpPr>
-          <p:cNvPr id="16" name="Rounded Rectangle 15"/>
+          <p:cNvPr id="19" name="Rounded Rectangle 18"/>
           <p:cNvSpPr/>
           <p:nvPr/>
         </p:nvSpPr>
         <p:spPr>
           <a:xfrm>
-            <a:off x="841248" y="4480560"/>
-            <a:ext cx="5715000" cy="530352"/>
+            <a:off x="6254496" y="3602736"/>
+            <a:ext cx="5138928" cy="786384"/>
           </a:xfrm>
           <a:prstGeom prst="roundRect">
             <a:avLst>
-              <a:gd name="adj" fmla="val 6000"/>
+              <a:gd name="adj" fmla="val 7000"/>
             </a:avLst>
           </a:prstGeom>
           <a:solidFill>
@@ -9270,9 +11315,55 @@
           </a:p>
         </p:txBody>
       </p:sp>
+      <p:sp>
+        <p:nvSpPr>
+          <p:cNvPr id="20" name="Rounded Rectangle 19"/>
+          <p:cNvSpPr/>
+          <p:nvPr/>
+        </p:nvSpPr>
+        <p:spPr>
+          <a:xfrm>
+            <a:off x="6400800" y="3739896"/>
+            <a:ext cx="512064" cy="512064"/>
+          </a:xfrm>
+          <a:prstGeom prst="roundRect">
+            <a:avLst>
+              <a:gd name="adj" fmla="val 26000"/>
+            </a:avLst>
+          </a:prstGeom>
+          <a:solidFill>
+            <a:srgbClr val="EE0000"/>
+          </a:solidFill>
+          <a:ln>
+            <a:noFill/>
+          </a:ln>
+          <a:effectLst/>
+        </p:spPr>
+        <p:style>
+          <a:lnRef idx="1">
+            <a:schemeClr val="accent1"/>
+          </a:lnRef>
+          <a:fillRef idx="3">
+            <a:schemeClr val="accent1"/>
+          </a:fillRef>
+          <a:effectRef idx="2">
+            <a:schemeClr val="accent1"/>
+          </a:effectRef>
+          <a:fontRef idx="minor">
+            <a:schemeClr val="lt1"/>
+          </a:fontRef>
+        </p:style>
+        <p:txBody>
+          <a:bodyPr rtlCol="0" anchor="ctr"/>
+          <a:lstStyle/>
+          <a:p>
+            <a:pPr algn="ctr"/>
+          </a:p>
+        </p:txBody>
+      </p:sp>
       <p:pic>
         <p:nvPicPr>
-          <p:cNvPr id="17" name="Picture 16" descr="check_steel.png"/>
+          <p:cNvPr id="21" name="Picture 20" descr="check_white.png"/>
           <p:cNvPicPr>
             <a:picLocks noChangeAspect="1"/>
           </p:cNvPicPr>
@@ -9286,8 +11377,8 @@
         </p:blipFill>
         <p:spPr>
           <a:xfrm>
-            <a:off x="987552" y="4626864"/>
-            <a:ext cx="237744" cy="237744"/>
+            <a:off x="6523695" y="3862791"/>
+            <a:ext cx="266273" cy="266273"/>
           </a:xfrm>
           <a:prstGeom prst="rect">
             <a:avLst/>
@@ -9296,14 +11387,14 @@
       </p:pic>
       <p:sp>
         <p:nvSpPr>
-          <p:cNvPr id="18" name="TextBox 17"/>
+          <p:cNvPr id="22" name="TextBox 21"/>
           <p:cNvSpPr txBox="1"/>
           <p:nvPr/>
         </p:nvSpPr>
         <p:spPr>
           <a:xfrm>
-            <a:off x="1353312" y="4480560"/>
-            <a:ext cx="5029200" cy="530352"/>
+            <a:off x="7040880" y="3602736"/>
+            <a:ext cx="4206240" cy="786384"/>
           </a:xfrm>
           <a:prstGeom prst="rect">
             <a:avLst/>
@@ -9328,7 +11419,7 @@
               </a:spcAft>
             </a:pPr>
             <a:r>
-              <a:rPr sz="1200" b="0">
+              <a:rPr sz="1150" b="0">
                 <a:solidFill>
                   <a:srgbClr val="1A1A1A"/>
                 </a:solidFill>
@@ -9341,18 +11432,18 @@
       </p:sp>
       <p:sp>
         <p:nvSpPr>
-          <p:cNvPr id="19" name="Rounded Rectangle 18"/>
+          <p:cNvPr id="23" name="Rounded Rectangle 22"/>
           <p:cNvSpPr/>
           <p:nvPr/>
         </p:nvSpPr>
         <p:spPr>
           <a:xfrm>
-            <a:off x="841248" y="5084064"/>
-            <a:ext cx="5715000" cy="530352"/>
+            <a:off x="841248" y="4535424"/>
+            <a:ext cx="5138928" cy="786384"/>
           </a:xfrm>
           <a:prstGeom prst="roundRect">
             <a:avLst>
-              <a:gd name="adj" fmla="val 6000"/>
+              <a:gd name="adj" fmla="val 7000"/>
             </a:avLst>
           </a:prstGeom>
           <a:solidFill>
@@ -9387,9 +11478,55 @@
           </a:p>
         </p:txBody>
       </p:sp>
+      <p:sp>
+        <p:nvSpPr>
+          <p:cNvPr id="24" name="Rounded Rectangle 23"/>
+          <p:cNvSpPr/>
+          <p:nvPr/>
+        </p:nvSpPr>
+        <p:spPr>
+          <a:xfrm>
+            <a:off x="987552" y="4672584"/>
+            <a:ext cx="512064" cy="512064"/>
+          </a:xfrm>
+          <a:prstGeom prst="roundRect">
+            <a:avLst>
+              <a:gd name="adj" fmla="val 26000"/>
+            </a:avLst>
+          </a:prstGeom>
+          <a:solidFill>
+            <a:srgbClr val="EE0000"/>
+          </a:solidFill>
+          <a:ln>
+            <a:noFill/>
+          </a:ln>
+          <a:effectLst/>
+        </p:spPr>
+        <p:style>
+          <a:lnRef idx="1">
+            <a:schemeClr val="accent1"/>
+          </a:lnRef>
+          <a:fillRef idx="3">
+            <a:schemeClr val="accent1"/>
+          </a:fillRef>
+          <a:effectRef idx="2">
+            <a:schemeClr val="accent1"/>
+          </a:effectRef>
+          <a:fontRef idx="minor">
+            <a:schemeClr val="lt1"/>
+          </a:fontRef>
+        </p:style>
+        <p:txBody>
+          <a:bodyPr rtlCol="0" anchor="ctr"/>
+          <a:lstStyle/>
+          <a:p>
+            <a:pPr algn="ctr"/>
+          </a:p>
+        </p:txBody>
+      </p:sp>
       <p:pic>
         <p:nvPicPr>
-          <p:cNvPr id="20" name="Picture 19" descr="check_steel.png"/>
+          <p:cNvPr id="25" name="Picture 24" descr="check_white.png"/>
           <p:cNvPicPr>
             <a:picLocks noChangeAspect="1"/>
           </p:cNvPicPr>
@@ -9403,8 +11540,8 @@
         </p:blipFill>
         <p:spPr>
           <a:xfrm>
-            <a:off x="987552" y="5230368"/>
-            <a:ext cx="237744" cy="237744"/>
+            <a:off x="1110447" y="4795479"/>
+            <a:ext cx="266273" cy="266273"/>
           </a:xfrm>
           <a:prstGeom prst="rect">
             <a:avLst/>
@@ -9413,14 +11550,14 @@
       </p:pic>
       <p:sp>
         <p:nvSpPr>
-          <p:cNvPr id="21" name="TextBox 20"/>
+          <p:cNvPr id="26" name="TextBox 25"/>
           <p:cNvSpPr txBox="1"/>
           <p:nvPr/>
         </p:nvSpPr>
         <p:spPr>
           <a:xfrm>
-            <a:off x="1353312" y="5084064"/>
-            <a:ext cx="5029200" cy="530352"/>
+            <a:off x="1627632" y="4535424"/>
+            <a:ext cx="4206240" cy="786384"/>
           </a:xfrm>
           <a:prstGeom prst="rect">
             <a:avLst/>
@@ -9445,221 +11582,13 @@
               </a:spcAft>
             </a:pPr>
             <a:r>
-              <a:rPr sz="1200" b="0">
+              <a:rPr sz="1150" b="0">
                 <a:solidFill>
                   <a:srgbClr val="1A1A1A"/>
                 </a:solidFill>
                 <a:latin typeface="Red Hat Text"/>
               </a:rPr>
               <a:t>The app is UNCHANGED: it reads a remote site's service through a LOCAL name; same CRs link two clusters</a:t>
-            </a:r>
-          </a:p>
-        </p:txBody>
-      </p:sp>
-      <p:sp>
-        <p:nvSpPr>
-          <p:cNvPr id="22" name="Rounded Rectangle 21"/>
-          <p:cNvSpPr/>
-          <p:nvPr/>
-        </p:nvSpPr>
-        <p:spPr>
-          <a:xfrm>
-            <a:off x="6812280" y="2670048"/>
-            <a:ext cx="4538167" cy="2944368"/>
-          </a:xfrm>
-          <a:prstGeom prst="roundRect">
-            <a:avLst>
-              <a:gd name="adj" fmla="val 4000"/>
-            </a:avLst>
-          </a:prstGeom>
-          <a:solidFill>
-            <a:srgbClr val="FFFFFF"/>
-          </a:solidFill>
-          <a:ln w="15240">
-            <a:solidFill>
-              <a:srgbClr val="DDE1E6"/>
-            </a:solidFill>
-          </a:ln>
-          <a:effectLst/>
-        </p:spPr>
-        <p:style>
-          <a:lnRef idx="1">
-            <a:schemeClr val="accent1"/>
-          </a:lnRef>
-          <a:fillRef idx="3">
-            <a:schemeClr val="accent1"/>
-          </a:fillRef>
-          <a:effectRef idx="2">
-            <a:schemeClr val="accent1"/>
-          </a:effectRef>
-          <a:fontRef idx="minor">
-            <a:schemeClr val="lt1"/>
-          </a:fontRef>
-        </p:style>
-        <p:txBody>
-          <a:bodyPr rtlCol="0" anchor="ctr"/>
-          <a:lstStyle/>
-          <a:p>
-            <a:pPr algn="ctr"/>
-          </a:p>
-        </p:txBody>
-      </p:sp>
-      <p:sp>
-        <p:nvSpPr>
-          <p:cNvPr id="23" name="Rounded Rectangle 22"/>
-          <p:cNvSpPr/>
-          <p:nvPr/>
-        </p:nvSpPr>
-        <p:spPr>
-          <a:xfrm>
-            <a:off x="7013448" y="2871216"/>
-            <a:ext cx="1298448" cy="310896"/>
-          </a:xfrm>
-          <a:prstGeom prst="roundRect">
-            <a:avLst>
-              <a:gd name="adj" fmla="val 50000"/>
-            </a:avLst>
-          </a:prstGeom>
-          <a:solidFill>
-            <a:srgbClr val="FCECEC"/>
-          </a:solidFill>
-          <a:ln>
-            <a:noFill/>
-          </a:ln>
-          <a:effectLst/>
-        </p:spPr>
-        <p:style>
-          <a:lnRef idx="1">
-            <a:schemeClr val="accent1"/>
-          </a:lnRef>
-          <a:fillRef idx="3">
-            <a:schemeClr val="accent1"/>
-          </a:fillRef>
-          <a:effectRef idx="2">
-            <a:schemeClr val="accent1"/>
-          </a:effectRef>
-          <a:fontRef idx="minor">
-            <a:schemeClr val="lt1"/>
-          </a:fontRef>
-        </p:style>
-        <p:txBody>
-          <a:bodyPr rtlCol="0" anchor="ctr"/>
-          <a:lstStyle/>
-          <a:p>
-            <a:pPr algn="ctr"/>
-          </a:p>
-        </p:txBody>
-      </p:sp>
-      <p:sp>
-        <p:nvSpPr>
-          <p:cNvPr id="24" name="TextBox 23"/>
-          <p:cNvSpPr txBox="1"/>
-          <p:nvPr/>
-        </p:nvSpPr>
-        <p:spPr>
-          <a:xfrm>
-            <a:off x="7013448" y="2871216"/>
-            <a:ext cx="1298448" cy="310896"/>
-          </a:xfrm>
-          <a:prstGeom prst="rect">
-            <a:avLst/>
-          </a:prstGeom>
-          <a:noFill/>
-        </p:spPr>
-        <p:txBody>
-          <a:bodyPr wrap="none" anchor="ctr" lIns="0" rIns="0" tIns="0" bIns="0">
-            <a:spAutoFit/>
-          </a:bodyPr>
-          <a:lstStyle/>
-          <a:p>
-            <a:pPr algn="ctr">
-              <a:lnSpc>
-                <a:spcPct val="106000"/>
-              </a:lnSpc>
-              <a:spcBef>
-                <a:spcPts val="0"/>
-              </a:spcBef>
-              <a:spcAft>
-                <a:spcPts val="0"/>
-              </a:spcAft>
-            </a:pPr>
-            <a:r>
-              <a:rPr sz="850" b="1">
-                <a:solidFill>
-                  <a:srgbClr val="B80000"/>
-                </a:solidFill>
-                <a:latin typeface="Red Hat Display"/>
-              </a:rPr>
-              <a:t>MEDIA PASS</a:t>
-            </a:r>
-          </a:p>
-        </p:txBody>
-      </p:sp>
-      <p:pic>
-        <p:nvPicPr>
-          <p:cNvPr id="25" name="Picture 24" descr="eye_slate.png"/>
-          <p:cNvPicPr>
-            <a:picLocks noChangeAspect="1"/>
-          </p:cNvPicPr>
-          <p:nvPr/>
-        </p:nvPicPr>
-        <p:blipFill>
-          <a:blip r:embed="rId4"/>
-          <a:stretch>
-            <a:fillRect/>
-          </a:stretch>
-        </p:blipFill>
-        <p:spPr>
-          <a:xfrm>
-            <a:off x="8843619" y="3383280"/>
-            <a:ext cx="475488" cy="475488"/>
-          </a:xfrm>
-          <a:prstGeom prst="rect">
-            <a:avLst/>
-          </a:prstGeom>
-        </p:spPr>
-      </p:pic>
-      <p:sp>
-        <p:nvSpPr>
-          <p:cNvPr id="26" name="TextBox 25"/>
-          <p:cNvSpPr txBox="1"/>
-          <p:nvPr/>
-        </p:nvSpPr>
-        <p:spPr>
-          <a:xfrm>
-            <a:off x="7050024" y="3995928"/>
-            <a:ext cx="4062679" cy="1481328"/>
-          </a:xfrm>
-          <a:prstGeom prst="rect">
-            <a:avLst/>
-          </a:prstGeom>
-          <a:noFill/>
-        </p:spPr>
-        <p:txBody>
-          <a:bodyPr wrap="square" anchor="t" lIns="0" rIns="0" tIns="0" bIns="0">
-            <a:spAutoFit/>
-          </a:bodyPr>
-          <a:lstStyle/>
-          <a:p>
-            <a:pPr algn="l">
-              <a:lnSpc>
-                <a:spcPct val="120000"/>
-              </a:lnSpc>
-              <a:spcBef>
-                <a:spcPts val="0"/>
-              </a:spcBef>
-              <a:spcAft>
-                <a:spcPts val="0"/>
-              </a:spcAft>
-            </a:pPr>
-            <a:r>
-              <a:rPr sz="950" b="0">
-                <a:solidFill>
-                  <a:srgbClr val="8A9099"/>
-                </a:solidFill>
-                <a:latin typeface="Red Hat Text"/>
-              </a:rPr>
-              <a:t>The RHSI VAN diagram (concept slide 4 asset): left "Site: DC-A" with a claims client → a Listener chip "claims-remote:8080"; center a "Virtual Application Network (mutual-TLS L7)" cloud with a Link token "AccessGrant→AccessToken"; right "Site: DC-B" with a Connector chip "selector app=parasol-claims" → a claims cylinder "SITE=B." A [ADD-ON] ribbon corner-tag. Footer: "DC-A reads DC-B's service through a local address — app unchanged, no VPN."</a:t>
             </a:r>
           </a:p>
         </p:txBody>
@@ -10012,11 +11941,11 @@
         <p:spPr>
           <a:xfrm>
             <a:off x="841248" y="2670048"/>
-            <a:ext cx="5715000" cy="530352"/>
+            <a:ext cx="5138928" cy="786384"/>
           </a:xfrm>
           <a:prstGeom prst="roundRect">
             <a:avLst>
-              <a:gd name="adj" fmla="val 6000"/>
+              <a:gd name="adj" fmla="val 7000"/>
             </a:avLst>
           </a:prstGeom>
           <a:solidFill>
@@ -10051,9 +11980,55 @@
           </a:p>
         </p:txBody>
       </p:sp>
+      <p:sp>
+        <p:nvSpPr>
+          <p:cNvPr id="8" name="Rounded Rectangle 7"/>
+          <p:cNvSpPr/>
+          <p:nvPr/>
+        </p:nvSpPr>
+        <p:spPr>
+          <a:xfrm>
+            <a:off x="987552" y="2807208"/>
+            <a:ext cx="512064" cy="512064"/>
+          </a:xfrm>
+          <a:prstGeom prst="roundRect">
+            <a:avLst>
+              <a:gd name="adj" fmla="val 26000"/>
+            </a:avLst>
+          </a:prstGeom>
+          <a:solidFill>
+            <a:srgbClr val="EE0000"/>
+          </a:solidFill>
+          <a:ln>
+            <a:noFill/>
+          </a:ln>
+          <a:effectLst/>
+        </p:spPr>
+        <p:style>
+          <a:lnRef idx="1">
+            <a:schemeClr val="accent1"/>
+          </a:lnRef>
+          <a:fillRef idx="3">
+            <a:schemeClr val="accent1"/>
+          </a:fillRef>
+          <a:effectRef idx="2">
+            <a:schemeClr val="accent1"/>
+          </a:effectRef>
+          <a:fontRef idx="minor">
+            <a:schemeClr val="lt1"/>
+          </a:fontRef>
+        </p:style>
+        <p:txBody>
+          <a:bodyPr rtlCol="0" anchor="ctr"/>
+          <a:lstStyle/>
+          <a:p>
+            <a:pPr algn="ctr"/>
+          </a:p>
+        </p:txBody>
+      </p:sp>
       <p:pic>
         <p:nvPicPr>
-          <p:cNvPr id="8" name="Picture 7" descr="check_steel.png"/>
+          <p:cNvPr id="9" name="Picture 8" descr="check_white.png"/>
           <p:cNvPicPr>
             <a:picLocks noChangeAspect="1"/>
           </p:cNvPicPr>
@@ -10067,8 +12042,8 @@
         </p:blipFill>
         <p:spPr>
           <a:xfrm>
-            <a:off x="987552" y="2816352"/>
-            <a:ext cx="237744" cy="237744"/>
+            <a:off x="1110447" y="2930103"/>
+            <a:ext cx="266273" cy="266273"/>
           </a:xfrm>
           <a:prstGeom prst="rect">
             <a:avLst/>
@@ -10077,14 +12052,14 @@
       </p:pic>
       <p:sp>
         <p:nvSpPr>
-          <p:cNvPr id="9" name="TextBox 8"/>
+          <p:cNvPr id="10" name="TextBox 9"/>
           <p:cNvSpPr txBox="1"/>
           <p:nvPr/>
         </p:nvSpPr>
         <p:spPr>
           <a:xfrm>
-            <a:off x="1353312" y="2670048"/>
-            <a:ext cx="5029200" cy="530352"/>
+            <a:off x="1627632" y="2670048"/>
+            <a:ext cx="4206240" cy="786384"/>
           </a:xfrm>
           <a:prstGeom prst="rect">
             <a:avLst/>
@@ -10109,7 +12084,7 @@
               </a:spcAft>
             </a:pPr>
             <a:r>
-              <a:rPr sz="1200" b="0">
+              <a:rPr sz="1150" b="0">
                 <a:solidFill>
                   <a:srgbClr val="1A1A1A"/>
                 </a:solidFill>
@@ -10122,18 +12097,18 @@
       </p:sp>
       <p:sp>
         <p:nvSpPr>
-          <p:cNvPr id="10" name="Rounded Rectangle 9"/>
+          <p:cNvPr id="11" name="Rounded Rectangle 10"/>
           <p:cNvSpPr/>
           <p:nvPr/>
         </p:nvSpPr>
         <p:spPr>
           <a:xfrm>
-            <a:off x="841248" y="3273552"/>
-            <a:ext cx="5715000" cy="530352"/>
+            <a:off x="6254496" y="2670048"/>
+            <a:ext cx="5138928" cy="786384"/>
           </a:xfrm>
           <a:prstGeom prst="roundRect">
             <a:avLst>
-              <a:gd name="adj" fmla="val 6000"/>
+              <a:gd name="adj" fmla="val 7000"/>
             </a:avLst>
           </a:prstGeom>
           <a:solidFill>
@@ -10168,9 +12143,55 @@
           </a:p>
         </p:txBody>
       </p:sp>
+      <p:sp>
+        <p:nvSpPr>
+          <p:cNvPr id="12" name="Rounded Rectangle 11"/>
+          <p:cNvSpPr/>
+          <p:nvPr/>
+        </p:nvSpPr>
+        <p:spPr>
+          <a:xfrm>
+            <a:off x="6400800" y="2807208"/>
+            <a:ext cx="512064" cy="512064"/>
+          </a:xfrm>
+          <a:prstGeom prst="roundRect">
+            <a:avLst>
+              <a:gd name="adj" fmla="val 26000"/>
+            </a:avLst>
+          </a:prstGeom>
+          <a:solidFill>
+            <a:srgbClr val="EE0000"/>
+          </a:solidFill>
+          <a:ln>
+            <a:noFill/>
+          </a:ln>
+          <a:effectLst/>
+        </p:spPr>
+        <p:style>
+          <a:lnRef idx="1">
+            <a:schemeClr val="accent1"/>
+          </a:lnRef>
+          <a:fillRef idx="3">
+            <a:schemeClr val="accent1"/>
+          </a:fillRef>
+          <a:effectRef idx="2">
+            <a:schemeClr val="accent1"/>
+          </a:effectRef>
+          <a:fontRef idx="minor">
+            <a:schemeClr val="lt1"/>
+          </a:fontRef>
+        </p:style>
+        <p:txBody>
+          <a:bodyPr rtlCol="0" anchor="ctr"/>
+          <a:lstStyle/>
+          <a:p>
+            <a:pPr algn="ctr"/>
+          </a:p>
+        </p:txBody>
+      </p:sp>
       <p:pic>
         <p:nvPicPr>
-          <p:cNvPr id="11" name="Picture 10" descr="check_steel.png"/>
+          <p:cNvPr id="13" name="Picture 12" descr="check_white.png"/>
           <p:cNvPicPr>
             <a:picLocks noChangeAspect="1"/>
           </p:cNvPicPr>
@@ -10184,8 +12205,8 @@
         </p:blipFill>
         <p:spPr>
           <a:xfrm>
-            <a:off x="987552" y="3419856"/>
-            <a:ext cx="237744" cy="237744"/>
+            <a:off x="6523695" y="2930103"/>
+            <a:ext cx="266273" cy="266273"/>
           </a:xfrm>
           <a:prstGeom prst="rect">
             <a:avLst/>
@@ -10194,14 +12215,14 @@
       </p:pic>
       <p:sp>
         <p:nvSpPr>
-          <p:cNvPr id="12" name="TextBox 11"/>
+          <p:cNvPr id="14" name="TextBox 13"/>
           <p:cNvSpPr txBox="1"/>
           <p:nvPr/>
         </p:nvSpPr>
         <p:spPr>
           <a:xfrm>
-            <a:off x="1353312" y="3273552"/>
-            <a:ext cx="5029200" cy="530352"/>
+            <a:off x="7040880" y="2670048"/>
+            <a:ext cx="4206240" cy="786384"/>
           </a:xfrm>
           <a:prstGeom prst="rect">
             <a:avLst/>
@@ -10226,7 +12247,7 @@
               </a:spcAft>
             </a:pPr>
             <a:r>
-              <a:rPr sz="1200" b="0">
+              <a:rPr sz="1150" b="0">
                 <a:solidFill>
                   <a:srgbClr val="1A1A1A"/>
                 </a:solidFill>
@@ -10239,18 +12260,18 @@
       </p:sp>
       <p:sp>
         <p:nvSpPr>
-          <p:cNvPr id="13" name="Rounded Rectangle 12"/>
+          <p:cNvPr id="15" name="Rounded Rectangle 14"/>
           <p:cNvSpPr/>
           <p:nvPr/>
         </p:nvSpPr>
         <p:spPr>
           <a:xfrm>
-            <a:off x="841248" y="3877056"/>
-            <a:ext cx="5715000" cy="530352"/>
+            <a:off x="841248" y="3602736"/>
+            <a:ext cx="5138928" cy="786384"/>
           </a:xfrm>
           <a:prstGeom prst="roundRect">
             <a:avLst>
-              <a:gd name="adj" fmla="val 6000"/>
+              <a:gd name="adj" fmla="val 7000"/>
             </a:avLst>
           </a:prstGeom>
           <a:solidFill>
@@ -10285,9 +12306,55 @@
           </a:p>
         </p:txBody>
       </p:sp>
+      <p:sp>
+        <p:nvSpPr>
+          <p:cNvPr id="16" name="Rounded Rectangle 15"/>
+          <p:cNvSpPr/>
+          <p:nvPr/>
+        </p:nvSpPr>
+        <p:spPr>
+          <a:xfrm>
+            <a:off x="987552" y="3739896"/>
+            <a:ext cx="512064" cy="512064"/>
+          </a:xfrm>
+          <a:prstGeom prst="roundRect">
+            <a:avLst>
+              <a:gd name="adj" fmla="val 26000"/>
+            </a:avLst>
+          </a:prstGeom>
+          <a:solidFill>
+            <a:srgbClr val="EE0000"/>
+          </a:solidFill>
+          <a:ln>
+            <a:noFill/>
+          </a:ln>
+          <a:effectLst/>
+        </p:spPr>
+        <p:style>
+          <a:lnRef idx="1">
+            <a:schemeClr val="accent1"/>
+          </a:lnRef>
+          <a:fillRef idx="3">
+            <a:schemeClr val="accent1"/>
+          </a:fillRef>
+          <a:effectRef idx="2">
+            <a:schemeClr val="accent1"/>
+          </a:effectRef>
+          <a:fontRef idx="minor">
+            <a:schemeClr val="lt1"/>
+          </a:fontRef>
+        </p:style>
+        <p:txBody>
+          <a:bodyPr rtlCol="0" anchor="ctr"/>
+          <a:lstStyle/>
+          <a:p>
+            <a:pPr algn="ctr"/>
+          </a:p>
+        </p:txBody>
+      </p:sp>
       <p:pic>
         <p:nvPicPr>
-          <p:cNvPr id="14" name="Picture 13" descr="check_steel.png"/>
+          <p:cNvPr id="17" name="Picture 16" descr="check_white.png"/>
           <p:cNvPicPr>
             <a:picLocks noChangeAspect="1"/>
           </p:cNvPicPr>
@@ -10301,8 +12368,8 @@
         </p:blipFill>
         <p:spPr>
           <a:xfrm>
-            <a:off x="987552" y="4023360"/>
-            <a:ext cx="237744" cy="237744"/>
+            <a:off x="1110447" y="3862791"/>
+            <a:ext cx="266273" cy="266273"/>
           </a:xfrm>
           <a:prstGeom prst="rect">
             <a:avLst/>
@@ -10311,14 +12378,14 @@
       </p:pic>
       <p:sp>
         <p:nvSpPr>
-          <p:cNvPr id="15" name="TextBox 14"/>
+          <p:cNvPr id="18" name="TextBox 17"/>
           <p:cNvSpPr txBox="1"/>
           <p:nvPr/>
         </p:nvSpPr>
         <p:spPr>
           <a:xfrm>
-            <a:off x="1353312" y="3877056"/>
-            <a:ext cx="5029200" cy="530352"/>
+            <a:off x="1627632" y="3602736"/>
+            <a:ext cx="4206240" cy="786384"/>
           </a:xfrm>
           <a:prstGeom prst="rect">
             <a:avLst/>
@@ -10343,7 +12410,7 @@
               </a:spcAft>
             </a:pPr>
             <a:r>
-              <a:rPr sz="1200" b="0">
+              <a:rPr sz="1150" b="0">
                 <a:solidFill>
                   <a:srgbClr val="1A1A1A"/>
                 </a:solidFill>
@@ -10356,18 +12423,18 @@
       </p:sp>
       <p:sp>
         <p:nvSpPr>
-          <p:cNvPr id="16" name="Rounded Rectangle 15"/>
+          <p:cNvPr id="19" name="Rounded Rectangle 18"/>
           <p:cNvSpPr/>
           <p:nvPr/>
         </p:nvSpPr>
         <p:spPr>
           <a:xfrm>
-            <a:off x="841248" y="4480560"/>
-            <a:ext cx="5715000" cy="530352"/>
+            <a:off x="6254496" y="3602736"/>
+            <a:ext cx="5138928" cy="786384"/>
           </a:xfrm>
           <a:prstGeom prst="roundRect">
             <a:avLst>
-              <a:gd name="adj" fmla="val 6000"/>
+              <a:gd name="adj" fmla="val 7000"/>
             </a:avLst>
           </a:prstGeom>
           <a:solidFill>
@@ -10402,9 +12469,55 @@
           </a:p>
         </p:txBody>
       </p:sp>
+      <p:sp>
+        <p:nvSpPr>
+          <p:cNvPr id="20" name="Rounded Rectangle 19"/>
+          <p:cNvSpPr/>
+          <p:nvPr/>
+        </p:nvSpPr>
+        <p:spPr>
+          <a:xfrm>
+            <a:off x="6400800" y="3739896"/>
+            <a:ext cx="512064" cy="512064"/>
+          </a:xfrm>
+          <a:prstGeom prst="roundRect">
+            <a:avLst>
+              <a:gd name="adj" fmla="val 26000"/>
+            </a:avLst>
+          </a:prstGeom>
+          <a:solidFill>
+            <a:srgbClr val="EE0000"/>
+          </a:solidFill>
+          <a:ln>
+            <a:noFill/>
+          </a:ln>
+          <a:effectLst/>
+        </p:spPr>
+        <p:style>
+          <a:lnRef idx="1">
+            <a:schemeClr val="accent1"/>
+          </a:lnRef>
+          <a:fillRef idx="3">
+            <a:schemeClr val="accent1"/>
+          </a:fillRef>
+          <a:effectRef idx="2">
+            <a:schemeClr val="accent1"/>
+          </a:effectRef>
+          <a:fontRef idx="minor">
+            <a:schemeClr val="lt1"/>
+          </a:fontRef>
+        </p:style>
+        <p:txBody>
+          <a:bodyPr rtlCol="0" anchor="ctr"/>
+          <a:lstStyle/>
+          <a:p>
+            <a:pPr algn="ctr"/>
+          </a:p>
+        </p:txBody>
+      </p:sp>
       <p:pic>
         <p:nvPicPr>
-          <p:cNvPr id="17" name="Picture 16" descr="check_steel.png"/>
+          <p:cNvPr id="21" name="Picture 20" descr="check_white.png"/>
           <p:cNvPicPr>
             <a:picLocks noChangeAspect="1"/>
           </p:cNvPicPr>
@@ -10418,8 +12531,8 @@
         </p:blipFill>
         <p:spPr>
           <a:xfrm>
-            <a:off x="987552" y="4626864"/>
-            <a:ext cx="237744" cy="237744"/>
+            <a:off x="6523695" y="3862791"/>
+            <a:ext cx="266273" cy="266273"/>
           </a:xfrm>
           <a:prstGeom prst="rect">
             <a:avLst/>
@@ -10428,14 +12541,14 @@
       </p:pic>
       <p:sp>
         <p:nvSpPr>
-          <p:cNvPr id="18" name="TextBox 17"/>
+          <p:cNvPr id="22" name="TextBox 21"/>
           <p:cNvSpPr txBox="1"/>
           <p:nvPr/>
         </p:nvSpPr>
         <p:spPr>
           <a:xfrm>
-            <a:off x="1353312" y="4480560"/>
-            <a:ext cx="5029200" cy="530352"/>
+            <a:off x="7040880" y="3602736"/>
+            <a:ext cx="4206240" cy="786384"/>
           </a:xfrm>
           <a:prstGeom prst="rect">
             <a:avLst/>
@@ -10460,7 +12573,7 @@
               </a:spcAft>
             </a:pPr>
             <a:r>
-              <a:rPr sz="1200" b="0">
+              <a:rPr sz="1150" b="0">
                 <a:solidFill>
                   <a:srgbClr val="1A1A1A"/>
                 </a:solidFill>
@@ -10473,18 +12586,18 @@
       </p:sp>
       <p:sp>
         <p:nvSpPr>
-          <p:cNvPr id="19" name="Rounded Rectangle 18"/>
+          <p:cNvPr id="23" name="Rounded Rectangle 22"/>
           <p:cNvSpPr/>
           <p:nvPr/>
         </p:nvSpPr>
         <p:spPr>
           <a:xfrm>
-            <a:off x="841248" y="5084064"/>
-            <a:ext cx="5715000" cy="530352"/>
+            <a:off x="841248" y="4535424"/>
+            <a:ext cx="5138928" cy="786384"/>
           </a:xfrm>
           <a:prstGeom prst="roundRect">
             <a:avLst>
-              <a:gd name="adj" fmla="val 6000"/>
+              <a:gd name="adj" fmla="val 7000"/>
             </a:avLst>
           </a:prstGeom>
           <a:solidFill>
@@ -10519,9 +12632,55 @@
           </a:p>
         </p:txBody>
       </p:sp>
+      <p:sp>
+        <p:nvSpPr>
+          <p:cNvPr id="24" name="Rounded Rectangle 23"/>
+          <p:cNvSpPr/>
+          <p:nvPr/>
+        </p:nvSpPr>
+        <p:spPr>
+          <a:xfrm>
+            <a:off x="987552" y="4672584"/>
+            <a:ext cx="512064" cy="512064"/>
+          </a:xfrm>
+          <a:prstGeom prst="roundRect">
+            <a:avLst>
+              <a:gd name="adj" fmla="val 26000"/>
+            </a:avLst>
+          </a:prstGeom>
+          <a:solidFill>
+            <a:srgbClr val="EE0000"/>
+          </a:solidFill>
+          <a:ln>
+            <a:noFill/>
+          </a:ln>
+          <a:effectLst/>
+        </p:spPr>
+        <p:style>
+          <a:lnRef idx="1">
+            <a:schemeClr val="accent1"/>
+          </a:lnRef>
+          <a:fillRef idx="3">
+            <a:schemeClr val="accent1"/>
+          </a:fillRef>
+          <a:effectRef idx="2">
+            <a:schemeClr val="accent1"/>
+          </a:effectRef>
+          <a:fontRef idx="minor">
+            <a:schemeClr val="lt1"/>
+          </a:fontRef>
+        </p:style>
+        <p:txBody>
+          <a:bodyPr rtlCol="0" anchor="ctr"/>
+          <a:lstStyle/>
+          <a:p>
+            <a:pPr algn="ctr"/>
+          </a:p>
+        </p:txBody>
+      </p:sp>
       <p:pic>
         <p:nvPicPr>
-          <p:cNvPr id="20" name="Picture 19" descr="check_steel.png"/>
+          <p:cNvPr id="25" name="Picture 24" descr="check_white.png"/>
           <p:cNvPicPr>
             <a:picLocks noChangeAspect="1"/>
           </p:cNvPicPr>
@@ -10535,8 +12694,8 @@
         </p:blipFill>
         <p:spPr>
           <a:xfrm>
-            <a:off x="987552" y="5230368"/>
-            <a:ext cx="237744" cy="237744"/>
+            <a:off x="1110447" y="4795479"/>
+            <a:ext cx="266273" cy="266273"/>
           </a:xfrm>
           <a:prstGeom prst="rect">
             <a:avLst/>
@@ -10545,14 +12704,14 @@
       </p:pic>
       <p:sp>
         <p:nvSpPr>
-          <p:cNvPr id="21" name="TextBox 20"/>
+          <p:cNvPr id="26" name="TextBox 25"/>
           <p:cNvSpPr txBox="1"/>
           <p:nvPr/>
         </p:nvSpPr>
         <p:spPr>
           <a:xfrm>
-            <a:off x="1353312" y="5084064"/>
-            <a:ext cx="5029200" cy="530352"/>
+            <a:off x="1627632" y="4535424"/>
+            <a:ext cx="4206240" cy="786384"/>
           </a:xfrm>
           <a:prstGeom prst="rect">
             <a:avLst/>
@@ -10577,221 +12736,13 @@
               </a:spcAft>
             </a:pPr>
             <a:r>
-              <a:rPr sz="1200" b="0">
+              <a:rPr sz="1150" b="0">
                 <a:solidFill>
                   <a:srgbClr val="1A1A1A"/>
                 </a:solidFill>
                 <a:latin typeface="Red Hat Text"/>
               </a:rPr>
               <a:t>The honest split: the platform HAS YOUR BACK for DR; YOUR job is to design for resiliency + failover</a:t>
-            </a:r>
-          </a:p>
-        </p:txBody>
-      </p:sp>
-      <p:sp>
-        <p:nvSpPr>
-          <p:cNvPr id="22" name="Rounded Rectangle 21"/>
-          <p:cNvSpPr/>
-          <p:nvPr/>
-        </p:nvSpPr>
-        <p:spPr>
-          <a:xfrm>
-            <a:off x="6812280" y="2670048"/>
-            <a:ext cx="4538167" cy="2944368"/>
-          </a:xfrm>
-          <a:prstGeom prst="roundRect">
-            <a:avLst>
-              <a:gd name="adj" fmla="val 4000"/>
-            </a:avLst>
-          </a:prstGeom>
-          <a:solidFill>
-            <a:srgbClr val="FFFFFF"/>
-          </a:solidFill>
-          <a:ln w="15240">
-            <a:solidFill>
-              <a:srgbClr val="DDE1E6"/>
-            </a:solidFill>
-          </a:ln>
-          <a:effectLst/>
-        </p:spPr>
-        <p:style>
-          <a:lnRef idx="1">
-            <a:schemeClr val="accent1"/>
-          </a:lnRef>
-          <a:fillRef idx="3">
-            <a:schemeClr val="accent1"/>
-          </a:fillRef>
-          <a:effectRef idx="2">
-            <a:schemeClr val="accent1"/>
-          </a:effectRef>
-          <a:fontRef idx="minor">
-            <a:schemeClr val="lt1"/>
-          </a:fontRef>
-        </p:style>
-        <p:txBody>
-          <a:bodyPr rtlCol="0" anchor="ctr"/>
-          <a:lstStyle/>
-          <a:p>
-            <a:pPr algn="ctr"/>
-          </a:p>
-        </p:txBody>
-      </p:sp>
-      <p:sp>
-        <p:nvSpPr>
-          <p:cNvPr id="23" name="Rounded Rectangle 22"/>
-          <p:cNvSpPr/>
-          <p:nvPr/>
-        </p:nvSpPr>
-        <p:spPr>
-          <a:xfrm>
-            <a:off x="7013448" y="2871216"/>
-            <a:ext cx="1298448" cy="310896"/>
-          </a:xfrm>
-          <a:prstGeom prst="roundRect">
-            <a:avLst>
-              <a:gd name="adj" fmla="val 50000"/>
-            </a:avLst>
-          </a:prstGeom>
-          <a:solidFill>
-            <a:srgbClr val="FCECEC"/>
-          </a:solidFill>
-          <a:ln>
-            <a:noFill/>
-          </a:ln>
-          <a:effectLst/>
-        </p:spPr>
-        <p:style>
-          <a:lnRef idx="1">
-            <a:schemeClr val="accent1"/>
-          </a:lnRef>
-          <a:fillRef idx="3">
-            <a:schemeClr val="accent1"/>
-          </a:fillRef>
-          <a:effectRef idx="2">
-            <a:schemeClr val="accent1"/>
-          </a:effectRef>
-          <a:fontRef idx="minor">
-            <a:schemeClr val="lt1"/>
-          </a:fontRef>
-        </p:style>
-        <p:txBody>
-          <a:bodyPr rtlCol="0" anchor="ctr"/>
-          <a:lstStyle/>
-          <a:p>
-            <a:pPr algn="ctr"/>
-          </a:p>
-        </p:txBody>
-      </p:sp>
-      <p:sp>
-        <p:nvSpPr>
-          <p:cNvPr id="24" name="TextBox 23"/>
-          <p:cNvSpPr txBox="1"/>
-          <p:nvPr/>
-        </p:nvSpPr>
-        <p:spPr>
-          <a:xfrm>
-            <a:off x="7013448" y="2871216"/>
-            <a:ext cx="1298448" cy="310896"/>
-          </a:xfrm>
-          <a:prstGeom prst="rect">
-            <a:avLst/>
-          </a:prstGeom>
-          <a:noFill/>
-        </p:spPr>
-        <p:txBody>
-          <a:bodyPr wrap="none" anchor="ctr" lIns="0" rIns="0" tIns="0" bIns="0">
-            <a:spAutoFit/>
-          </a:bodyPr>
-          <a:lstStyle/>
-          <a:p>
-            <a:pPr algn="ctr">
-              <a:lnSpc>
-                <a:spcPct val="106000"/>
-              </a:lnSpc>
-              <a:spcBef>
-                <a:spcPts val="0"/>
-              </a:spcBef>
-              <a:spcAft>
-                <a:spcPts val="0"/>
-              </a:spcAft>
-            </a:pPr>
-            <a:r>
-              <a:rPr sz="850" b="1">
-                <a:solidFill>
-                  <a:srgbClr val="B80000"/>
-                </a:solidFill>
-                <a:latin typeface="Red Hat Display"/>
-              </a:rPr>
-              <a:t>MEDIA PASS</a:t>
-            </a:r>
-          </a:p>
-        </p:txBody>
-      </p:sp>
-      <p:pic>
-        <p:nvPicPr>
-          <p:cNvPr id="25" name="Picture 24" descr="eye_slate.png"/>
-          <p:cNvPicPr>
-            <a:picLocks noChangeAspect="1"/>
-          </p:cNvPicPr>
-          <p:nvPr/>
-        </p:nvPicPr>
-        <p:blipFill>
-          <a:blip r:embed="rId4"/>
-          <a:stretch>
-            <a:fillRect/>
-          </a:stretch>
-        </p:blipFill>
-        <p:spPr>
-          <a:xfrm>
-            <a:off x="8843619" y="3383280"/>
-            <a:ext cx="475488" cy="475488"/>
-          </a:xfrm>
-          <a:prstGeom prst="rect">
-            <a:avLst/>
-          </a:prstGeom>
-        </p:spPr>
-      </p:pic>
-      <p:sp>
-        <p:nvSpPr>
-          <p:cNvPr id="26" name="TextBox 25"/>
-          <p:cNvSpPr txBox="1"/>
-          <p:nvPr/>
-        </p:nvSpPr>
-        <p:spPr>
-          <a:xfrm>
-            <a:off x="7050024" y="3995928"/>
-            <a:ext cx="4062679" cy="1481328"/>
-          </a:xfrm>
-          <a:prstGeom prst="rect">
-            <a:avLst/>
-          </a:prstGeom>
-          <a:noFill/>
-        </p:spPr>
-        <p:txBody>
-          <a:bodyPr wrap="square" anchor="t" lIns="0" rIns="0" tIns="0" bIns="0">
-            <a:spAutoFit/>
-          </a:bodyPr>
-          <a:lstStyle/>
-          <a:p>
-            <a:pPr algn="l">
-              <a:lnSpc>
-                <a:spcPct val="120000"/>
-              </a:lnSpc>
-              <a:spcBef>
-                <a:spcPts val="0"/>
-              </a:spcBef>
-              <a:spcAft>
-                <a:spcPts val="0"/>
-              </a:spcAft>
-            </a:pPr>
-            <a:r>
-              <a:rPr sz="950" b="0">
-                <a:solidFill>
-                  <a:srgbClr val="8A9099"/>
-                </a:solidFill>
-                <a:latin typeface="Red Hat Text"/>
-              </a:rPr>
-              <a:t>Two stacked bands. Top band "YOUR job (this lab)": two chips side by side — "Service Mesh: in-cluster policy + failover" and "RHSI: cross-site connectivity" — with a small "vs, but complementary" bracket. Bottom band "PLATFORM's job (concept — the DR net)": three chips — "OADP: restore the DATA," "GitOps: re-materialize the PLATFORM (GitOps at Scale)," "ACM: fleet-scale (mention)." A dashed arrow from the top band down to the bottom labeled "catastrophe beyond failover → the net catches it."</a:t>
             </a:r>
           </a:p>
         </p:txBody>
@@ -11099,11 +13050,11 @@
         <p:spPr>
           <a:xfrm>
             <a:off x="841248" y="2395728"/>
-            <a:ext cx="5715000" cy="530352"/>
+            <a:ext cx="5138928" cy="786384"/>
           </a:xfrm>
           <a:prstGeom prst="roundRect">
             <a:avLst>
-              <a:gd name="adj" fmla="val 6000"/>
+              <a:gd name="adj" fmla="val 7000"/>
             </a:avLst>
           </a:prstGeom>
           <a:solidFill>
@@ -11138,9 +13089,55 @@
           </a:p>
         </p:txBody>
       </p:sp>
+      <p:sp>
+        <p:nvSpPr>
+          <p:cNvPr id="7" name="Rounded Rectangle 6"/>
+          <p:cNvSpPr/>
+          <p:nvPr/>
+        </p:nvSpPr>
+        <p:spPr>
+          <a:xfrm>
+            <a:off x="987552" y="2532888"/>
+            <a:ext cx="512064" cy="512064"/>
+          </a:xfrm>
+          <a:prstGeom prst="roundRect">
+            <a:avLst>
+              <a:gd name="adj" fmla="val 26000"/>
+            </a:avLst>
+          </a:prstGeom>
+          <a:solidFill>
+            <a:srgbClr val="EE0000"/>
+          </a:solidFill>
+          <a:ln>
+            <a:noFill/>
+          </a:ln>
+          <a:effectLst/>
+        </p:spPr>
+        <p:style>
+          <a:lnRef idx="1">
+            <a:schemeClr val="accent1"/>
+          </a:lnRef>
+          <a:fillRef idx="3">
+            <a:schemeClr val="accent1"/>
+          </a:fillRef>
+          <a:effectRef idx="2">
+            <a:schemeClr val="accent1"/>
+          </a:effectRef>
+          <a:fontRef idx="minor">
+            <a:schemeClr val="lt1"/>
+          </a:fontRef>
+        </p:style>
+        <p:txBody>
+          <a:bodyPr rtlCol="0" anchor="ctr"/>
+          <a:lstStyle/>
+          <a:p>
+            <a:pPr algn="ctr"/>
+          </a:p>
+        </p:txBody>
+      </p:sp>
       <p:pic>
         <p:nvPicPr>
-          <p:cNvPr id="7" name="Picture 6" descr="check_steel.png"/>
+          <p:cNvPr id="8" name="Picture 7" descr="check_white.png"/>
           <p:cNvPicPr>
             <a:picLocks noChangeAspect="1"/>
           </p:cNvPicPr>
@@ -11154,8 +13151,8 @@
         </p:blipFill>
         <p:spPr>
           <a:xfrm>
-            <a:off x="987552" y="2542032"/>
-            <a:ext cx="237744" cy="237744"/>
+            <a:off x="1110447" y="2655783"/>
+            <a:ext cx="266273" cy="266273"/>
           </a:xfrm>
           <a:prstGeom prst="rect">
             <a:avLst/>
@@ -11164,14 +13161,14 @@
       </p:pic>
       <p:sp>
         <p:nvSpPr>
-          <p:cNvPr id="8" name="TextBox 7"/>
+          <p:cNvPr id="9" name="TextBox 8"/>
           <p:cNvSpPr txBox="1"/>
           <p:nvPr/>
         </p:nvSpPr>
         <p:spPr>
           <a:xfrm>
-            <a:off x="1353312" y="2395728"/>
-            <a:ext cx="5029200" cy="530352"/>
+            <a:off x="1627632" y="2395728"/>
+            <a:ext cx="4206240" cy="786384"/>
           </a:xfrm>
           <a:prstGeom prst="rect">
             <a:avLst/>
@@ -11196,7 +13193,7 @@
               </a:spcAft>
             </a:pPr>
             <a:r>
-              <a:rPr sz="1200" b="0">
+              <a:rPr sz="1150" b="0">
                 <a:solidFill>
                   <a:srgbClr val="1A1A1A"/>
                 </a:solidFill>
@@ -11209,18 +13206,18 @@
       </p:sp>
       <p:sp>
         <p:nvSpPr>
-          <p:cNvPr id="9" name="Rounded Rectangle 8"/>
+          <p:cNvPr id="10" name="Rounded Rectangle 9"/>
           <p:cNvSpPr/>
           <p:nvPr/>
         </p:nvSpPr>
         <p:spPr>
           <a:xfrm>
-            <a:off x="841248" y="2999232"/>
-            <a:ext cx="5715000" cy="530352"/>
+            <a:off x="6254496" y="2395728"/>
+            <a:ext cx="5138928" cy="786384"/>
           </a:xfrm>
           <a:prstGeom prst="roundRect">
             <a:avLst>
-              <a:gd name="adj" fmla="val 6000"/>
+              <a:gd name="adj" fmla="val 7000"/>
             </a:avLst>
           </a:prstGeom>
           <a:solidFill>
@@ -11255,9 +13252,55 @@
           </a:p>
         </p:txBody>
       </p:sp>
+      <p:sp>
+        <p:nvSpPr>
+          <p:cNvPr id="11" name="Rounded Rectangle 10"/>
+          <p:cNvSpPr/>
+          <p:nvPr/>
+        </p:nvSpPr>
+        <p:spPr>
+          <a:xfrm>
+            <a:off x="6400800" y="2532888"/>
+            <a:ext cx="512064" cy="512064"/>
+          </a:xfrm>
+          <a:prstGeom prst="roundRect">
+            <a:avLst>
+              <a:gd name="adj" fmla="val 26000"/>
+            </a:avLst>
+          </a:prstGeom>
+          <a:solidFill>
+            <a:srgbClr val="EE0000"/>
+          </a:solidFill>
+          <a:ln>
+            <a:noFill/>
+          </a:ln>
+          <a:effectLst/>
+        </p:spPr>
+        <p:style>
+          <a:lnRef idx="1">
+            <a:schemeClr val="accent1"/>
+          </a:lnRef>
+          <a:fillRef idx="3">
+            <a:schemeClr val="accent1"/>
+          </a:fillRef>
+          <a:effectRef idx="2">
+            <a:schemeClr val="accent1"/>
+          </a:effectRef>
+          <a:fontRef idx="minor">
+            <a:schemeClr val="lt1"/>
+          </a:fontRef>
+        </p:style>
+        <p:txBody>
+          <a:bodyPr rtlCol="0" anchor="ctr"/>
+          <a:lstStyle/>
+          <a:p>
+            <a:pPr algn="ctr"/>
+          </a:p>
+        </p:txBody>
+      </p:sp>
       <p:pic>
         <p:nvPicPr>
-          <p:cNvPr id="10" name="Picture 9" descr="check_steel.png"/>
+          <p:cNvPr id="12" name="Picture 11" descr="check_white.png"/>
           <p:cNvPicPr>
             <a:picLocks noChangeAspect="1"/>
           </p:cNvPicPr>
@@ -11271,8 +13314,8 @@
         </p:blipFill>
         <p:spPr>
           <a:xfrm>
-            <a:off x="987552" y="3145536"/>
-            <a:ext cx="237744" cy="237744"/>
+            <a:off x="6523695" y="2655783"/>
+            <a:ext cx="266273" cy="266273"/>
           </a:xfrm>
           <a:prstGeom prst="rect">
             <a:avLst/>
@@ -11281,14 +13324,14 @@
       </p:pic>
       <p:sp>
         <p:nvSpPr>
-          <p:cNvPr id="11" name="TextBox 10"/>
+          <p:cNvPr id="13" name="TextBox 12"/>
           <p:cNvSpPr txBox="1"/>
           <p:nvPr/>
         </p:nvSpPr>
         <p:spPr>
           <a:xfrm>
-            <a:off x="1353312" y="2999232"/>
-            <a:ext cx="5029200" cy="530352"/>
+            <a:off x="7040880" y="2395728"/>
+            <a:ext cx="4206240" cy="786384"/>
           </a:xfrm>
           <a:prstGeom prst="rect">
             <a:avLst/>
@@ -11313,7 +13356,7 @@
               </a:spcAft>
             </a:pPr>
             <a:r>
-              <a:rPr sz="1200" b="0">
+              <a:rPr sz="1150" b="0">
                 <a:solidFill>
                   <a:srgbClr val="1A1A1A"/>
                 </a:solidFill>
@@ -11326,18 +13369,18 @@
       </p:sp>
       <p:sp>
         <p:nvSpPr>
-          <p:cNvPr id="12" name="Rounded Rectangle 11"/>
+          <p:cNvPr id="14" name="Rounded Rectangle 13"/>
           <p:cNvSpPr/>
           <p:nvPr/>
         </p:nvSpPr>
         <p:spPr>
           <a:xfrm>
-            <a:off x="841248" y="3602736"/>
-            <a:ext cx="5715000" cy="530352"/>
+            <a:off x="841248" y="3328416"/>
+            <a:ext cx="5138928" cy="786384"/>
           </a:xfrm>
           <a:prstGeom prst="roundRect">
             <a:avLst>
-              <a:gd name="adj" fmla="val 6000"/>
+              <a:gd name="adj" fmla="val 7000"/>
             </a:avLst>
           </a:prstGeom>
           <a:solidFill>
@@ -11372,9 +13415,55 @@
           </a:p>
         </p:txBody>
       </p:sp>
+      <p:sp>
+        <p:nvSpPr>
+          <p:cNvPr id="15" name="Rounded Rectangle 14"/>
+          <p:cNvSpPr/>
+          <p:nvPr/>
+        </p:nvSpPr>
+        <p:spPr>
+          <a:xfrm>
+            <a:off x="987552" y="3465576"/>
+            <a:ext cx="512064" cy="512064"/>
+          </a:xfrm>
+          <a:prstGeom prst="roundRect">
+            <a:avLst>
+              <a:gd name="adj" fmla="val 26000"/>
+            </a:avLst>
+          </a:prstGeom>
+          <a:solidFill>
+            <a:srgbClr val="EE0000"/>
+          </a:solidFill>
+          <a:ln>
+            <a:noFill/>
+          </a:ln>
+          <a:effectLst/>
+        </p:spPr>
+        <p:style>
+          <a:lnRef idx="1">
+            <a:schemeClr val="accent1"/>
+          </a:lnRef>
+          <a:fillRef idx="3">
+            <a:schemeClr val="accent1"/>
+          </a:fillRef>
+          <a:effectRef idx="2">
+            <a:schemeClr val="accent1"/>
+          </a:effectRef>
+          <a:fontRef idx="minor">
+            <a:schemeClr val="lt1"/>
+          </a:fontRef>
+        </p:style>
+        <p:txBody>
+          <a:bodyPr rtlCol="0" anchor="ctr"/>
+          <a:lstStyle/>
+          <a:p>
+            <a:pPr algn="ctr"/>
+          </a:p>
+        </p:txBody>
+      </p:sp>
       <p:pic>
         <p:nvPicPr>
-          <p:cNvPr id="13" name="Picture 12" descr="check_steel.png"/>
+          <p:cNvPr id="16" name="Picture 15" descr="check_white.png"/>
           <p:cNvPicPr>
             <a:picLocks noChangeAspect="1"/>
           </p:cNvPicPr>
@@ -11388,8 +13477,8 @@
         </p:blipFill>
         <p:spPr>
           <a:xfrm>
-            <a:off x="987552" y="3749040"/>
-            <a:ext cx="237744" cy="237744"/>
+            <a:off x="1110447" y="3588471"/>
+            <a:ext cx="266273" cy="266273"/>
           </a:xfrm>
           <a:prstGeom prst="rect">
             <a:avLst/>
@@ -11398,14 +13487,14 @@
       </p:pic>
       <p:sp>
         <p:nvSpPr>
-          <p:cNvPr id="14" name="TextBox 13"/>
+          <p:cNvPr id="17" name="TextBox 16"/>
           <p:cNvSpPr txBox="1"/>
           <p:nvPr/>
         </p:nvSpPr>
         <p:spPr>
           <a:xfrm>
-            <a:off x="1353312" y="3602736"/>
-            <a:ext cx="5029200" cy="530352"/>
+            <a:off x="1627632" y="3328416"/>
+            <a:ext cx="4206240" cy="786384"/>
           </a:xfrm>
           <a:prstGeom prst="rect">
             <a:avLst/>
@@ -11430,7 +13519,7 @@
               </a:spcAft>
             </a:pPr>
             <a:r>
-              <a:rPr sz="1200" b="0">
+              <a:rPr sz="1150" b="0">
                 <a:solidFill>
                   <a:srgbClr val="1A1A1A"/>
                 </a:solidFill>
@@ -11443,18 +13532,18 @@
       </p:sp>
       <p:sp>
         <p:nvSpPr>
-          <p:cNvPr id="15" name="Rounded Rectangle 14"/>
+          <p:cNvPr id="18" name="Rounded Rectangle 17"/>
           <p:cNvSpPr/>
           <p:nvPr/>
         </p:nvSpPr>
         <p:spPr>
           <a:xfrm>
-            <a:off x="841248" y="4206240"/>
-            <a:ext cx="5715000" cy="530352"/>
+            <a:off x="6254496" y="3328416"/>
+            <a:ext cx="5138928" cy="786384"/>
           </a:xfrm>
           <a:prstGeom prst="roundRect">
             <a:avLst>
-              <a:gd name="adj" fmla="val 6000"/>
+              <a:gd name="adj" fmla="val 7000"/>
             </a:avLst>
           </a:prstGeom>
           <a:solidFill>
@@ -11489,9 +13578,55 @@
           </a:p>
         </p:txBody>
       </p:sp>
+      <p:sp>
+        <p:nvSpPr>
+          <p:cNvPr id="19" name="Rounded Rectangle 18"/>
+          <p:cNvSpPr/>
+          <p:nvPr/>
+        </p:nvSpPr>
+        <p:spPr>
+          <a:xfrm>
+            <a:off x="6400800" y="3465576"/>
+            <a:ext cx="512064" cy="512064"/>
+          </a:xfrm>
+          <a:prstGeom prst="roundRect">
+            <a:avLst>
+              <a:gd name="adj" fmla="val 26000"/>
+            </a:avLst>
+          </a:prstGeom>
+          <a:solidFill>
+            <a:srgbClr val="EE0000"/>
+          </a:solidFill>
+          <a:ln>
+            <a:noFill/>
+          </a:ln>
+          <a:effectLst/>
+        </p:spPr>
+        <p:style>
+          <a:lnRef idx="1">
+            <a:schemeClr val="accent1"/>
+          </a:lnRef>
+          <a:fillRef idx="3">
+            <a:schemeClr val="accent1"/>
+          </a:fillRef>
+          <a:effectRef idx="2">
+            <a:schemeClr val="accent1"/>
+          </a:effectRef>
+          <a:fontRef idx="minor">
+            <a:schemeClr val="lt1"/>
+          </a:fontRef>
+        </p:style>
+        <p:txBody>
+          <a:bodyPr rtlCol="0" anchor="ctr"/>
+          <a:lstStyle/>
+          <a:p>
+            <a:pPr algn="ctr"/>
+          </a:p>
+        </p:txBody>
+      </p:sp>
       <p:pic>
         <p:nvPicPr>
-          <p:cNvPr id="16" name="Picture 15" descr="check_steel.png"/>
+          <p:cNvPr id="20" name="Picture 19" descr="check_white.png"/>
           <p:cNvPicPr>
             <a:picLocks noChangeAspect="1"/>
           </p:cNvPicPr>
@@ -11505,8 +13640,8 @@
         </p:blipFill>
         <p:spPr>
           <a:xfrm>
-            <a:off x="987552" y="4352544"/>
-            <a:ext cx="237744" cy="237744"/>
+            <a:off x="6523695" y="3588471"/>
+            <a:ext cx="266273" cy="266273"/>
           </a:xfrm>
           <a:prstGeom prst="rect">
             <a:avLst/>
@@ -11515,14 +13650,14 @@
       </p:pic>
       <p:sp>
         <p:nvSpPr>
-          <p:cNvPr id="17" name="TextBox 16"/>
+          <p:cNvPr id="21" name="TextBox 20"/>
           <p:cNvSpPr txBox="1"/>
           <p:nvPr/>
         </p:nvSpPr>
         <p:spPr>
           <a:xfrm>
-            <a:off x="1353312" y="4206240"/>
-            <a:ext cx="5029200" cy="530352"/>
+            <a:off x="7040880" y="3328416"/>
+            <a:ext cx="4206240" cy="786384"/>
           </a:xfrm>
           <a:prstGeom prst="rect">
             <a:avLst/>
@@ -11547,7 +13682,7 @@
               </a:spcAft>
             </a:pPr>
             <a:r>
-              <a:rPr sz="1200" b="0">
+              <a:rPr sz="1150" b="0">
                 <a:solidFill>
                   <a:srgbClr val="1A1A1A"/>
                 </a:solidFill>
@@ -11560,18 +13695,18 @@
       </p:sp>
       <p:sp>
         <p:nvSpPr>
-          <p:cNvPr id="18" name="Rounded Rectangle 17"/>
+          <p:cNvPr id="22" name="Rounded Rectangle 21"/>
           <p:cNvSpPr/>
           <p:nvPr/>
         </p:nvSpPr>
         <p:spPr>
           <a:xfrm>
-            <a:off x="841248" y="4809744"/>
-            <a:ext cx="5715000" cy="530352"/>
+            <a:off x="841248" y="4261104"/>
+            <a:ext cx="5138928" cy="786384"/>
           </a:xfrm>
           <a:prstGeom prst="roundRect">
             <a:avLst>
-              <a:gd name="adj" fmla="val 6000"/>
+              <a:gd name="adj" fmla="val 7000"/>
             </a:avLst>
           </a:prstGeom>
           <a:solidFill>
@@ -11606,9 +13741,55 @@
           </a:p>
         </p:txBody>
       </p:sp>
+      <p:sp>
+        <p:nvSpPr>
+          <p:cNvPr id="23" name="Rounded Rectangle 22"/>
+          <p:cNvSpPr/>
+          <p:nvPr/>
+        </p:nvSpPr>
+        <p:spPr>
+          <a:xfrm>
+            <a:off x="987552" y="4398264"/>
+            <a:ext cx="512064" cy="512064"/>
+          </a:xfrm>
+          <a:prstGeom prst="roundRect">
+            <a:avLst>
+              <a:gd name="adj" fmla="val 26000"/>
+            </a:avLst>
+          </a:prstGeom>
+          <a:solidFill>
+            <a:srgbClr val="EE0000"/>
+          </a:solidFill>
+          <a:ln>
+            <a:noFill/>
+          </a:ln>
+          <a:effectLst/>
+        </p:spPr>
+        <p:style>
+          <a:lnRef idx="1">
+            <a:schemeClr val="accent1"/>
+          </a:lnRef>
+          <a:fillRef idx="3">
+            <a:schemeClr val="accent1"/>
+          </a:fillRef>
+          <a:effectRef idx="2">
+            <a:schemeClr val="accent1"/>
+          </a:effectRef>
+          <a:fontRef idx="minor">
+            <a:schemeClr val="lt1"/>
+          </a:fontRef>
+        </p:style>
+        <p:txBody>
+          <a:bodyPr rtlCol="0" anchor="ctr"/>
+          <a:lstStyle/>
+          <a:p>
+            <a:pPr algn="ctr"/>
+          </a:p>
+        </p:txBody>
+      </p:sp>
       <p:pic>
         <p:nvPicPr>
-          <p:cNvPr id="19" name="Picture 18" descr="check_steel.png"/>
+          <p:cNvPr id="24" name="Picture 23" descr="check_white.png"/>
           <p:cNvPicPr>
             <a:picLocks noChangeAspect="1"/>
           </p:cNvPicPr>
@@ -11622,8 +13803,8 @@
         </p:blipFill>
         <p:spPr>
           <a:xfrm>
-            <a:off x="987552" y="4956048"/>
-            <a:ext cx="237744" cy="237744"/>
+            <a:off x="1110447" y="4521159"/>
+            <a:ext cx="266273" cy="266273"/>
           </a:xfrm>
           <a:prstGeom prst="rect">
             <a:avLst/>
@@ -11632,14 +13813,14 @@
       </p:pic>
       <p:sp>
         <p:nvSpPr>
-          <p:cNvPr id="20" name="TextBox 19"/>
+          <p:cNvPr id="25" name="TextBox 24"/>
           <p:cNvSpPr txBox="1"/>
           <p:nvPr/>
         </p:nvSpPr>
         <p:spPr>
           <a:xfrm>
-            <a:off x="1353312" y="4809744"/>
-            <a:ext cx="5029200" cy="530352"/>
+            <a:off x="1627632" y="4261104"/>
+            <a:ext cx="4206240" cy="786384"/>
           </a:xfrm>
           <a:prstGeom prst="rect">
             <a:avLst/>
@@ -11664,7 +13845,7 @@
               </a:spcAft>
             </a:pPr>
             <a:r>
-              <a:rPr sz="1200" b="0">
+              <a:rPr sz="1150" b="0">
                 <a:solidFill>
                   <a:srgbClr val="1A1A1A"/>
                 </a:solidFill>
@@ -11675,16 +13856,310 @@
           </a:p>
         </p:txBody>
       </p:sp>
-      <p:sp>
-        <p:nvSpPr>
-          <p:cNvPr id="21" name="Rounded Rectangle 20"/>
+      <p:cxnSp>
+        <p:nvCxnSpPr>
+          <p:cNvPr id="26" name="Connector 25"/>
+          <p:cNvCxnSpPr/>
+          <p:nvPr/>
+        </p:nvCxnSpPr>
+        <p:spPr>
+          <a:xfrm>
+            <a:off x="841248" y="6437376"/>
+            <a:ext cx="10509199" cy="0"/>
+          </a:xfrm>
+          <a:prstGeom prst="bentConnector3">
+            <a:avLst/>
+          </a:prstGeom>
+          <a:ln w="12700">
+            <a:solidFill>
+              <a:srgbClr val="DDE1E6"/>
+            </a:solidFill>
+          </a:ln>
+          <a:effectLst/>
+        </p:spPr>
+        <p:style>
+          <a:lnRef idx="2">
+            <a:schemeClr val="accent1"/>
+          </a:lnRef>
+          <a:fillRef idx="0">
+            <a:schemeClr val="accent1"/>
+          </a:fillRef>
+          <a:effectRef idx="1">
+            <a:schemeClr val="accent1"/>
+          </a:effectRef>
+          <a:fontRef idx="minor">
+            <a:schemeClr val="tx1"/>
+          </a:fontRef>
+        </p:style>
+      </p:cxnSp>
+      <p:sp>
+        <p:nvSpPr>
+          <p:cNvPr id="27" name="TextBox 26"/>
+          <p:cNvSpPr txBox="1"/>
+          <p:nvPr/>
+        </p:nvSpPr>
+        <p:spPr>
+          <a:xfrm>
+            <a:off x="841248" y="6473952"/>
+            <a:ext cx="7315200" cy="274320"/>
+          </a:xfrm>
+          <a:prstGeom prst="rect">
+            <a:avLst/>
+          </a:prstGeom>
+          <a:noFill/>
+        </p:spPr>
+        <p:txBody>
+          <a:bodyPr wrap="square" anchor="t" lIns="0" rIns="0" tIns="0" bIns="0">
+            <a:spAutoFit/>
+          </a:bodyPr>
+          <a:lstStyle/>
+          <a:p>
+            <a:pPr algn="l">
+              <a:lnSpc>
+                <a:spcPct val="106000"/>
+              </a:lnSpc>
+              <a:spcBef>
+                <a:spcPts val="0"/>
+              </a:spcBef>
+              <a:spcAft>
+                <a:spcPts val="0"/>
+              </a:spcAft>
+            </a:pPr>
+            <a:r>
+              <a:rPr sz="950" b="0">
+                <a:solidFill>
+                  <a:srgbClr val="8A9099"/>
+                </a:solidFill>
+                <a:latin typeface="Red Hat Text"/>
+              </a:rPr>
+              <a:t>CONFIDENTIAL</a:t>
+            </a:r>
+          </a:p>
+        </p:txBody>
+      </p:sp>
+      <p:sp>
+        <p:nvSpPr>
+          <p:cNvPr id="28" name="TextBox 27"/>
+          <p:cNvSpPr txBox="1"/>
+          <p:nvPr/>
+        </p:nvSpPr>
+        <p:spPr>
+          <a:xfrm>
+            <a:off x="10801807" y="6473952"/>
+            <a:ext cx="548640" cy="274320"/>
+          </a:xfrm>
+          <a:prstGeom prst="rect">
+            <a:avLst/>
+          </a:prstGeom>
+          <a:noFill/>
+        </p:spPr>
+        <p:txBody>
+          <a:bodyPr wrap="square" anchor="t" lIns="0" rIns="0" tIns="0" bIns="0">
+            <a:spAutoFit/>
+          </a:bodyPr>
+          <a:lstStyle/>
+          <a:p>
+            <a:pPr algn="r">
+              <a:lnSpc>
+                <a:spcPct val="106000"/>
+              </a:lnSpc>
+              <a:spcBef>
+                <a:spcPts val="0"/>
+              </a:spcBef>
+              <a:spcAft>
+                <a:spcPts val="0"/>
+              </a:spcAft>
+            </a:pPr>
+            <a:r>
+              <a:rPr sz="950" b="0">
+                <a:solidFill>
+                  <a:srgbClr val="8A9099"/>
+                </a:solidFill>
+                <a:latin typeface="Red Hat Text"/>
+              </a:rPr>
+              <a:t>7</a:t>
+            </a:r>
+          </a:p>
+        </p:txBody>
+      </p:sp>
+    </p:spTree>
+  </p:cSld>
+  <p:clrMapOvr>
+    <a:masterClrMapping/>
+  </p:clrMapOvr>
+</p:sld>
+</file>
+
+<file path=ppt/slides/slide9.xml><?xml version="1.0" encoding="utf-8"?>
+<p:sld xmlns:a="http://schemas.openxmlformats.org/drawingml/2006/main" xmlns:p="http://schemas.openxmlformats.org/presentationml/2006/main" xmlns:r="http://schemas.openxmlformats.org/officeDocument/2006/relationships">
+  <p:cSld>
+    <p:spTree>
+      <p:nvGrpSpPr>
+        <p:cNvPr id="1" name=""/>
+        <p:cNvGrpSpPr/>
+        <p:nvPr/>
+      </p:nvGrpSpPr>
+      <p:grpSpPr/>
+      <p:pic>
+        <p:nvPicPr>
+          <p:cNvPr id="2" name="Picture 1" descr="redhat_logo.jpg"/>
+          <p:cNvPicPr>
+            <a:picLocks noChangeAspect="1"/>
+          </p:cNvPicPr>
+          <p:nvPr/>
+        </p:nvPicPr>
+        <p:blipFill>
+          <a:blip r:embed="rId2"/>
+          <a:stretch>
+            <a:fillRect/>
+          </a:stretch>
+        </p:blipFill>
+        <p:spPr>
+          <a:xfrm>
+            <a:off x="10326319" y="475488"/>
+            <a:ext cx="1024128" cy="242248"/>
+          </a:xfrm>
+          <a:prstGeom prst="rect">
+            <a:avLst/>
+          </a:prstGeom>
+        </p:spPr>
+      </p:pic>
+      <p:sp>
+        <p:nvSpPr>
+          <p:cNvPr id="3" name="TextBox 2"/>
+          <p:cNvSpPr txBox="1"/>
+          <p:nvPr/>
+        </p:nvSpPr>
+        <p:spPr>
+          <a:xfrm>
+            <a:off x="841248" y="548640"/>
+            <a:ext cx="8595360" cy="274320"/>
+          </a:xfrm>
+          <a:prstGeom prst="rect">
+            <a:avLst/>
+          </a:prstGeom>
+          <a:noFill/>
+        </p:spPr>
+        <p:txBody>
+          <a:bodyPr wrap="square" anchor="t" lIns="0" rIns="0" tIns="0" bIns="0">
+            <a:spAutoFit/>
+          </a:bodyPr>
+          <a:lstStyle/>
+          <a:p>
+            <a:pPr algn="l">
+              <a:lnSpc>
+                <a:spcPct val="106000"/>
+              </a:lnSpc>
+              <a:spcBef>
+                <a:spcPts val="0"/>
+              </a:spcBef>
+              <a:spcAft>
+                <a:spcPts val="0"/>
+              </a:spcAft>
+            </a:pPr>
+            <a:r>
+              <a:rPr sz="1250" b="1" spc="220">
+                <a:solidFill>
+                  <a:srgbClr val="EE0000"/>
+                </a:solidFill>
+                <a:latin typeface="Red Hat Display"/>
+              </a:rPr>
+              <a:t>M22 · RESILIENCE, MULTI-CLUSTER &amp; DR</a:t>
+            </a:r>
+          </a:p>
+        </p:txBody>
+      </p:sp>
+      <p:sp>
+        <p:nvSpPr>
+          <p:cNvPr id="4" name="TextBox 3"/>
+          <p:cNvSpPr txBox="1"/>
+          <p:nvPr/>
+        </p:nvSpPr>
+        <p:spPr>
+          <a:xfrm>
+            <a:off x="841248" y="877824"/>
+            <a:ext cx="10515600" cy="548640"/>
+          </a:xfrm>
+          <a:prstGeom prst="rect">
+            <a:avLst/>
+          </a:prstGeom>
+          <a:noFill/>
+        </p:spPr>
+        <p:txBody>
+          <a:bodyPr wrap="none" anchor="t" lIns="0" rIns="0" tIns="0" bIns="0">
+            <a:spAutoFit/>
+          </a:bodyPr>
+          <a:lstStyle/>
+          <a:p>
+            <a:pPr algn="l">
+              <a:lnSpc>
+                <a:spcPct val="100000"/>
+              </a:lnSpc>
+              <a:spcBef>
+                <a:spcPts val="0"/>
+              </a:spcBef>
+              <a:spcAft>
+                <a:spcPts val="0"/>
+              </a:spcAft>
+            </a:pPr>
+            <a:r>
+              <a:rPr sz="2500" b="1">
+                <a:solidFill>
+                  <a:srgbClr val="1A1A1A"/>
+                </a:solidFill>
+                <a:latin typeface="Red Hat Display"/>
+              </a:rPr>
+              <a:t>Resilience ladder</a:t>
+            </a:r>
+          </a:p>
+        </p:txBody>
+      </p:sp>
+      <p:cxnSp>
+        <p:nvCxnSpPr>
+          <p:cNvPr id="5" name="Connector 4"/>
+          <p:cNvCxnSpPr/>
+          <p:nvPr/>
+        </p:nvCxnSpPr>
+        <p:spPr>
+          <a:xfrm>
+            <a:off x="841248" y="1554480"/>
+            <a:ext cx="1371600" cy="0"/>
+          </a:xfrm>
+          <a:prstGeom prst="bentConnector3">
+            <a:avLst/>
+          </a:prstGeom>
+          <a:ln w="31750">
+            <a:solidFill>
+              <a:srgbClr val="EE0000"/>
+            </a:solidFill>
+          </a:ln>
+          <a:effectLst/>
+        </p:spPr>
+        <p:style>
+          <a:lnRef idx="2">
+            <a:schemeClr val="accent1"/>
+          </a:lnRef>
+          <a:fillRef idx="0">
+            <a:schemeClr val="accent1"/>
+          </a:fillRef>
+          <a:effectRef idx="1">
+            <a:schemeClr val="accent1"/>
+          </a:effectRef>
+          <a:fontRef idx="minor">
+            <a:schemeClr val="tx1"/>
+          </a:fontRef>
+        </p:style>
+      </p:cxnSp>
+      <p:sp>
+        <p:nvSpPr>
+          <p:cNvPr id="6" name="Rounded Rectangle 5"/>
           <p:cNvSpPr/>
           <p:nvPr/>
         </p:nvSpPr>
         <p:spPr>
           <a:xfrm>
-            <a:off x="6812280" y="2395728"/>
-            <a:ext cx="4538167" cy="2944368"/>
+            <a:off x="841248" y="2331720"/>
+            <a:ext cx="10509199" cy="3794760"/>
           </a:xfrm>
           <a:prstGeom prst="roundRect">
             <a:avLst>
@@ -11723,169 +14198,33 @@
           </a:p>
         </p:txBody>
       </p:sp>
-      <p:sp>
-        <p:nvSpPr>
-          <p:cNvPr id="22" name="Rounded Rectangle 21"/>
-          <p:cNvSpPr/>
-          <p:nvPr/>
-        </p:nvSpPr>
-        <p:spPr>
-          <a:xfrm>
-            <a:off x="7013448" y="2596896"/>
-            <a:ext cx="1298448" cy="310896"/>
-          </a:xfrm>
-          <a:prstGeom prst="roundRect">
-            <a:avLst>
-              <a:gd name="adj" fmla="val 50000"/>
-            </a:avLst>
-          </a:prstGeom>
-          <a:solidFill>
-            <a:srgbClr val="FCECEC"/>
-          </a:solidFill>
-          <a:ln>
-            <a:noFill/>
-          </a:ln>
-          <a:effectLst/>
-        </p:spPr>
-        <p:style>
-          <a:lnRef idx="1">
-            <a:schemeClr val="accent1"/>
-          </a:lnRef>
-          <a:fillRef idx="3">
-            <a:schemeClr val="accent1"/>
-          </a:fillRef>
-          <a:effectRef idx="2">
-            <a:schemeClr val="accent1"/>
-          </a:effectRef>
-          <a:fontRef idx="minor">
-            <a:schemeClr val="lt1"/>
-          </a:fontRef>
-        </p:style>
-        <p:txBody>
-          <a:bodyPr rtlCol="0" anchor="ctr"/>
-          <a:lstStyle/>
-          <a:p>
-            <a:pPr algn="ctr"/>
-          </a:p>
-        </p:txBody>
-      </p:sp>
-      <p:sp>
-        <p:nvSpPr>
-          <p:cNvPr id="23" name="TextBox 22"/>
-          <p:cNvSpPr txBox="1"/>
-          <p:nvPr/>
-        </p:nvSpPr>
-        <p:spPr>
-          <a:xfrm>
-            <a:off x="7013448" y="2596896"/>
-            <a:ext cx="1298448" cy="310896"/>
-          </a:xfrm>
-          <a:prstGeom prst="rect">
-            <a:avLst/>
-          </a:prstGeom>
-          <a:noFill/>
-        </p:spPr>
-        <p:txBody>
-          <a:bodyPr wrap="none" anchor="ctr" lIns="0" rIns="0" tIns="0" bIns="0">
-            <a:spAutoFit/>
-          </a:bodyPr>
-          <a:lstStyle/>
-          <a:p>
-            <a:pPr algn="ctr">
-              <a:lnSpc>
-                <a:spcPct val="106000"/>
-              </a:lnSpc>
-              <a:spcBef>
-                <a:spcPts val="0"/>
-              </a:spcBef>
-              <a:spcAft>
-                <a:spcPts val="0"/>
-              </a:spcAft>
-            </a:pPr>
-            <a:r>
-              <a:rPr sz="850" b="1">
-                <a:solidFill>
-                  <a:srgbClr val="B80000"/>
-                </a:solidFill>
-                <a:latin typeface="Red Hat Display"/>
-              </a:rPr>
-              <a:t>MEDIA PASS</a:t>
-            </a:r>
-          </a:p>
-        </p:txBody>
-      </p:sp>
       <p:pic>
         <p:nvPicPr>
-          <p:cNvPr id="24" name="Picture 23" descr="eye_slate.png"/>
+          <p:cNvPr id="7" name="Picture 6" descr="01-resilience-ladder.png"/>
           <p:cNvPicPr>
             <a:picLocks noChangeAspect="1"/>
           </p:cNvPicPr>
           <p:nvPr/>
         </p:nvPicPr>
         <p:blipFill>
-          <a:blip r:embed="rId4"/>
+          <a:blip r:embed="rId3"/>
           <a:stretch>
             <a:fillRect/>
           </a:stretch>
         </p:blipFill>
         <p:spPr>
           <a:xfrm>
-            <a:off x="8843619" y="3108960"/>
-            <a:ext cx="475488" cy="475488"/>
+            <a:off x="4754305" y="2532888"/>
+            <a:ext cx="2683083" cy="3392424"/>
           </a:xfrm>
           <a:prstGeom prst="rect">
             <a:avLst/>
           </a:prstGeom>
         </p:spPr>
       </p:pic>
-      <p:sp>
-        <p:nvSpPr>
-          <p:cNvPr id="25" name="TextBox 24"/>
-          <p:cNvSpPr txBox="1"/>
-          <p:nvPr/>
-        </p:nvSpPr>
-        <p:spPr>
-          <a:xfrm>
-            <a:off x="7050024" y="3721608"/>
-            <a:ext cx="4062679" cy="1481328"/>
-          </a:xfrm>
-          <a:prstGeom prst="rect">
-            <a:avLst/>
-          </a:prstGeom>
-          <a:noFill/>
-        </p:spPr>
-        <p:txBody>
-          <a:bodyPr wrap="square" anchor="t" lIns="0" rIns="0" tIns="0" bIns="0">
-            <a:spAutoFit/>
-          </a:bodyPr>
-          <a:lstStyle/>
-          <a:p>
-            <a:pPr algn="l">
-              <a:lnSpc>
-                <a:spcPct val="120000"/>
-              </a:lnSpc>
-              <a:spcBef>
-                <a:spcPts val="0"/>
-              </a:spcBef>
-              <a:spcAft>
-                <a:spcPts val="0"/>
-              </a:spcAft>
-            </a:pPr>
-            <a:r>
-              <a:rPr sz="950" b="0">
-                <a:solidFill>
-                  <a:srgbClr val="8A9099"/>
-                </a:solidFill>
-                <a:latin typeface="Red Hat Text"/>
-              </a:rPr>
-              <a:t>A "what's it FOR" matrix: rows = failure/need (pod-node-zone / whole site lost / connect real sites / destroyed data / lost cluster / fleet-scale), columns = "Reach for" and "Not." Right rail "Map to your org" with the three prompts as check-boxes (automatic failover? which rung? app-vs-platform line?). Bottom banner pointer: "Observability/Deployment Targets &amp; Scheduling resilience · GitOps at Scale GitOps · builds toward ACM (fleet DR)."</a:t>
-            </a:r>
-          </a:p>
-        </p:txBody>
-      </p:sp>
       <p:cxnSp>
         <p:nvCxnSpPr>
-          <p:cNvPr id="26" name="Connector 25"/>
+          <p:cNvPr id="8" name="Connector 7"/>
           <p:cNvCxnSpPr/>
           <p:nvPr/>
         </p:nvCxnSpPr>
@@ -11921,7 +14260,7 @@
       </p:cxnSp>
       <p:sp>
         <p:nvSpPr>
-          <p:cNvPr id="27" name="TextBox 26"/>
+          <p:cNvPr id="9" name="TextBox 8"/>
           <p:cNvSpPr txBox="1"/>
           <p:nvPr/>
         </p:nvSpPr>
@@ -11966,7 +14305,7 @@
       </p:sp>
       <p:sp>
         <p:nvSpPr>
-          <p:cNvPr id="28" name="TextBox 27"/>
+          <p:cNvPr id="10" name="TextBox 9"/>
           <p:cNvSpPr txBox="1"/>
           <p:nvPr/>
         </p:nvSpPr>
@@ -12004,7 +14343,7 @@
                 </a:solidFill>
                 <a:latin typeface="Red Hat Text"/>
               </a:rPr>
-              <a:t>7</a:t>
+              <a:t>8</a:t>
             </a:r>
           </a:p>
         </p:txBody>
